--- a/slides/lecture06_pointers_and_sync.pptx
+++ b/slides/lecture06_pointers_and_sync.pptx
@@ -5,7 +5,7 @@
     <p:sldMasterId id="2147483648" r:id="rId1"/>
   </p:sldMasterIdLst>
   <p:notesMasterIdLst>
-    <p:notesMasterId r:id="rId28"/>
+    <p:notesMasterId r:id="rId31"/>
   </p:notesMasterIdLst>
   <p:sldIdLst>
     <p:sldId id="256" r:id="rId2"/>
@@ -26,14 +26,17 @@
     <p:sldId id="266" r:id="rId17"/>
     <p:sldId id="267" r:id="rId18"/>
     <p:sldId id="369" r:id="rId19"/>
-    <p:sldId id="377" r:id="rId20"/>
-    <p:sldId id="370" r:id="rId21"/>
-    <p:sldId id="378" r:id="rId22"/>
-    <p:sldId id="379" r:id="rId23"/>
-    <p:sldId id="351" r:id="rId24"/>
-    <p:sldId id="352" r:id="rId25"/>
-    <p:sldId id="353" r:id="rId26"/>
-    <p:sldId id="354" r:id="rId27"/>
+    <p:sldId id="381" r:id="rId20"/>
+    <p:sldId id="377" r:id="rId21"/>
+    <p:sldId id="370" r:id="rId22"/>
+    <p:sldId id="378" r:id="rId23"/>
+    <p:sldId id="379" r:id="rId24"/>
+    <p:sldId id="380" r:id="rId25"/>
+    <p:sldId id="351" r:id="rId26"/>
+    <p:sldId id="352" r:id="rId27"/>
+    <p:sldId id="353" r:id="rId28"/>
+    <p:sldId id="382" r:id="rId29"/>
+    <p:sldId id="354" r:id="rId30"/>
   </p:sldIdLst>
   <p:sldSz cx="12192000" cy="6858000"/>
   <p:notesSz cx="6858000" cy="9144000"/>
@@ -155,13 +158,16 @@
             <p14:sldId id="266"/>
             <p14:sldId id="267"/>
             <p14:sldId id="369"/>
+            <p14:sldId id="381"/>
             <p14:sldId id="377"/>
             <p14:sldId id="370"/>
             <p14:sldId id="378"/>
             <p14:sldId id="379"/>
+            <p14:sldId id="380"/>
             <p14:sldId id="351"/>
             <p14:sldId id="352"/>
             <p14:sldId id="353"/>
+            <p14:sldId id="382"/>
             <p14:sldId id="354"/>
           </p14:sldIdLst>
         </p14:section>
@@ -1742,6 +1748,157 @@
         <p:cNvPr id="1" name="">
           <a:extLst>
             <a:ext uri="{FF2B5EF4-FFF2-40B4-BE49-F238E27FC236}">
+              <a16:creationId xmlns:a16="http://schemas.microsoft.com/office/drawing/2014/main" id="{8E5F609C-16FF-F6F3-3928-94C3533865CE}"/>
+            </a:ext>
+          </a:extLst>
+        </p:cNvPr>
+        <p:cNvGrpSpPr/>
+        <p:nvPr/>
+      </p:nvGrpSpPr>
+      <p:grpSpPr>
+        <a:xfrm>
+          <a:off x="0" y="0"/>
+          <a:ext cx="0" cy="0"/>
+          <a:chOff x="0" y="0"/>
+          <a:chExt cx="0" cy="0"/>
+        </a:xfrm>
+      </p:grpSpPr>
+      <p:sp>
+        <p:nvSpPr>
+          <p:cNvPr id="2" name="Slide Image Placeholder 1">
+            <a:extLst>
+              <a:ext uri="{FF2B5EF4-FFF2-40B4-BE49-F238E27FC236}">
+                <a16:creationId xmlns:a16="http://schemas.microsoft.com/office/drawing/2014/main" id="{0DA26820-896C-B139-B85C-5D2D819CBFDD}"/>
+              </a:ext>
+            </a:extLst>
+          </p:cNvPr>
+          <p:cNvSpPr>
+            <a:spLocks noGrp="1" noRot="1" noChangeAspect="1"/>
+          </p:cNvSpPr>
+          <p:nvPr>
+            <p:ph type="sldImg"/>
+          </p:nvPr>
+        </p:nvSpPr>
+        <p:spPr/>
+      </p:sp>
+      <p:sp>
+        <p:nvSpPr>
+          <p:cNvPr id="3" name="Notes Placeholder 2">
+            <a:extLst>
+              <a:ext uri="{FF2B5EF4-FFF2-40B4-BE49-F238E27FC236}">
+                <a16:creationId xmlns:a16="http://schemas.microsoft.com/office/drawing/2014/main" id="{E0E2789C-E403-2E2C-0D87-55321C4D2D5C}"/>
+              </a:ext>
+            </a:extLst>
+          </p:cNvPr>
+          <p:cNvSpPr>
+            <a:spLocks noGrp="1"/>
+          </p:cNvSpPr>
+          <p:nvPr>
+            <p:ph type="body" idx="1"/>
+          </p:nvPr>
+        </p:nvSpPr>
+        <p:spPr/>
+        <p:txBody>
+          <a:bodyPr/>
+          <a:lstStyle/>
+          <a:p>
+            <a:r>
+              <a:rPr lang="en-GB" b="0"/>
+              <a:t>Dessa </a:t>
+            </a:r>
+            <a:r>
+              <a:rPr lang="sv-SE" b="0"/>
+              <a:t>är de olika </a:t>
+            </a:r>
+            <a:r>
+              <a:rPr lang="sv-SE" b="0" i="1"/>
+              <a:t>kommandon </a:t>
+            </a:r>
+            <a:r>
+              <a:rPr lang="sv-SE" b="0" i="0"/>
+              <a:t>vi kan ge displayen.</a:t>
+            </a:r>
+          </a:p>
+          <a:p>
+            <a:endParaRPr lang="sv-SE" b="0" i="0"/>
+          </a:p>
+          <a:p>
+            <a:r>
+              <a:rPr lang="sv-SE" b="0" i="0"/>
+              <a:t>Förklara att det finns en cursor (address) som man kan flytta på.</a:t>
+            </a:r>
+          </a:p>
+          <a:p>
+            <a:endParaRPr lang="sv-SE" b="0" i="0"/>
+          </a:p>
+          <a:p>
+            <a:r>
+              <a:rPr lang="sv-SE" b="0" i="0"/>
+              <a:t>Förklara att vi för att ge ett kommando sätter RS = 0 och skriver kommandot på datalinorna. </a:t>
+            </a:r>
+          </a:p>
+          <a:p>
+            <a:endParaRPr lang="sv-SE" b="0" i="0"/>
+          </a:p>
+          <a:p>
+            <a:r>
+              <a:rPr lang="sv-SE" b="0" i="0"/>
+              <a:t>Förklara att om RS är 1 så skriver vi istället en bokstav till displayen.</a:t>
+            </a:r>
+            <a:endParaRPr lang="LID4096" b="0" i="1"/>
+          </a:p>
+        </p:txBody>
+      </p:sp>
+      <p:sp>
+        <p:nvSpPr>
+          <p:cNvPr id="4" name="Slide Number Placeholder 3">
+            <a:extLst>
+              <a:ext uri="{FF2B5EF4-FFF2-40B4-BE49-F238E27FC236}">
+                <a16:creationId xmlns:a16="http://schemas.microsoft.com/office/drawing/2014/main" id="{B9A9A51D-C801-A4A0-319E-5C00135E5C33}"/>
+              </a:ext>
+            </a:extLst>
+          </p:cNvPr>
+          <p:cNvSpPr>
+            <a:spLocks noGrp="1"/>
+          </p:cNvSpPr>
+          <p:nvPr>
+            <p:ph type="sldNum" sz="quarter" idx="5"/>
+          </p:nvPr>
+        </p:nvSpPr>
+        <p:spPr/>
+        <p:txBody>
+          <a:bodyPr/>
+          <a:lstStyle/>
+          <a:p>
+            <a:fld id="{01B4E41B-EE32-43AA-BF26-21D12108C66F}" type="slidenum">
+              <a:rPr lang="LID4096" smtClean="0"/>
+              <a:t>19</a:t>
+            </a:fld>
+            <a:endParaRPr lang="LID4096"/>
+          </a:p>
+        </p:txBody>
+      </p:sp>
+    </p:spTree>
+    <p:extLst>
+      <p:ext uri="{BB962C8B-B14F-4D97-AF65-F5344CB8AC3E}">
+        <p14:creationId xmlns:p14="http://schemas.microsoft.com/office/powerpoint/2010/main" val="638158849"/>
+      </p:ext>
+    </p:extLst>
+  </p:cSld>
+  <p:clrMapOvr>
+    <a:masterClrMapping/>
+  </p:clrMapOvr>
+</p:notes>
+</file>
+
+<file path=ppt/notesSlides/notesSlide18.xml><?xml version="1.0" encoding="utf-8"?>
+<p:notes xmlns:a="http://schemas.openxmlformats.org/drawingml/2006/main" xmlns:r="http://schemas.openxmlformats.org/officeDocument/2006/relationships" xmlns:p="http://schemas.openxmlformats.org/presentationml/2006/main">
+  <p:cSld>
+    <p:spTree>
+      <p:nvGrpSpPr>
+        <p:cNvPr id="1" name="">
+          <a:extLst>
+            <a:ext uri="{FF2B5EF4-FFF2-40B4-BE49-F238E27FC236}">
               <a16:creationId xmlns:a16="http://schemas.microsoft.com/office/drawing/2014/main" id="{41340955-CF6C-F642-97FF-42293503AB93}"/>
             </a:ext>
           </a:extLst>
@@ -1798,7 +1955,7 @@
           <a:p>
             <a:r>
               <a:rPr lang="sv-SE" b="0"/>
-              <a:t>Säg att vi vill skriva en bokstav till displayen. Då måste vi följa ett speciellt tidsschema som vi hittar i databladet (eller quickguiden)</a:t>
+              <a:t>Vare sig vi vill skriva ett kommando eller en bokstav så måste vi följa ett speciellt tidsschema som vi hittar i databladet (eller quickguiden)</a:t>
             </a:r>
           </a:p>
           <a:p>
@@ -1922,7 +2079,7 @@
           <a:p>
             <a:fld id="{01B4E41B-EE32-43AA-BF26-21D12108C66F}" type="slidenum">
               <a:rPr lang="LID4096" smtClean="0"/>
-              <a:t>19</a:t>
+              <a:t>20</a:t>
             </a:fld>
             <a:endParaRPr lang="LID4096"/>
           </a:p>
@@ -1941,7 +2098,7 @@
 </p:notes>
 </file>
 
-<file path=ppt/notesSlides/notesSlide18.xml><?xml version="1.0" encoding="utf-8"?>
+<file path=ppt/notesSlides/notesSlide19.xml><?xml version="1.0" encoding="utf-8"?>
 <p:notes xmlns:a="http://schemas.openxmlformats.org/drawingml/2006/main" xmlns:r="http://schemas.openxmlformats.org/officeDocument/2006/relationships" xmlns:p="http://schemas.openxmlformats.org/presentationml/2006/main">
   <p:cSld>
     <p:spTree>
@@ -1996,6 +2153,15 @@
           <a:p>
             <a:r>
               <a:rPr lang="sv-SE"/>
+              <a:t>Klicka igenom registrena översiktligt</a:t>
+            </a:r>
+          </a:p>
+          <a:p>
+            <a:endParaRPr lang="sv-SE"/>
+          </a:p>
+          <a:p>
+            <a:r>
+              <a:rPr lang="sv-SE"/>
               <a:t>(förklara att vi också kan få den att ringa och avbryta oss när den är klar, men då behövs interrupts och det är om två veckor)</a:t>
             </a:r>
           </a:p>
@@ -2021,7 +2187,7 @@
           <a:p>
             <a:fld id="{01B4E41B-EE32-43AA-BF26-21D12108C66F}" type="slidenum">
               <a:rPr lang="LID4096" smtClean="0"/>
-              <a:t>21</a:t>
+              <a:t>22</a:t>
             </a:fld>
             <a:endParaRPr lang="LID4096"/>
           </a:p>
@@ -2040,7 +2206,101 @@
 </p:notes>
 </file>
 
-<file path=ppt/notesSlides/notesSlide19.xml><?xml version="1.0" encoding="utf-8"?>
+<file path=ppt/notesSlides/notesSlide2.xml><?xml version="1.0" encoding="utf-8"?>
+<p:notes xmlns:a="http://schemas.openxmlformats.org/drawingml/2006/main" xmlns:r="http://schemas.openxmlformats.org/officeDocument/2006/relationships" xmlns:p="http://schemas.openxmlformats.org/presentationml/2006/main">
+  <p:cSld>
+    <p:spTree>
+      <p:nvGrpSpPr>
+        <p:cNvPr id="1" name=""/>
+        <p:cNvGrpSpPr/>
+        <p:nvPr/>
+      </p:nvGrpSpPr>
+      <p:grpSpPr>
+        <a:xfrm>
+          <a:off x="0" y="0"/>
+          <a:ext cx="0" cy="0"/>
+          <a:chOff x="0" y="0"/>
+          <a:chExt cx="0" cy="0"/>
+        </a:xfrm>
+      </p:grpSpPr>
+      <p:sp>
+        <p:nvSpPr>
+          <p:cNvPr id="2" name="Slide Image Placeholder 1"/>
+          <p:cNvSpPr>
+            <a:spLocks noGrp="1" noRot="1" noChangeAspect="1"/>
+          </p:cNvSpPr>
+          <p:nvPr>
+            <p:ph type="sldImg"/>
+          </p:nvPr>
+        </p:nvSpPr>
+        <p:spPr/>
+      </p:sp>
+      <p:sp>
+        <p:nvSpPr>
+          <p:cNvPr id="3" name="Notes Placeholder 2"/>
+          <p:cNvSpPr>
+            <a:spLocks noGrp="1"/>
+          </p:cNvSpPr>
+          <p:nvPr>
+            <p:ph type="body" idx="1"/>
+          </p:nvPr>
+        </p:nvSpPr>
+        <p:spPr/>
+        <p:txBody>
+          <a:bodyPr/>
+          <a:lstStyle/>
+          <a:p>
+            <a:r>
+              <a:rPr lang="sv-SE"/>
+              <a:t>Vi börjar med att fundera på var våra variabler i C egentligen ligger i minnet. </a:t>
+            </a:r>
+          </a:p>
+          <a:p>
+            <a:r>
+              <a:rPr lang="sv-SE"/>
+              <a:t>()</a:t>
+            </a:r>
+            <a:endParaRPr lang="LID4096"/>
+          </a:p>
+        </p:txBody>
+      </p:sp>
+      <p:sp>
+        <p:nvSpPr>
+          <p:cNvPr id="4" name="Slide Number Placeholder 3"/>
+          <p:cNvSpPr>
+            <a:spLocks noGrp="1"/>
+          </p:cNvSpPr>
+          <p:nvPr>
+            <p:ph type="sldNum" sz="quarter" idx="5"/>
+          </p:nvPr>
+        </p:nvSpPr>
+        <p:spPr/>
+        <p:txBody>
+          <a:bodyPr/>
+          <a:lstStyle/>
+          <a:p>
+            <a:fld id="{01B4E41B-EE32-43AA-BF26-21D12108C66F}" type="slidenum">
+              <a:rPr lang="LID4096" smtClean="0"/>
+              <a:t>2</a:t>
+            </a:fld>
+            <a:endParaRPr lang="LID4096"/>
+          </a:p>
+        </p:txBody>
+      </p:sp>
+    </p:spTree>
+    <p:extLst>
+      <p:ext uri="{BB962C8B-B14F-4D97-AF65-F5344CB8AC3E}">
+        <p14:creationId xmlns:p14="http://schemas.microsoft.com/office/powerpoint/2010/main" val="3547212106"/>
+      </p:ext>
+    </p:extLst>
+  </p:cSld>
+  <p:clrMapOvr>
+    <a:masterClrMapping/>
+  </p:clrMapOvr>
+</p:notes>
+</file>
+
+<file path=ppt/notesSlides/notesSlide20.xml><?xml version="1.0" encoding="utf-8"?>
 <p:notes xmlns:a="http://schemas.openxmlformats.org/drawingml/2006/main" xmlns:r="http://schemas.openxmlformats.org/officeDocument/2006/relationships" xmlns:p="http://schemas.openxmlformats.org/presentationml/2006/main">
   <p:cSld>
     <p:spTree>
@@ -2111,6 +2371,14 @@
             <a:endParaRPr lang="sv-SE"/>
           </a:p>
           <a:p>
+            <a:r>
+              <a:rPr lang="en-GB"/>
+              <a:t>L</a:t>
+            </a:r>
+            <a:r>
+              <a:rPr lang="sv-SE"/>
+              <a:t>ängsta tiden vi kan vänta är 4000år....</a:t>
+            </a:r>
             <a:endParaRPr lang="LID4096"/>
           </a:p>
         </p:txBody>
@@ -2138,7 +2406,7 @@
           <a:p>
             <a:fld id="{01B4E41B-EE32-43AA-BF26-21D12108C66F}" type="slidenum">
               <a:rPr lang="LID4096" smtClean="0"/>
-              <a:t>22</a:t>
+              <a:t>23</a:t>
             </a:fld>
             <a:endParaRPr lang="LID4096"/>
           </a:p>
@@ -2157,7 +2425,214 @@
 </p:notes>
 </file>
 
-<file path=ppt/notesSlides/notesSlide2.xml><?xml version="1.0" encoding="utf-8"?>
+<file path=ppt/notesSlides/notesSlide21.xml><?xml version="1.0" encoding="utf-8"?>
+<p:notes xmlns:a="http://schemas.openxmlformats.org/drawingml/2006/main" xmlns:r="http://schemas.openxmlformats.org/officeDocument/2006/relationships" xmlns:p="http://schemas.openxmlformats.org/presentationml/2006/main">
+  <p:cSld>
+    <p:spTree>
+      <p:nvGrpSpPr>
+        <p:cNvPr id="1" name="">
+          <a:extLst>
+            <a:ext uri="{FF2B5EF4-FFF2-40B4-BE49-F238E27FC236}">
+              <a16:creationId xmlns:a16="http://schemas.microsoft.com/office/drawing/2014/main" id="{44E15547-27C1-A8F4-E92B-34D7A7547D39}"/>
+            </a:ext>
+          </a:extLst>
+        </p:cNvPr>
+        <p:cNvGrpSpPr/>
+        <p:nvPr/>
+      </p:nvGrpSpPr>
+      <p:grpSpPr>
+        <a:xfrm>
+          <a:off x="0" y="0"/>
+          <a:ext cx="0" cy="0"/>
+          <a:chOff x="0" y="0"/>
+          <a:chExt cx="0" cy="0"/>
+        </a:xfrm>
+      </p:grpSpPr>
+      <p:sp>
+        <p:nvSpPr>
+          <p:cNvPr id="2" name="Slide Image Placeholder 1">
+            <a:extLst>
+              <a:ext uri="{FF2B5EF4-FFF2-40B4-BE49-F238E27FC236}">
+                <a16:creationId xmlns:a16="http://schemas.microsoft.com/office/drawing/2014/main" id="{B8F3F54F-2906-FCD1-1805-171B91FD7E79}"/>
+              </a:ext>
+            </a:extLst>
+          </p:cNvPr>
+          <p:cNvSpPr>
+            <a:spLocks noGrp="1" noRot="1" noChangeAspect="1"/>
+          </p:cNvSpPr>
+          <p:nvPr>
+            <p:ph type="sldImg"/>
+          </p:nvPr>
+        </p:nvSpPr>
+        <p:spPr/>
+      </p:sp>
+      <p:sp>
+        <p:nvSpPr>
+          <p:cNvPr id="3" name="Notes Placeholder 2">
+            <a:extLst>
+              <a:ext uri="{FF2B5EF4-FFF2-40B4-BE49-F238E27FC236}">
+                <a16:creationId xmlns:a16="http://schemas.microsoft.com/office/drawing/2014/main" id="{2FE2F6A3-56EF-DC9F-A46C-6D6A9F4AC225}"/>
+              </a:ext>
+            </a:extLst>
+          </p:cNvPr>
+          <p:cNvSpPr>
+            <a:spLocks noGrp="1"/>
+          </p:cNvSpPr>
+          <p:nvPr>
+            <p:ph type="body" idx="1"/>
+          </p:nvPr>
+        </p:nvSpPr>
+        <p:spPr/>
+        <p:txBody>
+          <a:bodyPr/>
+          <a:lstStyle/>
+          <a:p>
+            <a:r>
+              <a:rPr lang="sv-SE" b="0"/>
+              <a:t>Säg att vi vill skriva en bokstav till displayen. Då måste vi följa ett speciellt tidsschema som vi hittar i databladet (eller quickguiden)</a:t>
+            </a:r>
+          </a:p>
+          <a:p>
+            <a:endParaRPr lang="sv-SE" b="0"/>
+          </a:p>
+          <a:p>
+            <a:r>
+              <a:rPr lang="sv-SE" b="0"/>
+              <a:t>Schemat säger att vi först måste välja RS (command or 1=</a:t>
+            </a:r>
+            <a:r>
+              <a:rPr lang="sv-SE" b="1"/>
+              <a:t>data</a:t>
+            </a:r>
+            <a:r>
+              <a:rPr lang="sv-SE" b="0"/>
+              <a:t>) och RW (read or </a:t>
+            </a:r>
+            <a:r>
+              <a:rPr lang="sv-SE" b="1"/>
+              <a:t>write</a:t>
+            </a:r>
+            <a:r>
+              <a:rPr lang="sv-SE" b="0"/>
+              <a:t>) signalerna. </a:t>
+            </a:r>
+          </a:p>
+          <a:p>
+            <a:r>
+              <a:rPr lang="sv-SE" b="0"/>
+              <a:t>Vi sätter alltså signalerna RS som 1 och RW som 0.</a:t>
+            </a:r>
+          </a:p>
+          <a:p>
+            <a:r>
+              <a:rPr lang="sv-SE" b="0"/>
+              <a:t>Sedan måste vi </a:t>
+            </a:r>
+            <a:r>
+              <a:rPr lang="sv-SE" b="0" i="1"/>
+              <a:t>vänta</a:t>
+            </a:r>
+            <a:r>
+              <a:rPr lang="sv-SE" b="0" i="0"/>
+              <a:t> en stund, innan signalerna stabiliserats, och vi kan starta överföringen genom att sätta E hög.</a:t>
+            </a:r>
+          </a:p>
+          <a:p>
+            <a:r>
+              <a:rPr lang="sv-SE" b="0" i="0"/>
+              <a:t>Nu skall vi lägga bokstaven vi vill skriva på datalinorna. </a:t>
+            </a:r>
+          </a:p>
+          <a:p>
+            <a:r>
+              <a:rPr lang="sv-SE" b="0" i="0"/>
+              <a:t>tsu2 visar minsta tiden som dessa måste legat ute innan vi får lov att säga till maskinen att läsa linorna, genom att sätta E låg. </a:t>
+            </a:r>
+          </a:p>
+          <a:p>
+            <a:r>
+              <a:rPr lang="sv-SE" b="0" i="0"/>
+              <a:t>Efter ett h blivit låg måste vi sedan vänta th, tills displayen processat klart, innan vi kan ändra någon av signalerna. </a:t>
+            </a:r>
+          </a:p>
+          <a:p>
+            <a:endParaRPr lang="sv-SE" b="0" i="0"/>
+          </a:p>
+          <a:p>
+            <a:r>
+              <a:rPr lang="sv-SE" b="0" i="0"/>
+              <a:t>I labbförberedelsen skall ni skriva koden som utför dom här skrivningarna och läsningarna. </a:t>
+            </a:r>
+          </a:p>
+          <a:p>
+            <a:endParaRPr lang="sv-SE" b="0" i="0"/>
+          </a:p>
+          <a:p>
+            <a:r>
+              <a:rPr lang="sv-SE" b="0" i="0"/>
+              <a:t>Då måste ni kunna göra delay! Hur gör man det? </a:t>
+            </a:r>
+          </a:p>
+          <a:p>
+            <a:endParaRPr lang="sv-SE" b="0" i="0"/>
+          </a:p>
+          <a:p>
+            <a:endParaRPr lang="sv-SE" b="0" i="0"/>
+          </a:p>
+          <a:p>
+            <a:endParaRPr lang="sv-SE" b="0" i="0"/>
+          </a:p>
+          <a:p>
+            <a:endParaRPr lang="sv-SE" b="0" i="0"/>
+          </a:p>
+          <a:p>
+            <a:endParaRPr lang="sv-SE" b="0" i="0"/>
+          </a:p>
+        </p:txBody>
+      </p:sp>
+      <p:sp>
+        <p:nvSpPr>
+          <p:cNvPr id="4" name="Slide Number Placeholder 3">
+            <a:extLst>
+              <a:ext uri="{FF2B5EF4-FFF2-40B4-BE49-F238E27FC236}">
+                <a16:creationId xmlns:a16="http://schemas.microsoft.com/office/drawing/2014/main" id="{6A5966A8-6275-8809-B766-2342431D3C11}"/>
+              </a:ext>
+            </a:extLst>
+          </p:cNvPr>
+          <p:cNvSpPr>
+            <a:spLocks noGrp="1"/>
+          </p:cNvSpPr>
+          <p:nvPr>
+            <p:ph type="sldNum" sz="quarter" idx="5"/>
+          </p:nvPr>
+        </p:nvSpPr>
+        <p:spPr/>
+        <p:txBody>
+          <a:bodyPr/>
+          <a:lstStyle/>
+          <a:p>
+            <a:fld id="{01B4E41B-EE32-43AA-BF26-21D12108C66F}" type="slidenum">
+              <a:rPr lang="LID4096" smtClean="0"/>
+              <a:t>24</a:t>
+            </a:fld>
+            <a:endParaRPr lang="LID4096"/>
+          </a:p>
+        </p:txBody>
+      </p:sp>
+    </p:spTree>
+    <p:extLst>
+      <p:ext uri="{BB962C8B-B14F-4D97-AF65-F5344CB8AC3E}">
+        <p14:creationId xmlns:p14="http://schemas.microsoft.com/office/powerpoint/2010/main" val="2214967472"/>
+      </p:ext>
+    </p:extLst>
+  </p:cSld>
+  <p:clrMapOvr>
+    <a:masterClrMapping/>
+  </p:clrMapOvr>
+</p:notes>
+</file>
+
+<file path=ppt/notesSlides/notesSlide22.xml><?xml version="1.0" encoding="utf-8"?>
 <p:notes xmlns:a="http://schemas.openxmlformats.org/drawingml/2006/main" xmlns:r="http://schemas.openxmlformats.org/officeDocument/2006/relationships" xmlns:p="http://schemas.openxmlformats.org/presentationml/2006/main">
   <p:cSld>
     <p:spTree>
@@ -2203,14 +2678,31 @@
           <a:p>
             <a:r>
               <a:rPr lang="sv-SE"/>
-              <a:t>Vi börjar med att fundera på var våra variabler i C egentligen ligger i minnet. </a:t>
+              <a:t>Att använda arrays i C är väldigt likt hur vi gör i Java. </a:t>
             </a:r>
           </a:p>
           <a:p>
             <a:r>
               <a:rPr lang="sv-SE"/>
-              <a:t>()</a:t>
-            </a:r>
+              <a:t>En array är en lista av objekt av en viss datatyp, vars storlek är känd när den deklareras (man kan inte ändra storleken på en array). </a:t>
+            </a:r>
+          </a:p>
+          <a:p>
+            <a:r>
+              <a:rPr lang="sv-SE"/>
+              <a:t>Gå snabbt igenom vad programmet skall göra. </a:t>
+            </a:r>
+          </a:p>
+          <a:p>
+            <a:r>
+              <a:rPr lang="en-GB"/>
+              <a:t>&lt;click&gt;</a:t>
+            </a:r>
+          </a:p>
+          <a:p>
+            <a:endParaRPr lang="sv-SE"/>
+          </a:p>
+          <a:p>
             <a:endParaRPr lang="LID4096"/>
           </a:p>
         </p:txBody>
@@ -2230,120 +2722,9 @@
           <a:bodyPr/>
           <a:lstStyle/>
           <a:p>
-            <a:fld id="{01B4E41B-EE32-43AA-BF26-21D12108C66F}" type="slidenum">
-              <a:rPr lang="LID4096" smtClean="0"/>
-              <a:t>2</a:t>
-            </a:fld>
-            <a:endParaRPr lang="LID4096"/>
-          </a:p>
-        </p:txBody>
-      </p:sp>
-    </p:spTree>
-    <p:extLst>
-      <p:ext uri="{BB962C8B-B14F-4D97-AF65-F5344CB8AC3E}">
-        <p14:creationId xmlns:p14="http://schemas.microsoft.com/office/powerpoint/2010/main" val="3547212106"/>
-      </p:ext>
-    </p:extLst>
-  </p:cSld>
-  <p:clrMapOvr>
-    <a:masterClrMapping/>
-  </p:clrMapOvr>
-</p:notes>
-</file>
-
-<file path=ppt/notesSlides/notesSlide20.xml><?xml version="1.0" encoding="utf-8"?>
-<p:notes xmlns:a="http://schemas.openxmlformats.org/drawingml/2006/main" xmlns:r="http://schemas.openxmlformats.org/officeDocument/2006/relationships" xmlns:p="http://schemas.openxmlformats.org/presentationml/2006/main">
-  <p:cSld>
-    <p:spTree>
-      <p:nvGrpSpPr>
-        <p:cNvPr id="1" name=""/>
-        <p:cNvGrpSpPr/>
-        <p:nvPr/>
-      </p:nvGrpSpPr>
-      <p:grpSpPr>
-        <a:xfrm>
-          <a:off x="0" y="0"/>
-          <a:ext cx="0" cy="0"/>
-          <a:chOff x="0" y="0"/>
-          <a:chExt cx="0" cy="0"/>
-        </a:xfrm>
-      </p:grpSpPr>
-      <p:sp>
-        <p:nvSpPr>
-          <p:cNvPr id="2" name="Slide Image Placeholder 1"/>
-          <p:cNvSpPr>
-            <a:spLocks noGrp="1" noRot="1" noChangeAspect="1"/>
-          </p:cNvSpPr>
-          <p:nvPr>
-            <p:ph type="sldImg"/>
-          </p:nvPr>
-        </p:nvSpPr>
-        <p:spPr/>
-      </p:sp>
-      <p:sp>
-        <p:nvSpPr>
-          <p:cNvPr id="3" name="Notes Placeholder 2"/>
-          <p:cNvSpPr>
-            <a:spLocks noGrp="1"/>
-          </p:cNvSpPr>
-          <p:nvPr>
-            <p:ph type="body" idx="1"/>
-          </p:nvPr>
-        </p:nvSpPr>
-        <p:spPr/>
-        <p:txBody>
-          <a:bodyPr/>
-          <a:lstStyle/>
-          <a:p>
-            <a:r>
-              <a:rPr lang="sv-SE"/>
-              <a:t>Att använda arrays i C är väldigt likt hur vi gör i Java. </a:t>
-            </a:r>
-          </a:p>
-          <a:p>
-            <a:r>
-              <a:rPr lang="sv-SE"/>
-              <a:t>En array är en lista av objekt av en viss datatyp, vars storlek är känd när den deklareras (man kan inte ändra storleken på en array). </a:t>
-            </a:r>
-          </a:p>
-          <a:p>
-            <a:r>
-              <a:rPr lang="sv-SE"/>
-              <a:t>Gå snabbt igenom vad programmet skall göra. </a:t>
-            </a:r>
-          </a:p>
-          <a:p>
-            <a:r>
-              <a:rPr lang="en-GB"/>
-              <a:t>&lt;click&gt;</a:t>
-            </a:r>
-          </a:p>
-          <a:p>
-            <a:endParaRPr lang="sv-SE"/>
-          </a:p>
-          <a:p>
-            <a:endParaRPr lang="LID4096"/>
-          </a:p>
-        </p:txBody>
-      </p:sp>
-      <p:sp>
-        <p:nvSpPr>
-          <p:cNvPr id="4" name="Slide Number Placeholder 3"/>
-          <p:cNvSpPr>
-            <a:spLocks noGrp="1"/>
-          </p:cNvSpPr>
-          <p:nvPr>
-            <p:ph type="sldNum" sz="quarter" idx="5"/>
-          </p:nvPr>
-        </p:nvSpPr>
-        <p:spPr/>
-        <p:txBody>
-          <a:bodyPr/>
-          <a:lstStyle/>
-          <a:p>
             <a:fld id="{2476C796-BAB8-4B04-BD32-E3AC4AD1DCA6}" type="slidenum">
               <a:rPr lang="LID4096" smtClean="0"/>
-              <a:t>23</a:t>
+              <a:t>25</a:t>
             </a:fld>
             <a:endParaRPr lang="LID4096"/>
           </a:p>
@@ -2362,7 +2743,7 @@
 </p:notes>
 </file>
 
-<file path=ppt/notesSlides/notesSlide21.xml><?xml version="1.0" encoding="utf-8"?>
+<file path=ppt/notesSlides/notesSlide23.xml><?xml version="1.0" encoding="utf-8"?>
 <p:notes xmlns:a="http://schemas.openxmlformats.org/drawingml/2006/main" xmlns:r="http://schemas.openxmlformats.org/officeDocument/2006/relationships" xmlns:p="http://schemas.openxmlformats.org/presentationml/2006/main">
   <p:cSld>
     <p:spTree>
@@ -2534,7 +2915,7 @@
           <a:p>
             <a:fld id="{2476C796-BAB8-4B04-BD32-E3AC4AD1DCA6}" type="slidenum">
               <a:rPr lang="LID4096" smtClean="0"/>
-              <a:t>24</a:t>
+              <a:t>26</a:t>
             </a:fld>
             <a:endParaRPr lang="LID4096"/>
           </a:p>
@@ -2553,7 +2934,7 @@
 </p:notes>
 </file>
 
-<file path=ppt/notesSlides/notesSlide22.xml><?xml version="1.0" encoding="utf-8"?>
+<file path=ppt/notesSlides/notesSlide24.xml><?xml version="1.0" encoding="utf-8"?>
 <p:notes xmlns:a="http://schemas.openxmlformats.org/drawingml/2006/main" xmlns:r="http://schemas.openxmlformats.org/officeDocument/2006/relationships" xmlns:p="http://schemas.openxmlformats.org/presentationml/2006/main">
   <p:cSld>
     <p:spTree>
@@ -2621,7 +3002,9 @@
               <a:rPr lang="sv-SE" i="0"/>
               <a:t>Gå igenom. </a:t>
             </a:r>
-            <a:endParaRPr lang="sv-SE" i="1"/>
+          </a:p>
+          <a:p>
+            <a:endParaRPr lang="sv-SE" i="0"/>
           </a:p>
         </p:txBody>
       </p:sp>
@@ -2642,7 +3025,7 @@
           <a:p>
             <a:fld id="{2476C796-BAB8-4B04-BD32-E3AC4AD1DCA6}" type="slidenum">
               <a:rPr lang="LID4096" smtClean="0"/>
-              <a:t>25</a:t>
+              <a:t>27</a:t>
             </a:fld>
             <a:endParaRPr lang="LID4096"/>
           </a:p>
@@ -2661,7 +3044,95 @@
 </p:notes>
 </file>
 
-<file path=ppt/notesSlides/notesSlide23.xml><?xml version="1.0" encoding="utf-8"?>
+<file path=ppt/notesSlides/notesSlide25.xml><?xml version="1.0" encoding="utf-8"?>
+<p:notes xmlns:a="http://schemas.openxmlformats.org/drawingml/2006/main" xmlns:r="http://schemas.openxmlformats.org/officeDocument/2006/relationships" xmlns:p="http://schemas.openxmlformats.org/presentationml/2006/main">
+  <p:cSld>
+    <p:spTree>
+      <p:nvGrpSpPr>
+        <p:cNvPr id="1" name=""/>
+        <p:cNvGrpSpPr/>
+        <p:nvPr/>
+      </p:nvGrpSpPr>
+      <p:grpSpPr>
+        <a:xfrm>
+          <a:off x="0" y="0"/>
+          <a:ext cx="0" cy="0"/>
+          <a:chOff x="0" y="0"/>
+          <a:chExt cx="0" cy="0"/>
+        </a:xfrm>
+      </p:grpSpPr>
+      <p:sp>
+        <p:nvSpPr>
+          <p:cNvPr id="2" name="Slide Image Placeholder 1"/>
+          <p:cNvSpPr>
+            <a:spLocks noGrp="1" noRot="1" noChangeAspect="1"/>
+          </p:cNvSpPr>
+          <p:nvPr>
+            <p:ph type="sldImg"/>
+          </p:nvPr>
+        </p:nvSpPr>
+        <p:spPr/>
+      </p:sp>
+      <p:sp>
+        <p:nvSpPr>
+          <p:cNvPr id="3" name="Notes Placeholder 2"/>
+          <p:cNvSpPr>
+            <a:spLocks noGrp="1"/>
+          </p:cNvSpPr>
+          <p:nvPr>
+            <p:ph type="body" idx="1"/>
+          </p:nvPr>
+        </p:nvSpPr>
+        <p:spPr/>
+        <p:txBody>
+          <a:bodyPr/>
+          <a:lstStyle/>
+          <a:p>
+            <a:r>
+              <a:rPr lang="sv-SE"/>
+              <a:t>Kläm in vanligaste felet med pekararitmetik och ställ som fråga</a:t>
+            </a:r>
+            <a:endParaRPr lang="LID4096"/>
+          </a:p>
+        </p:txBody>
+      </p:sp>
+      <p:sp>
+        <p:nvSpPr>
+          <p:cNvPr id="4" name="Slide Number Placeholder 3"/>
+          <p:cNvSpPr>
+            <a:spLocks noGrp="1"/>
+          </p:cNvSpPr>
+          <p:nvPr>
+            <p:ph type="sldNum" sz="quarter" idx="5"/>
+          </p:nvPr>
+        </p:nvSpPr>
+        <p:spPr/>
+        <p:txBody>
+          <a:bodyPr/>
+          <a:lstStyle/>
+          <a:p>
+            <a:fld id="{01B4E41B-EE32-43AA-BF26-21D12108C66F}" type="slidenum">
+              <a:rPr lang="LID4096" smtClean="0"/>
+              <a:t>28</a:t>
+            </a:fld>
+            <a:endParaRPr lang="LID4096"/>
+          </a:p>
+        </p:txBody>
+      </p:sp>
+    </p:spTree>
+    <p:extLst>
+      <p:ext uri="{BB962C8B-B14F-4D97-AF65-F5344CB8AC3E}">
+        <p14:creationId xmlns:p14="http://schemas.microsoft.com/office/powerpoint/2010/main" val="2890699810"/>
+      </p:ext>
+    </p:extLst>
+  </p:cSld>
+  <p:clrMapOvr>
+    <a:masterClrMapping/>
+  </p:clrMapOvr>
+</p:notes>
+</file>
+
+<file path=ppt/notesSlides/notesSlide26.xml><?xml version="1.0" encoding="utf-8"?>
 <p:notes xmlns:a="http://schemas.openxmlformats.org/drawingml/2006/main" xmlns:r="http://schemas.openxmlformats.org/officeDocument/2006/relationships" xmlns:p="http://schemas.openxmlformats.org/presentationml/2006/main">
   <p:cSld>
     <p:spTree>
@@ -2774,7 +3245,7 @@
           <a:p>
             <a:fld id="{2476C796-BAB8-4B04-BD32-E3AC4AD1DCA6}" type="slidenum">
               <a:rPr lang="LID4096" smtClean="0"/>
-              <a:t>26</a:t>
+              <a:t>29</a:t>
             </a:fld>
             <a:endParaRPr lang="LID4096"/>
           </a:p>
@@ -20613,6 +21084,1192 @@
         <p:cNvPr id="1" name="">
           <a:extLst>
             <a:ext uri="{FF2B5EF4-FFF2-40B4-BE49-F238E27FC236}">
+              <a16:creationId xmlns:a16="http://schemas.microsoft.com/office/drawing/2014/main" id="{16641E92-EAF6-C825-6073-3078B9F07BFF}"/>
+            </a:ext>
+          </a:extLst>
+        </p:cNvPr>
+        <p:cNvGrpSpPr/>
+        <p:nvPr/>
+      </p:nvGrpSpPr>
+      <p:grpSpPr>
+        <a:xfrm>
+          <a:off x="0" y="0"/>
+          <a:ext cx="0" cy="0"/>
+          <a:chOff x="0" y="0"/>
+          <a:chExt cx="0" cy="0"/>
+        </a:xfrm>
+      </p:grpSpPr>
+      <p:sp>
+        <p:nvSpPr>
+          <p:cNvPr id="2" name="Title 1">
+            <a:extLst>
+              <a:ext uri="{FF2B5EF4-FFF2-40B4-BE49-F238E27FC236}">
+                <a16:creationId xmlns:a16="http://schemas.microsoft.com/office/drawing/2014/main" id="{CCC784B7-1512-CF95-923A-E5C7826BF85F}"/>
+              </a:ext>
+            </a:extLst>
+          </p:cNvPr>
+          <p:cNvSpPr>
+            <a:spLocks noGrp="1"/>
+          </p:cNvSpPr>
+          <p:nvPr>
+            <p:ph type="title"/>
+          </p:nvPr>
+        </p:nvSpPr>
+        <p:spPr/>
+        <p:txBody>
+          <a:bodyPr/>
+          <a:lstStyle/>
+          <a:p>
+            <a:r>
+              <a:rPr lang="en-GB"/>
+              <a:t>ASCII Displayen - Kommandon</a:t>
+            </a:r>
+            <a:endParaRPr lang="LID4096"/>
+          </a:p>
+        </p:txBody>
+      </p:sp>
+      <p:pic>
+        <p:nvPicPr>
+          <p:cNvPr id="5" name="Picture 4">
+            <a:extLst>
+              <a:ext uri="{FF2B5EF4-FFF2-40B4-BE49-F238E27FC236}">
+                <a16:creationId xmlns:a16="http://schemas.microsoft.com/office/drawing/2014/main" id="{53749A86-9653-3F84-568D-2FC349852AFE}"/>
+              </a:ext>
+            </a:extLst>
+          </p:cNvPr>
+          <p:cNvPicPr>
+            <a:picLocks noChangeAspect="1"/>
+          </p:cNvPicPr>
+          <p:nvPr/>
+        </p:nvPicPr>
+        <p:blipFill>
+          <a:blip r:embed="rId3"/>
+          <a:stretch>
+            <a:fillRect/>
+          </a:stretch>
+        </p:blipFill>
+        <p:spPr>
+          <a:xfrm rot="16200000">
+            <a:off x="6518278" y="2383891"/>
+            <a:ext cx="3964994" cy="3299338"/>
+          </a:xfrm>
+          <a:prstGeom prst="rect">
+            <a:avLst/>
+          </a:prstGeom>
+        </p:spPr>
+      </p:pic>
+      <p:sp>
+        <p:nvSpPr>
+          <p:cNvPr id="9" name="TextBox 8">
+            <a:extLst>
+              <a:ext uri="{FF2B5EF4-FFF2-40B4-BE49-F238E27FC236}">
+                <a16:creationId xmlns:a16="http://schemas.microsoft.com/office/drawing/2014/main" id="{4152BD01-B086-D552-0B79-388AB3D6C59D}"/>
+              </a:ext>
+            </a:extLst>
+          </p:cNvPr>
+          <p:cNvSpPr txBox="1"/>
+          <p:nvPr/>
+        </p:nvSpPr>
+        <p:spPr>
+          <a:xfrm>
+            <a:off x="7735911" y="2695977"/>
+            <a:ext cx="1531188" cy="369332"/>
+          </a:xfrm>
+          <a:prstGeom prst="rect">
+            <a:avLst/>
+          </a:prstGeom>
+          <a:noFill/>
+        </p:spPr>
+        <p:txBody>
+          <a:bodyPr wrap="none" rtlCol="0">
+            <a:spAutoFit/>
+          </a:bodyPr>
+          <a:lstStyle/>
+          <a:p>
+            <a:r>
+              <a:rPr lang="sv-SE">
+                <a:solidFill>
+                  <a:schemeClr val="accent3">
+                    <a:lumMod val="20000"/>
+                    <a:lumOff val="80000"/>
+                  </a:schemeClr>
+                </a:solidFill>
+                <a:latin typeface="Cascadia Mono" panose="020B0609020000020004" pitchFamily="49" charset="0"/>
+                <a:cs typeface="Cascadia Mono" panose="020B0609020000020004" pitchFamily="49" charset="0"/>
+              </a:rPr>
+              <a:t>Mop Rules!</a:t>
+            </a:r>
+            <a:endParaRPr lang="LID4096">
+              <a:solidFill>
+                <a:schemeClr val="accent3">
+                  <a:lumMod val="20000"/>
+                  <a:lumOff val="80000"/>
+                </a:schemeClr>
+              </a:solidFill>
+              <a:latin typeface="Cascadia Mono" panose="020B0609020000020004" pitchFamily="49" charset="0"/>
+              <a:cs typeface="Cascadia Mono" panose="020B0609020000020004" pitchFamily="49" charset="0"/>
+            </a:endParaRPr>
+          </a:p>
+        </p:txBody>
+      </p:sp>
+      <p:sp>
+        <p:nvSpPr>
+          <p:cNvPr id="15" name="TextBox 14">
+            <a:extLst>
+              <a:ext uri="{FF2B5EF4-FFF2-40B4-BE49-F238E27FC236}">
+                <a16:creationId xmlns:a16="http://schemas.microsoft.com/office/drawing/2014/main" id="{9B239A00-66FB-839F-8542-DDD1AB78BCA2}"/>
+              </a:ext>
+            </a:extLst>
+          </p:cNvPr>
+          <p:cNvSpPr txBox="1"/>
+          <p:nvPr/>
+        </p:nvSpPr>
+        <p:spPr>
+          <a:xfrm>
+            <a:off x="5040608" y="5834202"/>
+            <a:ext cx="914400" cy="276999"/>
+          </a:xfrm>
+          <a:prstGeom prst="rect">
+            <a:avLst/>
+          </a:prstGeom>
+          <a:noFill/>
+        </p:spPr>
+        <p:txBody>
+          <a:bodyPr wrap="square" lIns="0" tIns="0" rIns="0" bIns="0" rtlCol="0" anchor="t" anchorCtr="0">
+            <a:spAutoFit/>
+          </a:bodyPr>
+          <a:lstStyle/>
+          <a:p>
+            <a:pPr algn="l">
+              <a:lnSpc>
+                <a:spcPct val="90000"/>
+              </a:lnSpc>
+              <a:spcBef>
+                <a:spcPts val="600"/>
+              </a:spcBef>
+              <a:spcAft>
+                <a:spcPts val="400"/>
+              </a:spcAft>
+            </a:pPr>
+            <a:r>
+              <a:rPr lang="en-GB" sz="2000">
+                <a:latin typeface="Arial" panose="020B0604020202020204" pitchFamily="34" charset="0"/>
+                <a:cs typeface="Arial" panose="020B0604020202020204" pitchFamily="34" charset="0"/>
+              </a:rPr>
+              <a:t>Data</a:t>
+            </a:r>
+            <a:endParaRPr lang="en-GB" sz="2000" dirty="0">
+              <a:latin typeface="Arial" panose="020B0604020202020204" pitchFamily="34" charset="0"/>
+              <a:cs typeface="Arial" panose="020B0604020202020204" pitchFamily="34" charset="0"/>
+            </a:endParaRPr>
+          </a:p>
+        </p:txBody>
+      </p:sp>
+      <p:pic>
+        <p:nvPicPr>
+          <p:cNvPr id="21" name="Picture 20">
+            <a:extLst>
+              <a:ext uri="{FF2B5EF4-FFF2-40B4-BE49-F238E27FC236}">
+                <a16:creationId xmlns:a16="http://schemas.microsoft.com/office/drawing/2014/main" id="{4F7B1D0F-367C-4810-3F27-D506488DA2A5}"/>
+              </a:ext>
+            </a:extLst>
+          </p:cNvPr>
+          <p:cNvPicPr>
+            <a:picLocks noChangeAspect="1"/>
+          </p:cNvPicPr>
+          <p:nvPr/>
+        </p:nvPicPr>
+        <p:blipFill>
+          <a:blip r:embed="rId4"/>
+          <a:stretch>
+            <a:fillRect/>
+          </a:stretch>
+        </p:blipFill>
+        <p:spPr>
+          <a:xfrm>
+            <a:off x="5031303" y="6206346"/>
+            <a:ext cx="3236025" cy="340167"/>
+          </a:xfrm>
+          <a:prstGeom prst="rect">
+            <a:avLst/>
+          </a:prstGeom>
+        </p:spPr>
+      </p:pic>
+      <p:pic>
+        <p:nvPicPr>
+          <p:cNvPr id="23" name="Picture 22">
+            <a:extLst>
+              <a:ext uri="{FF2B5EF4-FFF2-40B4-BE49-F238E27FC236}">
+                <a16:creationId xmlns:a16="http://schemas.microsoft.com/office/drawing/2014/main" id="{61615A78-6F96-9EA9-2E60-F24D831BFB26}"/>
+              </a:ext>
+            </a:extLst>
+          </p:cNvPr>
+          <p:cNvPicPr>
+            <a:picLocks noChangeAspect="1"/>
+          </p:cNvPicPr>
+          <p:nvPr/>
+        </p:nvPicPr>
+        <p:blipFill>
+          <a:blip r:embed="rId5"/>
+          <a:stretch>
+            <a:fillRect/>
+          </a:stretch>
+        </p:blipFill>
+        <p:spPr>
+          <a:xfrm>
+            <a:off x="8644118" y="6244022"/>
+            <a:ext cx="3295228" cy="264817"/>
+          </a:xfrm>
+          <a:prstGeom prst="rect">
+            <a:avLst/>
+          </a:prstGeom>
+        </p:spPr>
+      </p:pic>
+      <p:sp>
+        <p:nvSpPr>
+          <p:cNvPr id="24" name="Freeform: Shape 23">
+            <a:extLst>
+              <a:ext uri="{FF2B5EF4-FFF2-40B4-BE49-F238E27FC236}">
+                <a16:creationId xmlns:a16="http://schemas.microsoft.com/office/drawing/2014/main" id="{BB2778F6-B987-516F-D141-8B9A70F5E26F}"/>
+              </a:ext>
+            </a:extLst>
+          </p:cNvPr>
+          <p:cNvSpPr/>
+          <p:nvPr/>
+        </p:nvSpPr>
+        <p:spPr>
+          <a:xfrm>
+            <a:off x="8470433" y="5212854"/>
+            <a:ext cx="595268" cy="369332"/>
+          </a:xfrm>
+          <a:custGeom>
+            <a:avLst/>
+            <a:gdLst>
+              <a:gd name="csX0" fmla="*/ 408509 w 762626"/>
+              <a:gd name="csY0" fmla="*/ 67479 h 469838"/>
+              <a:gd name="csX1" fmla="*/ 72333 w 762626"/>
+              <a:gd name="csY1" fmla="*/ 67479 h 469838"/>
+              <a:gd name="csX2" fmla="*/ 11821 w 762626"/>
+              <a:gd name="csY2" fmla="*/ 302803 h 469838"/>
+              <a:gd name="csX3" fmla="*/ 240421 w 762626"/>
+              <a:gd name="csY3" fmla="*/ 443997 h 469838"/>
+              <a:gd name="csX4" fmla="*/ 657280 w 762626"/>
+              <a:gd name="csY4" fmla="*/ 457444 h 469838"/>
+              <a:gd name="csX5" fmla="*/ 751409 w 762626"/>
+              <a:gd name="csY5" fmla="*/ 309526 h 469838"/>
+              <a:gd name="csX6" fmla="*/ 711068 w 762626"/>
+              <a:gd name="csY6" fmla="*/ 80926 h 469838"/>
+              <a:gd name="csX7" fmla="*/ 307656 w 762626"/>
+              <a:gd name="csY7" fmla="*/ 244 h 469838"/>
+              <a:gd name="csX8" fmla="*/ 146291 w 762626"/>
+              <a:gd name="csY8" fmla="*/ 60755 h 469838"/>
+            </a:gdLst>
+            <a:ahLst/>
+            <a:cxnLst>
+              <a:cxn ang="0">
+                <a:pos x="csX0" y="csY0"/>
+              </a:cxn>
+              <a:cxn ang="0">
+                <a:pos x="csX1" y="csY1"/>
+              </a:cxn>
+              <a:cxn ang="0">
+                <a:pos x="csX2" y="csY2"/>
+              </a:cxn>
+              <a:cxn ang="0">
+                <a:pos x="csX3" y="csY3"/>
+              </a:cxn>
+              <a:cxn ang="0">
+                <a:pos x="csX4" y="csY4"/>
+              </a:cxn>
+              <a:cxn ang="0">
+                <a:pos x="csX5" y="csY5"/>
+              </a:cxn>
+              <a:cxn ang="0">
+                <a:pos x="csX6" y="csY6"/>
+              </a:cxn>
+              <a:cxn ang="0">
+                <a:pos x="csX7" y="csY7"/>
+              </a:cxn>
+              <a:cxn ang="0">
+                <a:pos x="csX8" y="csY8"/>
+              </a:cxn>
+            </a:cxnLst>
+            <a:rect l="l" t="t" r="r" b="b"/>
+            <a:pathLst>
+              <a:path w="762626" h="469838">
+                <a:moveTo>
+                  <a:pt x="408509" y="67479"/>
+                </a:moveTo>
+                <a:cubicBezTo>
+                  <a:pt x="273478" y="47868"/>
+                  <a:pt x="138448" y="28258"/>
+                  <a:pt x="72333" y="67479"/>
+                </a:cubicBezTo>
+                <a:cubicBezTo>
+                  <a:pt x="6218" y="106700"/>
+                  <a:pt x="-16194" y="240050"/>
+                  <a:pt x="11821" y="302803"/>
+                </a:cubicBezTo>
+                <a:cubicBezTo>
+                  <a:pt x="39836" y="365556"/>
+                  <a:pt x="132844" y="418223"/>
+                  <a:pt x="240421" y="443997"/>
+                </a:cubicBezTo>
+                <a:cubicBezTo>
+                  <a:pt x="347998" y="469771"/>
+                  <a:pt x="572115" y="479856"/>
+                  <a:pt x="657280" y="457444"/>
+                </a:cubicBezTo>
+                <a:cubicBezTo>
+                  <a:pt x="742445" y="435032"/>
+                  <a:pt x="742444" y="372279"/>
+                  <a:pt x="751409" y="309526"/>
+                </a:cubicBezTo>
+                <a:cubicBezTo>
+                  <a:pt x="760374" y="246773"/>
+                  <a:pt x="785027" y="132473"/>
+                  <a:pt x="711068" y="80926"/>
+                </a:cubicBezTo>
+                <a:cubicBezTo>
+                  <a:pt x="637109" y="29379"/>
+                  <a:pt x="401785" y="3606"/>
+                  <a:pt x="307656" y="244"/>
+                </a:cubicBezTo>
+                <a:cubicBezTo>
+                  <a:pt x="213527" y="-3118"/>
+                  <a:pt x="179909" y="28818"/>
+                  <a:pt x="146291" y="60755"/>
+                </a:cubicBezTo>
+              </a:path>
+            </a:pathLst>
+          </a:custGeom>
+          <a:noFill/>
+          <a:ln w="38100">
+            <a:solidFill>
+              <a:srgbClr val="FFC000"/>
+            </a:solidFill>
+          </a:ln>
+        </p:spPr>
+        <p:style>
+          <a:lnRef idx="2">
+            <a:schemeClr val="accent1">
+              <a:shade val="15000"/>
+            </a:schemeClr>
+          </a:lnRef>
+          <a:fillRef idx="1">
+            <a:schemeClr val="accent1"/>
+          </a:fillRef>
+          <a:effectRef idx="0">
+            <a:schemeClr val="accent1"/>
+          </a:effectRef>
+          <a:fontRef idx="minor">
+            <a:schemeClr val="lt1"/>
+          </a:fontRef>
+        </p:style>
+        <p:txBody>
+          <a:bodyPr rtlCol="0" anchor="ctr"/>
+          <a:lstStyle/>
+          <a:p>
+            <a:pPr algn="ctr"/>
+            <a:endParaRPr lang="en-GB"/>
+          </a:p>
+        </p:txBody>
+      </p:sp>
+      <p:sp>
+        <p:nvSpPr>
+          <p:cNvPr id="25" name="TextBox 24">
+            <a:extLst>
+              <a:ext uri="{FF2B5EF4-FFF2-40B4-BE49-F238E27FC236}">
+                <a16:creationId xmlns:a16="http://schemas.microsoft.com/office/drawing/2014/main" id="{AC83F2C9-034F-2BF8-C7C8-6754D1483EC0}"/>
+              </a:ext>
+            </a:extLst>
+          </p:cNvPr>
+          <p:cNvSpPr txBox="1"/>
+          <p:nvPr/>
+        </p:nvSpPr>
+        <p:spPr>
+          <a:xfrm>
+            <a:off x="11096222" y="5929347"/>
+            <a:ext cx="914400" cy="276999"/>
+          </a:xfrm>
+          <a:prstGeom prst="rect">
+            <a:avLst/>
+          </a:prstGeom>
+          <a:noFill/>
+        </p:spPr>
+        <p:txBody>
+          <a:bodyPr wrap="square" lIns="0" tIns="0" rIns="0" bIns="0" rtlCol="0" anchor="t" anchorCtr="0">
+            <a:spAutoFit/>
+          </a:bodyPr>
+          <a:lstStyle/>
+          <a:p>
+            <a:pPr algn="l">
+              <a:lnSpc>
+                <a:spcPct val="90000"/>
+              </a:lnSpc>
+              <a:spcBef>
+                <a:spcPts val="600"/>
+              </a:spcBef>
+              <a:spcAft>
+                <a:spcPts val="400"/>
+              </a:spcAft>
+            </a:pPr>
+            <a:r>
+              <a:rPr lang="en-GB" sz="2000">
+                <a:latin typeface="Arial" panose="020B0604020202020204" pitchFamily="34" charset="0"/>
+                <a:cs typeface="Arial" panose="020B0604020202020204" pitchFamily="34" charset="0"/>
+              </a:rPr>
+              <a:t>Control</a:t>
+            </a:r>
+            <a:endParaRPr lang="en-GB" sz="2000" dirty="0">
+              <a:latin typeface="Arial" panose="020B0604020202020204" pitchFamily="34" charset="0"/>
+              <a:cs typeface="Arial" panose="020B0604020202020204" pitchFamily="34" charset="0"/>
+            </a:endParaRPr>
+          </a:p>
+        </p:txBody>
+      </p:sp>
+      <p:sp>
+        <p:nvSpPr>
+          <p:cNvPr id="26" name="Freeform: Shape 25">
+            <a:extLst>
+              <a:ext uri="{FF2B5EF4-FFF2-40B4-BE49-F238E27FC236}">
+                <a16:creationId xmlns:a16="http://schemas.microsoft.com/office/drawing/2014/main" id="{87C8CFE8-27A5-D2AD-83C3-2E29B745864E}"/>
+              </a:ext>
+            </a:extLst>
+          </p:cNvPr>
+          <p:cNvSpPr/>
+          <p:nvPr/>
+        </p:nvSpPr>
+        <p:spPr>
+          <a:xfrm rot="10117872">
+            <a:off x="9150866" y="5212854"/>
+            <a:ext cx="595268" cy="369332"/>
+          </a:xfrm>
+          <a:custGeom>
+            <a:avLst/>
+            <a:gdLst>
+              <a:gd name="csX0" fmla="*/ 408509 w 762626"/>
+              <a:gd name="csY0" fmla="*/ 67479 h 469838"/>
+              <a:gd name="csX1" fmla="*/ 72333 w 762626"/>
+              <a:gd name="csY1" fmla="*/ 67479 h 469838"/>
+              <a:gd name="csX2" fmla="*/ 11821 w 762626"/>
+              <a:gd name="csY2" fmla="*/ 302803 h 469838"/>
+              <a:gd name="csX3" fmla="*/ 240421 w 762626"/>
+              <a:gd name="csY3" fmla="*/ 443997 h 469838"/>
+              <a:gd name="csX4" fmla="*/ 657280 w 762626"/>
+              <a:gd name="csY4" fmla="*/ 457444 h 469838"/>
+              <a:gd name="csX5" fmla="*/ 751409 w 762626"/>
+              <a:gd name="csY5" fmla="*/ 309526 h 469838"/>
+              <a:gd name="csX6" fmla="*/ 711068 w 762626"/>
+              <a:gd name="csY6" fmla="*/ 80926 h 469838"/>
+              <a:gd name="csX7" fmla="*/ 307656 w 762626"/>
+              <a:gd name="csY7" fmla="*/ 244 h 469838"/>
+              <a:gd name="csX8" fmla="*/ 146291 w 762626"/>
+              <a:gd name="csY8" fmla="*/ 60755 h 469838"/>
+            </a:gdLst>
+            <a:ahLst/>
+            <a:cxnLst>
+              <a:cxn ang="0">
+                <a:pos x="csX0" y="csY0"/>
+              </a:cxn>
+              <a:cxn ang="0">
+                <a:pos x="csX1" y="csY1"/>
+              </a:cxn>
+              <a:cxn ang="0">
+                <a:pos x="csX2" y="csY2"/>
+              </a:cxn>
+              <a:cxn ang="0">
+                <a:pos x="csX3" y="csY3"/>
+              </a:cxn>
+              <a:cxn ang="0">
+                <a:pos x="csX4" y="csY4"/>
+              </a:cxn>
+              <a:cxn ang="0">
+                <a:pos x="csX5" y="csY5"/>
+              </a:cxn>
+              <a:cxn ang="0">
+                <a:pos x="csX6" y="csY6"/>
+              </a:cxn>
+              <a:cxn ang="0">
+                <a:pos x="csX7" y="csY7"/>
+              </a:cxn>
+              <a:cxn ang="0">
+                <a:pos x="csX8" y="csY8"/>
+              </a:cxn>
+            </a:cxnLst>
+            <a:rect l="l" t="t" r="r" b="b"/>
+            <a:pathLst>
+              <a:path w="762626" h="469838">
+                <a:moveTo>
+                  <a:pt x="408509" y="67479"/>
+                </a:moveTo>
+                <a:cubicBezTo>
+                  <a:pt x="273478" y="47868"/>
+                  <a:pt x="138448" y="28258"/>
+                  <a:pt x="72333" y="67479"/>
+                </a:cubicBezTo>
+                <a:cubicBezTo>
+                  <a:pt x="6218" y="106700"/>
+                  <a:pt x="-16194" y="240050"/>
+                  <a:pt x="11821" y="302803"/>
+                </a:cubicBezTo>
+                <a:cubicBezTo>
+                  <a:pt x="39836" y="365556"/>
+                  <a:pt x="132844" y="418223"/>
+                  <a:pt x="240421" y="443997"/>
+                </a:cubicBezTo>
+                <a:cubicBezTo>
+                  <a:pt x="347998" y="469771"/>
+                  <a:pt x="572115" y="479856"/>
+                  <a:pt x="657280" y="457444"/>
+                </a:cubicBezTo>
+                <a:cubicBezTo>
+                  <a:pt x="742445" y="435032"/>
+                  <a:pt x="742444" y="372279"/>
+                  <a:pt x="751409" y="309526"/>
+                </a:cubicBezTo>
+                <a:cubicBezTo>
+                  <a:pt x="760374" y="246773"/>
+                  <a:pt x="785027" y="132473"/>
+                  <a:pt x="711068" y="80926"/>
+                </a:cubicBezTo>
+                <a:cubicBezTo>
+                  <a:pt x="637109" y="29379"/>
+                  <a:pt x="401785" y="3606"/>
+                  <a:pt x="307656" y="244"/>
+                </a:cubicBezTo>
+                <a:cubicBezTo>
+                  <a:pt x="213527" y="-3118"/>
+                  <a:pt x="179909" y="28818"/>
+                  <a:pt x="146291" y="60755"/>
+                </a:cubicBezTo>
+              </a:path>
+            </a:pathLst>
+          </a:custGeom>
+          <a:noFill/>
+          <a:ln w="38100">
+            <a:solidFill>
+              <a:schemeClr val="accent6">
+                <a:lumMod val="75000"/>
+              </a:schemeClr>
+            </a:solidFill>
+          </a:ln>
+        </p:spPr>
+        <p:style>
+          <a:lnRef idx="2">
+            <a:schemeClr val="accent1">
+              <a:shade val="15000"/>
+            </a:schemeClr>
+          </a:lnRef>
+          <a:fillRef idx="1">
+            <a:schemeClr val="accent1"/>
+          </a:fillRef>
+          <a:effectRef idx="0">
+            <a:schemeClr val="accent1"/>
+          </a:effectRef>
+          <a:fontRef idx="minor">
+            <a:schemeClr val="lt1"/>
+          </a:fontRef>
+        </p:style>
+        <p:txBody>
+          <a:bodyPr rtlCol="0" anchor="ctr"/>
+          <a:lstStyle/>
+          <a:p>
+            <a:pPr algn="ctr"/>
+            <a:endParaRPr lang="en-GB"/>
+          </a:p>
+        </p:txBody>
+      </p:sp>
+      <p:sp>
+        <p:nvSpPr>
+          <p:cNvPr id="27" name="Freeform: Shape 26">
+            <a:extLst>
+              <a:ext uri="{FF2B5EF4-FFF2-40B4-BE49-F238E27FC236}">
+                <a16:creationId xmlns:a16="http://schemas.microsoft.com/office/drawing/2014/main" id="{A579D97E-7B27-D0E8-CC15-A15A4344184F}"/>
+              </a:ext>
+            </a:extLst>
+          </p:cNvPr>
+          <p:cNvSpPr/>
+          <p:nvPr/>
+        </p:nvSpPr>
+        <p:spPr>
+          <a:xfrm>
+            <a:off x="5344732" y="5277318"/>
+            <a:ext cx="3133860" cy="518175"/>
+          </a:xfrm>
+          <a:custGeom>
+            <a:avLst/>
+            <a:gdLst>
+              <a:gd name="csX0" fmla="*/ 3133860 w 3133860"/>
+              <a:gd name="csY0" fmla="*/ 0 h 399245"/>
+              <a:gd name="csX1" fmla="*/ 0 w 3133860"/>
+              <a:gd name="csY1" fmla="*/ 399245 h 399245"/>
+              <a:gd name="csX0" fmla="*/ 3133860 w 3133860"/>
+              <a:gd name="csY0" fmla="*/ 0 h 399245"/>
+              <a:gd name="csX1" fmla="*/ 0 w 3133860"/>
+              <a:gd name="csY1" fmla="*/ 399245 h 399245"/>
+              <a:gd name="csX0" fmla="*/ 3133860 w 3133860"/>
+              <a:gd name="csY0" fmla="*/ 118930 h 518175"/>
+              <a:gd name="csX1" fmla="*/ 0 w 3133860"/>
+              <a:gd name="csY1" fmla="*/ 518175 h 518175"/>
+            </a:gdLst>
+            <a:ahLst/>
+            <a:cxnLst>
+              <a:cxn ang="0">
+                <a:pos x="csX0" y="csY0"/>
+              </a:cxn>
+              <a:cxn ang="0">
+                <a:pos x="csX1" y="csY1"/>
+              </a:cxn>
+            </a:cxnLst>
+            <a:rect l="l" t="t" r="r" b="b"/>
+            <a:pathLst>
+              <a:path w="3133860" h="518175">
+                <a:moveTo>
+                  <a:pt x="3133860" y="118930"/>
+                </a:moveTo>
+                <a:cubicBezTo>
+                  <a:pt x="1119032" y="-185870"/>
+                  <a:pt x="465071" y="148981"/>
+                  <a:pt x="0" y="518175"/>
+                </a:cubicBezTo>
+              </a:path>
+            </a:pathLst>
+          </a:custGeom>
+          <a:noFill/>
+          <a:ln w="38100">
+            <a:solidFill>
+              <a:srgbClr val="FFC000"/>
+            </a:solidFill>
+          </a:ln>
+        </p:spPr>
+        <p:style>
+          <a:lnRef idx="2">
+            <a:schemeClr val="accent1">
+              <a:shade val="15000"/>
+            </a:schemeClr>
+          </a:lnRef>
+          <a:fillRef idx="1">
+            <a:schemeClr val="accent1"/>
+          </a:fillRef>
+          <a:effectRef idx="0">
+            <a:schemeClr val="accent1"/>
+          </a:effectRef>
+          <a:fontRef idx="minor">
+            <a:schemeClr val="lt1"/>
+          </a:fontRef>
+        </p:style>
+        <p:txBody>
+          <a:bodyPr rtlCol="0" anchor="ctr"/>
+          <a:lstStyle/>
+          <a:p>
+            <a:pPr algn="ctr"/>
+            <a:endParaRPr lang="LID4096"/>
+          </a:p>
+        </p:txBody>
+      </p:sp>
+      <p:sp>
+        <p:nvSpPr>
+          <p:cNvPr id="28" name="Freeform: Shape 27">
+            <a:extLst>
+              <a:ext uri="{FF2B5EF4-FFF2-40B4-BE49-F238E27FC236}">
+                <a16:creationId xmlns:a16="http://schemas.microsoft.com/office/drawing/2014/main" id="{93090E05-633F-C7E2-A607-02839982F4BF}"/>
+              </a:ext>
+            </a:extLst>
+          </p:cNvPr>
+          <p:cNvSpPr/>
+          <p:nvPr/>
+        </p:nvSpPr>
+        <p:spPr>
+          <a:xfrm>
+            <a:off x="9745014" y="5287306"/>
+            <a:ext cx="1768699" cy="692784"/>
+          </a:xfrm>
+          <a:custGeom>
+            <a:avLst/>
+            <a:gdLst>
+              <a:gd name="csX0" fmla="*/ 0 w 1768699"/>
+              <a:gd name="csY0" fmla="*/ 0 h 635358"/>
+              <a:gd name="csX1" fmla="*/ 1768699 w 1768699"/>
+              <a:gd name="csY1" fmla="*/ 635358 h 635358"/>
+              <a:gd name="csX0" fmla="*/ 0 w 1768699"/>
+              <a:gd name="csY0" fmla="*/ 0 h 635358"/>
+              <a:gd name="csX1" fmla="*/ 1768699 w 1768699"/>
+              <a:gd name="csY1" fmla="*/ 635358 h 635358"/>
+              <a:gd name="csX0" fmla="*/ 0 w 1768699"/>
+              <a:gd name="csY0" fmla="*/ 57426 h 692784"/>
+              <a:gd name="csX1" fmla="*/ 1768699 w 1768699"/>
+              <a:gd name="csY1" fmla="*/ 692784 h 692784"/>
+            </a:gdLst>
+            <a:ahLst/>
+            <a:cxnLst>
+              <a:cxn ang="0">
+                <a:pos x="csX0" y="csY0"/>
+              </a:cxn>
+              <a:cxn ang="0">
+                <a:pos x="csX1" y="csY1"/>
+              </a:cxn>
+            </a:cxnLst>
+            <a:rect l="l" t="t" r="r" b="b"/>
+            <a:pathLst>
+              <a:path w="1768699" h="692784">
+                <a:moveTo>
+                  <a:pt x="0" y="57426"/>
+                </a:moveTo>
+                <a:cubicBezTo>
+                  <a:pt x="842851" y="-31295"/>
+                  <a:pt x="1548327" y="-128602"/>
+                  <a:pt x="1768699" y="692784"/>
+                </a:cubicBezTo>
+              </a:path>
+            </a:pathLst>
+          </a:custGeom>
+          <a:noFill/>
+          <a:ln w="38100">
+            <a:solidFill>
+              <a:schemeClr val="accent6">
+                <a:lumMod val="75000"/>
+              </a:schemeClr>
+            </a:solidFill>
+          </a:ln>
+        </p:spPr>
+        <p:style>
+          <a:lnRef idx="2">
+            <a:schemeClr val="accent1">
+              <a:shade val="15000"/>
+            </a:schemeClr>
+          </a:lnRef>
+          <a:fillRef idx="1">
+            <a:schemeClr val="accent1"/>
+          </a:fillRef>
+          <a:effectRef idx="0">
+            <a:schemeClr val="accent1"/>
+          </a:effectRef>
+          <a:fontRef idx="minor">
+            <a:schemeClr val="lt1"/>
+          </a:fontRef>
+        </p:style>
+        <p:txBody>
+          <a:bodyPr rtlCol="0" anchor="ctr"/>
+          <a:lstStyle/>
+          <a:p>
+            <a:pPr algn="ctr"/>
+            <a:endParaRPr lang="LID4096"/>
+          </a:p>
+        </p:txBody>
+      </p:sp>
+      <p:pic>
+        <p:nvPicPr>
+          <p:cNvPr id="4" name="Picture 3">
+            <a:extLst>
+              <a:ext uri="{FF2B5EF4-FFF2-40B4-BE49-F238E27FC236}">
+                <a16:creationId xmlns:a16="http://schemas.microsoft.com/office/drawing/2014/main" id="{C791759D-634F-0157-A61A-09E9737F60E8}"/>
+              </a:ext>
+            </a:extLst>
+          </p:cNvPr>
+          <p:cNvPicPr>
+            <a:picLocks noChangeAspect="1"/>
+          </p:cNvPicPr>
+          <p:nvPr/>
+        </p:nvPicPr>
+        <p:blipFill>
+          <a:blip r:embed="rId6"/>
+          <a:stretch>
+            <a:fillRect/>
+          </a:stretch>
+        </p:blipFill>
+        <p:spPr>
+          <a:xfrm>
+            <a:off x="287863" y="2056986"/>
+            <a:ext cx="5520508" cy="3100820"/>
+          </a:xfrm>
+          <a:prstGeom prst="rect">
+            <a:avLst/>
+          </a:prstGeom>
+          <a:ln>
+            <a:solidFill>
+              <a:schemeClr val="tx1"/>
+            </a:solidFill>
+          </a:ln>
+          <a:effectLst>
+            <a:outerShdw blurRad="50800" dist="38100" dir="2700000" algn="tl" rotWithShape="0">
+              <a:prstClr val="black">
+                <a:alpha val="40000"/>
+              </a:prstClr>
+            </a:outerShdw>
+          </a:effectLst>
+        </p:spPr>
+      </p:pic>
+    </p:spTree>
+    <p:extLst>
+      <p:ext uri="{BB962C8B-B14F-4D97-AF65-F5344CB8AC3E}">
+        <p14:creationId xmlns:p14="http://schemas.microsoft.com/office/powerpoint/2010/main" val="3367105718"/>
+      </p:ext>
+    </p:extLst>
+  </p:cSld>
+  <p:clrMapOvr>
+    <a:masterClrMapping/>
+  </p:clrMapOvr>
+  <p:timing>
+    <p:tnLst>
+      <p:par>
+        <p:cTn id="1" dur="indefinite" restart="never" nodeType="tmRoot">
+          <p:childTnLst>
+            <p:seq concurrent="1" nextAc="seek">
+              <p:cTn id="2" dur="indefinite" nodeType="mainSeq">
+                <p:childTnLst>
+                  <p:par>
+                    <p:cTn id="3" fill="hold">
+                      <p:stCondLst>
+                        <p:cond delay="indefinite"/>
+                      </p:stCondLst>
+                      <p:childTnLst>
+                        <p:par>
+                          <p:cTn id="4" fill="hold">
+                            <p:stCondLst>
+                              <p:cond delay="0"/>
+                            </p:stCondLst>
+                            <p:childTnLst>
+                              <p:par>
+                                <p:cTn id="5" presetID="10" presetClass="entr" presetSubtype="0" fill="hold" nodeType="clickEffect">
+                                  <p:stCondLst>
+                                    <p:cond delay="0"/>
+                                  </p:stCondLst>
+                                  <p:childTnLst>
+                                    <p:set>
+                                      <p:cBhvr>
+                                        <p:cTn id="6" dur="1" fill="hold">
+                                          <p:stCondLst>
+                                            <p:cond delay="0"/>
+                                          </p:stCondLst>
+                                        </p:cTn>
+                                        <p:tgtEl>
+                                          <p:spTgt spid="5"/>
+                                        </p:tgtEl>
+                                        <p:attrNameLst>
+                                          <p:attrName>style.visibility</p:attrName>
+                                        </p:attrNameLst>
+                                      </p:cBhvr>
+                                      <p:to>
+                                        <p:strVal val="visible"/>
+                                      </p:to>
+                                    </p:set>
+                                    <p:animEffect transition="in" filter="fade">
+                                      <p:cBhvr>
+                                        <p:cTn id="7" dur="500"/>
+                                        <p:tgtEl>
+                                          <p:spTgt spid="5"/>
+                                        </p:tgtEl>
+                                      </p:cBhvr>
+                                    </p:animEffect>
+                                  </p:childTnLst>
+                                </p:cTn>
+                              </p:par>
+                              <p:par>
+                                <p:cTn id="8" presetID="10" presetClass="entr" presetSubtype="0" fill="hold" grpId="0" nodeType="withEffect">
+                                  <p:stCondLst>
+                                    <p:cond delay="0"/>
+                                  </p:stCondLst>
+                                  <p:childTnLst>
+                                    <p:set>
+                                      <p:cBhvr>
+                                        <p:cTn id="9" dur="1" fill="hold">
+                                          <p:stCondLst>
+                                            <p:cond delay="0"/>
+                                          </p:stCondLst>
+                                        </p:cTn>
+                                        <p:tgtEl>
+                                          <p:spTgt spid="15"/>
+                                        </p:tgtEl>
+                                        <p:attrNameLst>
+                                          <p:attrName>style.visibility</p:attrName>
+                                        </p:attrNameLst>
+                                      </p:cBhvr>
+                                      <p:to>
+                                        <p:strVal val="visible"/>
+                                      </p:to>
+                                    </p:set>
+                                    <p:animEffect transition="in" filter="fade">
+                                      <p:cBhvr>
+                                        <p:cTn id="10" dur="500"/>
+                                        <p:tgtEl>
+                                          <p:spTgt spid="15"/>
+                                        </p:tgtEl>
+                                      </p:cBhvr>
+                                    </p:animEffect>
+                                  </p:childTnLst>
+                                </p:cTn>
+                              </p:par>
+                            </p:childTnLst>
+                          </p:cTn>
+                        </p:par>
+                      </p:childTnLst>
+                    </p:cTn>
+                  </p:par>
+                  <p:par>
+                    <p:cTn id="11" fill="hold">
+                      <p:stCondLst>
+                        <p:cond delay="indefinite"/>
+                      </p:stCondLst>
+                      <p:childTnLst>
+                        <p:par>
+                          <p:cTn id="12" fill="hold">
+                            <p:stCondLst>
+                              <p:cond delay="0"/>
+                            </p:stCondLst>
+                            <p:childTnLst>
+                              <p:par>
+                                <p:cTn id="13" presetID="10" presetClass="entr" presetSubtype="0" fill="hold" grpId="0" nodeType="clickEffect">
+                                  <p:stCondLst>
+                                    <p:cond delay="0"/>
+                                  </p:stCondLst>
+                                  <p:childTnLst>
+                                    <p:set>
+                                      <p:cBhvr>
+                                        <p:cTn id="14" dur="1" fill="hold">
+                                          <p:stCondLst>
+                                            <p:cond delay="0"/>
+                                          </p:stCondLst>
+                                        </p:cTn>
+                                        <p:tgtEl>
+                                          <p:spTgt spid="24"/>
+                                        </p:tgtEl>
+                                        <p:attrNameLst>
+                                          <p:attrName>style.visibility</p:attrName>
+                                        </p:attrNameLst>
+                                      </p:cBhvr>
+                                      <p:to>
+                                        <p:strVal val="visible"/>
+                                      </p:to>
+                                    </p:set>
+                                    <p:animEffect transition="in" filter="fade">
+                                      <p:cBhvr>
+                                        <p:cTn id="15" dur="500"/>
+                                        <p:tgtEl>
+                                          <p:spTgt spid="24"/>
+                                        </p:tgtEl>
+                                      </p:cBhvr>
+                                    </p:animEffect>
+                                  </p:childTnLst>
+                                </p:cTn>
+                              </p:par>
+                              <p:par>
+                                <p:cTn id="16" presetID="10" presetClass="entr" presetSubtype="0" fill="hold" grpId="0" nodeType="withEffect">
+                                  <p:stCondLst>
+                                    <p:cond delay="0"/>
+                                  </p:stCondLst>
+                                  <p:childTnLst>
+                                    <p:set>
+                                      <p:cBhvr>
+                                        <p:cTn id="17" dur="1" fill="hold">
+                                          <p:stCondLst>
+                                            <p:cond delay="0"/>
+                                          </p:stCondLst>
+                                        </p:cTn>
+                                        <p:tgtEl>
+                                          <p:spTgt spid="25"/>
+                                        </p:tgtEl>
+                                        <p:attrNameLst>
+                                          <p:attrName>style.visibility</p:attrName>
+                                        </p:attrNameLst>
+                                      </p:cBhvr>
+                                      <p:to>
+                                        <p:strVal val="visible"/>
+                                      </p:to>
+                                    </p:set>
+                                    <p:animEffect transition="in" filter="fade">
+                                      <p:cBhvr>
+                                        <p:cTn id="18" dur="500"/>
+                                        <p:tgtEl>
+                                          <p:spTgt spid="25"/>
+                                        </p:tgtEl>
+                                      </p:cBhvr>
+                                    </p:animEffect>
+                                  </p:childTnLst>
+                                </p:cTn>
+                              </p:par>
+                            </p:childTnLst>
+                          </p:cTn>
+                        </p:par>
+                      </p:childTnLst>
+                    </p:cTn>
+                  </p:par>
+                  <p:par>
+                    <p:cTn id="19" fill="hold">
+                      <p:stCondLst>
+                        <p:cond delay="indefinite"/>
+                      </p:stCondLst>
+                      <p:childTnLst>
+                        <p:par>
+                          <p:cTn id="20" fill="hold">
+                            <p:stCondLst>
+                              <p:cond delay="0"/>
+                            </p:stCondLst>
+                            <p:childTnLst>
+                              <p:par>
+                                <p:cTn id="21" presetID="10" presetClass="entr" presetSubtype="0" fill="hold" grpId="0" nodeType="clickEffect">
+                                  <p:stCondLst>
+                                    <p:cond delay="0"/>
+                                  </p:stCondLst>
+                                  <p:childTnLst>
+                                    <p:set>
+                                      <p:cBhvr>
+                                        <p:cTn id="22" dur="1" fill="hold">
+                                          <p:stCondLst>
+                                            <p:cond delay="0"/>
+                                          </p:stCondLst>
+                                        </p:cTn>
+                                        <p:tgtEl>
+                                          <p:spTgt spid="26"/>
+                                        </p:tgtEl>
+                                        <p:attrNameLst>
+                                          <p:attrName>style.visibility</p:attrName>
+                                        </p:attrNameLst>
+                                      </p:cBhvr>
+                                      <p:to>
+                                        <p:strVal val="visible"/>
+                                      </p:to>
+                                    </p:set>
+                                    <p:animEffect transition="in" filter="fade">
+                                      <p:cBhvr>
+                                        <p:cTn id="23" dur="500"/>
+                                        <p:tgtEl>
+                                          <p:spTgt spid="26"/>
+                                        </p:tgtEl>
+                                      </p:cBhvr>
+                                    </p:animEffect>
+                                  </p:childTnLst>
+                                </p:cTn>
+                              </p:par>
+                            </p:childTnLst>
+                          </p:cTn>
+                        </p:par>
+                      </p:childTnLst>
+                    </p:cTn>
+                  </p:par>
+                </p:childTnLst>
+              </p:cTn>
+              <p:prevCondLst>
+                <p:cond evt="onPrev" delay="0">
+                  <p:tgtEl>
+                    <p:sldTgt/>
+                  </p:tgtEl>
+                </p:cond>
+              </p:prevCondLst>
+              <p:nextCondLst>
+                <p:cond evt="onNext" delay="0">
+                  <p:tgtEl>
+                    <p:sldTgt/>
+                  </p:tgtEl>
+                </p:cond>
+              </p:nextCondLst>
+            </p:seq>
+          </p:childTnLst>
+        </p:cTn>
+      </p:par>
+    </p:tnLst>
+    <p:bldLst>
+      <p:bldP spid="15" grpId="0"/>
+      <p:bldP spid="24" grpId="0" animBg="1"/>
+      <p:bldP spid="25" grpId="0"/>
+      <p:bldP spid="26" grpId="0" animBg="1"/>
+    </p:bldLst>
+  </p:timing>
+</p:sld>
+</file>
+
+<file path=ppt/slides/slide2.xml><?xml version="1.0" encoding="utf-8"?>
+<p:sld xmlns:a="http://schemas.openxmlformats.org/drawingml/2006/main" xmlns:r="http://schemas.openxmlformats.org/officeDocument/2006/relationships" xmlns:p="http://schemas.openxmlformats.org/presentationml/2006/main">
+  <p:cSld>
+    <p:spTree>
+      <p:nvGrpSpPr>
+        <p:cNvPr id="1" name=""/>
+        <p:cNvGrpSpPr/>
+        <p:nvPr/>
+      </p:nvGrpSpPr>
+      <p:grpSpPr>
+        <a:xfrm>
+          <a:off x="0" y="0"/>
+          <a:ext cx="0" cy="0"/>
+          <a:chOff x="0" y="0"/>
+          <a:chExt cx="0" cy="0"/>
+        </a:xfrm>
+      </p:grpSpPr>
+      <p:sp>
+        <p:nvSpPr>
+          <p:cNvPr id="2" name="Title 1">
+            <a:extLst>
+              <a:ext uri="{FF2B5EF4-FFF2-40B4-BE49-F238E27FC236}">
+                <a16:creationId xmlns:a16="http://schemas.microsoft.com/office/drawing/2014/main" id="{74956708-2EA5-0A89-65CE-DEBB4DEDC580}"/>
+              </a:ext>
+            </a:extLst>
+          </p:cNvPr>
+          <p:cNvSpPr>
+            <a:spLocks noGrp="1"/>
+          </p:cNvSpPr>
+          <p:nvPr>
+            <p:ph type="title"/>
+          </p:nvPr>
+        </p:nvSpPr>
+        <p:spPr/>
+        <p:txBody>
+          <a:bodyPr/>
+          <a:lstStyle/>
+          <a:p>
+            <a:r>
+              <a:rPr lang="sv-SE"/>
+              <a:t>Var är våra variabler?</a:t>
+            </a:r>
+            <a:endParaRPr lang="LID4096"/>
+          </a:p>
+        </p:txBody>
+      </p:sp>
+      <p:sp>
+        <p:nvSpPr>
+          <p:cNvPr id="3" name="Content Placeholder 2">
+            <a:extLst>
+              <a:ext uri="{FF2B5EF4-FFF2-40B4-BE49-F238E27FC236}">
+                <a16:creationId xmlns:a16="http://schemas.microsoft.com/office/drawing/2014/main" id="{C307AAFD-3169-BF36-59D2-93FBD2E66C26}"/>
+              </a:ext>
+            </a:extLst>
+          </p:cNvPr>
+          <p:cNvSpPr>
+            <a:spLocks noGrp="1"/>
+          </p:cNvSpPr>
+          <p:nvPr>
+            <p:ph idx="1"/>
+          </p:nvPr>
+        </p:nvSpPr>
+        <p:spPr/>
+        <p:txBody>
+          <a:bodyPr/>
+          <a:lstStyle/>
+          <a:p>
+            <a:endParaRPr lang="LID4096"/>
+          </a:p>
+        </p:txBody>
+      </p:sp>
+    </p:spTree>
+    <p:extLst>
+      <p:ext uri="{BB962C8B-B14F-4D97-AF65-F5344CB8AC3E}">
+        <p14:creationId xmlns:p14="http://schemas.microsoft.com/office/powerpoint/2010/main" val="3336532556"/>
+      </p:ext>
+    </p:extLst>
+  </p:cSld>
+  <p:clrMapOvr>
+    <a:masterClrMapping/>
+  </p:clrMapOvr>
+</p:sld>
+</file>
+
+<file path=ppt/slides/slide20.xml><?xml version="1.0" encoding="utf-8"?>
+<p:sld xmlns:a="http://schemas.openxmlformats.org/drawingml/2006/main" xmlns:r="http://schemas.openxmlformats.org/officeDocument/2006/relationships" xmlns:p="http://schemas.openxmlformats.org/presentationml/2006/main">
+  <p:cSld>
+    <p:spTree>
+      <p:nvGrpSpPr>
+        <p:cNvPr id="1" name="">
+          <a:extLst>
+            <a:ext uri="{FF2B5EF4-FFF2-40B4-BE49-F238E27FC236}">
               <a16:creationId xmlns:a16="http://schemas.microsoft.com/office/drawing/2014/main" id="{C9BD2A04-DAA1-A5CF-64C0-4358CC2B4AAB}"/>
             </a:ext>
           </a:extLst>
@@ -21707,91 +23364,7 @@
 </p:sld>
 </file>
 
-<file path=ppt/slides/slide2.xml><?xml version="1.0" encoding="utf-8"?>
-<p:sld xmlns:a="http://schemas.openxmlformats.org/drawingml/2006/main" xmlns:r="http://schemas.openxmlformats.org/officeDocument/2006/relationships" xmlns:p="http://schemas.openxmlformats.org/presentationml/2006/main">
-  <p:cSld>
-    <p:spTree>
-      <p:nvGrpSpPr>
-        <p:cNvPr id="1" name=""/>
-        <p:cNvGrpSpPr/>
-        <p:nvPr/>
-      </p:nvGrpSpPr>
-      <p:grpSpPr>
-        <a:xfrm>
-          <a:off x="0" y="0"/>
-          <a:ext cx="0" cy="0"/>
-          <a:chOff x="0" y="0"/>
-          <a:chExt cx="0" cy="0"/>
-        </a:xfrm>
-      </p:grpSpPr>
-      <p:sp>
-        <p:nvSpPr>
-          <p:cNvPr id="2" name="Title 1">
-            <a:extLst>
-              <a:ext uri="{FF2B5EF4-FFF2-40B4-BE49-F238E27FC236}">
-                <a16:creationId xmlns:a16="http://schemas.microsoft.com/office/drawing/2014/main" id="{74956708-2EA5-0A89-65CE-DEBB4DEDC580}"/>
-              </a:ext>
-            </a:extLst>
-          </p:cNvPr>
-          <p:cNvSpPr>
-            <a:spLocks noGrp="1"/>
-          </p:cNvSpPr>
-          <p:nvPr>
-            <p:ph type="title"/>
-          </p:nvPr>
-        </p:nvSpPr>
-        <p:spPr/>
-        <p:txBody>
-          <a:bodyPr/>
-          <a:lstStyle/>
-          <a:p>
-            <a:r>
-              <a:rPr lang="sv-SE"/>
-              <a:t>Var är våra variabler?</a:t>
-            </a:r>
-            <a:endParaRPr lang="LID4096"/>
-          </a:p>
-        </p:txBody>
-      </p:sp>
-      <p:sp>
-        <p:nvSpPr>
-          <p:cNvPr id="3" name="Content Placeholder 2">
-            <a:extLst>
-              <a:ext uri="{FF2B5EF4-FFF2-40B4-BE49-F238E27FC236}">
-                <a16:creationId xmlns:a16="http://schemas.microsoft.com/office/drawing/2014/main" id="{C307AAFD-3169-BF36-59D2-93FBD2E66C26}"/>
-              </a:ext>
-            </a:extLst>
-          </p:cNvPr>
-          <p:cNvSpPr>
-            <a:spLocks noGrp="1"/>
-          </p:cNvSpPr>
-          <p:nvPr>
-            <p:ph idx="1"/>
-          </p:nvPr>
-        </p:nvSpPr>
-        <p:spPr/>
-        <p:txBody>
-          <a:bodyPr/>
-          <a:lstStyle/>
-          <a:p>
-            <a:endParaRPr lang="LID4096"/>
-          </a:p>
-        </p:txBody>
-      </p:sp>
-    </p:spTree>
-    <p:extLst>
-      <p:ext uri="{BB962C8B-B14F-4D97-AF65-F5344CB8AC3E}">
-        <p14:creationId xmlns:p14="http://schemas.microsoft.com/office/powerpoint/2010/main" val="3336532556"/>
-      </p:ext>
-    </p:extLst>
-  </p:cSld>
-  <p:clrMapOvr>
-    <a:masterClrMapping/>
-  </p:clrMapOvr>
-</p:sld>
-</file>
-
-<file path=ppt/slides/slide20.xml><?xml version="1.0" encoding="utf-8"?>
+<file path=ppt/slides/slide21.xml><?xml version="1.0" encoding="utf-8"?>
 <p:sld xmlns:a="http://schemas.openxmlformats.org/drawingml/2006/main" xmlns:r="http://schemas.openxmlformats.org/officeDocument/2006/relationships" xmlns:p="http://schemas.openxmlformats.org/presentationml/2006/main">
   <p:cSld>
     <p:spTree>
@@ -22423,7 +23996,7 @@
 </p:sld>
 </file>
 
-<file path=ppt/slides/slide21.xml><?xml version="1.0" encoding="utf-8"?>
+<file path=ppt/slides/slide22.xml><?xml version="1.0" encoding="utf-8"?>
 <p:sld xmlns:a="http://schemas.openxmlformats.org/drawingml/2006/main" xmlns:r="http://schemas.openxmlformats.org/officeDocument/2006/relationships" xmlns:p="http://schemas.openxmlformats.org/presentationml/2006/main">
   <p:cSld>
     <p:spTree>
@@ -22619,6 +24192,712 @@
           </a:p>
         </p:txBody>
       </p:sp>
+      <p:grpSp>
+        <p:nvGrpSpPr>
+          <p:cNvPr id="17" name="Group 16">
+            <a:extLst>
+              <a:ext uri="{FF2B5EF4-FFF2-40B4-BE49-F238E27FC236}">
+                <a16:creationId xmlns:a16="http://schemas.microsoft.com/office/drawing/2014/main" id="{A9A2D940-2E51-78CB-99EA-C5F7EA30F2F3}"/>
+              </a:ext>
+            </a:extLst>
+          </p:cNvPr>
+          <p:cNvGrpSpPr/>
+          <p:nvPr/>
+        </p:nvGrpSpPr>
+        <p:grpSpPr>
+          <a:xfrm>
+            <a:off x="4464676" y="2223752"/>
+            <a:ext cx="7598534" cy="549499"/>
+            <a:chOff x="4464676" y="2223752"/>
+            <a:chExt cx="7598534" cy="549499"/>
+          </a:xfrm>
+        </p:grpSpPr>
+        <p:sp>
+          <p:nvSpPr>
+            <p:cNvPr id="9" name="Rectangle: Rounded Corners 8">
+              <a:extLst>
+                <a:ext uri="{FF2B5EF4-FFF2-40B4-BE49-F238E27FC236}">
+                  <a16:creationId xmlns:a16="http://schemas.microsoft.com/office/drawing/2014/main" id="{2D5B0FD9-854C-F564-C760-C11048458AFB}"/>
+                </a:ext>
+              </a:extLst>
+            </p:cNvPr>
+            <p:cNvSpPr/>
+            <p:nvPr/>
+          </p:nvSpPr>
+          <p:spPr>
+            <a:xfrm>
+              <a:off x="6606861" y="2223752"/>
+              <a:ext cx="5456349" cy="403538"/>
+            </a:xfrm>
+            <a:prstGeom prst="roundRect">
+              <a:avLst>
+                <a:gd name="adj" fmla="val 6157"/>
+              </a:avLst>
+            </a:prstGeom>
+            <a:noFill/>
+            <a:ln w="38100">
+              <a:solidFill>
+                <a:srgbClr val="FFC000"/>
+              </a:solidFill>
+            </a:ln>
+          </p:spPr>
+          <p:style>
+            <a:lnRef idx="2">
+              <a:schemeClr val="accent1">
+                <a:shade val="15000"/>
+              </a:schemeClr>
+            </a:lnRef>
+            <a:fillRef idx="1">
+              <a:schemeClr val="accent1"/>
+            </a:fillRef>
+            <a:effectRef idx="0">
+              <a:schemeClr val="accent1"/>
+            </a:effectRef>
+            <a:fontRef idx="minor">
+              <a:schemeClr val="lt1"/>
+            </a:fontRef>
+          </p:style>
+          <p:txBody>
+            <a:bodyPr rtlCol="0" anchor="ctr"/>
+            <a:lstStyle/>
+            <a:p>
+              <a:pPr algn="ctr"/>
+              <a:endParaRPr lang="LID4096"/>
+            </a:p>
+          </p:txBody>
+        </p:sp>
+        <p:sp>
+          <p:nvSpPr>
+            <p:cNvPr id="10" name="Freeform: Shape 9">
+              <a:extLst>
+                <a:ext uri="{FF2B5EF4-FFF2-40B4-BE49-F238E27FC236}">
+                  <a16:creationId xmlns:a16="http://schemas.microsoft.com/office/drawing/2014/main" id="{C586BEF1-18BC-C77A-51DB-3934F94D13FF}"/>
+                </a:ext>
+              </a:extLst>
+            </p:cNvPr>
+            <p:cNvSpPr/>
+            <p:nvPr/>
+          </p:nvSpPr>
+          <p:spPr>
+            <a:xfrm>
+              <a:off x="4464676" y="2412642"/>
+              <a:ext cx="2137893" cy="360609"/>
+            </a:xfrm>
+            <a:custGeom>
+              <a:avLst/>
+              <a:gdLst>
+                <a:gd name="csX0" fmla="*/ 0 w 2137893"/>
+                <a:gd name="csY0" fmla="*/ 360609 h 360609"/>
+                <a:gd name="csX1" fmla="*/ 2137893 w 2137893"/>
+                <a:gd name="csY1" fmla="*/ 0 h 360609"/>
+                <a:gd name="csX0" fmla="*/ 0 w 2137893"/>
+                <a:gd name="csY0" fmla="*/ 360609 h 360609"/>
+                <a:gd name="csX1" fmla="*/ 2137893 w 2137893"/>
+                <a:gd name="csY1" fmla="*/ 0 h 360609"/>
+                <a:gd name="csX0" fmla="*/ 0 w 2137893"/>
+                <a:gd name="csY0" fmla="*/ 360609 h 360609"/>
+                <a:gd name="csX1" fmla="*/ 2137893 w 2137893"/>
+                <a:gd name="csY1" fmla="*/ 0 h 360609"/>
+              </a:gdLst>
+              <a:ahLst/>
+              <a:cxnLst>
+                <a:cxn ang="0">
+                  <a:pos x="csX0" y="csY0"/>
+                </a:cxn>
+                <a:cxn ang="0">
+                  <a:pos x="csX1" y="csY1"/>
+                </a:cxn>
+              </a:cxnLst>
+              <a:rect l="l" t="t" r="r" b="b"/>
+              <a:pathLst>
+                <a:path w="2137893" h="360609">
+                  <a:moveTo>
+                    <a:pt x="0" y="360609"/>
+                  </a:moveTo>
+                  <a:cubicBezTo>
+                    <a:pt x="691166" y="343437"/>
+                    <a:pt x="1330817" y="21465"/>
+                    <a:pt x="2137893" y="0"/>
+                  </a:cubicBezTo>
+                </a:path>
+              </a:pathLst>
+            </a:custGeom>
+            <a:noFill/>
+            <a:ln w="25400">
+              <a:solidFill>
+                <a:srgbClr val="FFC000"/>
+              </a:solidFill>
+            </a:ln>
+          </p:spPr>
+          <p:style>
+            <a:lnRef idx="2">
+              <a:schemeClr val="accent1">
+                <a:shade val="15000"/>
+              </a:schemeClr>
+            </a:lnRef>
+            <a:fillRef idx="1">
+              <a:schemeClr val="accent1"/>
+            </a:fillRef>
+            <a:effectRef idx="0">
+              <a:schemeClr val="accent1"/>
+            </a:effectRef>
+            <a:fontRef idx="minor">
+              <a:schemeClr val="lt1"/>
+            </a:fontRef>
+          </p:style>
+          <p:txBody>
+            <a:bodyPr rtlCol="0" anchor="ctr"/>
+            <a:lstStyle/>
+            <a:p>
+              <a:pPr algn="ctr"/>
+              <a:endParaRPr lang="LID4096"/>
+            </a:p>
+          </p:txBody>
+        </p:sp>
+      </p:grpSp>
+      <p:grpSp>
+        <p:nvGrpSpPr>
+          <p:cNvPr id="18" name="Group 17">
+            <a:extLst>
+              <a:ext uri="{FF2B5EF4-FFF2-40B4-BE49-F238E27FC236}">
+                <a16:creationId xmlns:a16="http://schemas.microsoft.com/office/drawing/2014/main" id="{16BAD49A-7BBD-D215-7F85-350283A92619}"/>
+              </a:ext>
+            </a:extLst>
+          </p:cNvPr>
+          <p:cNvGrpSpPr/>
+          <p:nvPr/>
+        </p:nvGrpSpPr>
+        <p:grpSpPr>
+          <a:xfrm>
+            <a:off x="2826914" y="1476040"/>
+            <a:ext cx="9232004" cy="1610588"/>
+            <a:chOff x="2826914" y="1476040"/>
+            <a:chExt cx="9232004" cy="1610588"/>
+          </a:xfrm>
+        </p:grpSpPr>
+        <p:sp>
+          <p:nvSpPr>
+            <p:cNvPr id="11" name="Rectangle: Rounded Corners 10">
+              <a:extLst>
+                <a:ext uri="{FF2B5EF4-FFF2-40B4-BE49-F238E27FC236}">
+                  <a16:creationId xmlns:a16="http://schemas.microsoft.com/office/drawing/2014/main" id="{8BA88243-7BEB-0B65-CAA3-212210BBF448}"/>
+                </a:ext>
+              </a:extLst>
+            </p:cNvPr>
+            <p:cNvSpPr/>
+            <p:nvPr/>
+          </p:nvSpPr>
+          <p:spPr>
+            <a:xfrm>
+              <a:off x="6602569" y="1476040"/>
+              <a:ext cx="5456349" cy="181042"/>
+            </a:xfrm>
+            <a:prstGeom prst="roundRect">
+              <a:avLst>
+                <a:gd name="adj" fmla="val 6157"/>
+              </a:avLst>
+            </a:prstGeom>
+            <a:noFill/>
+            <a:ln w="38100">
+              <a:solidFill>
+                <a:schemeClr val="accent6">
+                  <a:lumMod val="60000"/>
+                  <a:lumOff val="40000"/>
+                </a:schemeClr>
+              </a:solidFill>
+            </a:ln>
+          </p:spPr>
+          <p:style>
+            <a:lnRef idx="2">
+              <a:schemeClr val="accent1">
+                <a:shade val="15000"/>
+              </a:schemeClr>
+            </a:lnRef>
+            <a:fillRef idx="1">
+              <a:schemeClr val="accent1"/>
+            </a:fillRef>
+            <a:effectRef idx="0">
+              <a:schemeClr val="accent1"/>
+            </a:effectRef>
+            <a:fontRef idx="minor">
+              <a:schemeClr val="lt1"/>
+            </a:fontRef>
+          </p:style>
+          <p:txBody>
+            <a:bodyPr rtlCol="0" anchor="ctr"/>
+            <a:lstStyle/>
+            <a:p>
+              <a:pPr algn="ctr"/>
+              <a:endParaRPr lang="LID4096"/>
+            </a:p>
+          </p:txBody>
+        </p:sp>
+        <p:sp>
+          <p:nvSpPr>
+            <p:cNvPr id="12" name="Freeform: Shape 11">
+              <a:extLst>
+                <a:ext uri="{FF2B5EF4-FFF2-40B4-BE49-F238E27FC236}">
+                  <a16:creationId xmlns:a16="http://schemas.microsoft.com/office/drawing/2014/main" id="{C608F083-9EAF-ED7E-623A-E81037BAAD87}"/>
+                </a:ext>
+              </a:extLst>
+            </p:cNvPr>
+            <p:cNvSpPr/>
+            <p:nvPr/>
+          </p:nvSpPr>
+          <p:spPr>
+            <a:xfrm>
+              <a:off x="2826914" y="1575506"/>
+              <a:ext cx="3764924" cy="1511122"/>
+            </a:xfrm>
+            <a:custGeom>
+              <a:avLst/>
+              <a:gdLst>
+                <a:gd name="csX0" fmla="*/ 0 w 2137893"/>
+                <a:gd name="csY0" fmla="*/ 360609 h 360609"/>
+                <a:gd name="csX1" fmla="*/ 2137893 w 2137893"/>
+                <a:gd name="csY1" fmla="*/ 0 h 360609"/>
+                <a:gd name="csX0" fmla="*/ 0 w 2137893"/>
+                <a:gd name="csY0" fmla="*/ 360609 h 360609"/>
+                <a:gd name="csX1" fmla="*/ 2137893 w 2137893"/>
+                <a:gd name="csY1" fmla="*/ 0 h 360609"/>
+                <a:gd name="csX0" fmla="*/ 0 w 2137893"/>
+                <a:gd name="csY0" fmla="*/ 360609 h 360609"/>
+                <a:gd name="csX1" fmla="*/ 2137893 w 2137893"/>
+                <a:gd name="csY1" fmla="*/ 0 h 360609"/>
+                <a:gd name="csX0" fmla="*/ 0 w 3764924"/>
+                <a:gd name="csY0" fmla="*/ 1511122 h 1511122"/>
+                <a:gd name="csX1" fmla="*/ 3764924 w 3764924"/>
+                <a:gd name="csY1" fmla="*/ 0 h 1511122"/>
+                <a:gd name="csX0" fmla="*/ 0 w 3764924"/>
+                <a:gd name="csY0" fmla="*/ 1511122 h 1511122"/>
+                <a:gd name="csX1" fmla="*/ 3764924 w 3764924"/>
+                <a:gd name="csY1" fmla="*/ 0 h 1511122"/>
+                <a:gd name="csX0" fmla="*/ 0 w 3764924"/>
+                <a:gd name="csY0" fmla="*/ 1511122 h 1511122"/>
+                <a:gd name="csX1" fmla="*/ 3764924 w 3764924"/>
+                <a:gd name="csY1" fmla="*/ 0 h 1511122"/>
+              </a:gdLst>
+              <a:ahLst/>
+              <a:cxnLst>
+                <a:cxn ang="0">
+                  <a:pos x="csX0" y="csY0"/>
+                </a:cxn>
+                <a:cxn ang="0">
+                  <a:pos x="csX1" y="csY1"/>
+                </a:cxn>
+              </a:cxnLst>
+              <a:rect l="l" t="t" r="r" b="b"/>
+              <a:pathLst>
+                <a:path w="3764924" h="1511122">
+                  <a:moveTo>
+                    <a:pt x="0" y="1511122"/>
+                  </a:moveTo>
+                  <a:cubicBezTo>
+                    <a:pt x="1562637" y="1476778"/>
+                    <a:pt x="2000519" y="94446"/>
+                    <a:pt x="3764924" y="0"/>
+                  </a:cubicBezTo>
+                </a:path>
+              </a:pathLst>
+            </a:custGeom>
+            <a:noFill/>
+            <a:ln w="25400">
+              <a:solidFill>
+                <a:schemeClr val="accent6">
+                  <a:lumMod val="60000"/>
+                  <a:lumOff val="40000"/>
+                </a:schemeClr>
+              </a:solidFill>
+            </a:ln>
+          </p:spPr>
+          <p:style>
+            <a:lnRef idx="2">
+              <a:schemeClr val="accent1">
+                <a:shade val="15000"/>
+              </a:schemeClr>
+            </a:lnRef>
+            <a:fillRef idx="1">
+              <a:schemeClr val="accent1"/>
+            </a:fillRef>
+            <a:effectRef idx="0">
+              <a:schemeClr val="accent1"/>
+            </a:effectRef>
+            <a:fontRef idx="minor">
+              <a:schemeClr val="lt1"/>
+            </a:fontRef>
+          </p:style>
+          <p:txBody>
+            <a:bodyPr rtlCol="0" anchor="ctr"/>
+            <a:lstStyle/>
+            <a:p>
+              <a:pPr algn="ctr"/>
+              <a:endParaRPr lang="LID4096"/>
+            </a:p>
+          </p:txBody>
+        </p:sp>
+      </p:grpSp>
+      <p:grpSp>
+        <p:nvGrpSpPr>
+          <p:cNvPr id="19" name="Group 18">
+            <a:extLst>
+              <a:ext uri="{FF2B5EF4-FFF2-40B4-BE49-F238E27FC236}">
+                <a16:creationId xmlns:a16="http://schemas.microsoft.com/office/drawing/2014/main" id="{AB622C6D-9A1B-D25A-558E-17D6E3EBEA1D}"/>
+              </a:ext>
+            </a:extLst>
+          </p:cNvPr>
+          <p:cNvGrpSpPr/>
+          <p:nvPr/>
+        </p:nvGrpSpPr>
+        <p:grpSpPr>
+          <a:xfrm>
+            <a:off x="4902558" y="1864551"/>
+            <a:ext cx="7156359" cy="1483956"/>
+            <a:chOff x="4902558" y="1864551"/>
+            <a:chExt cx="7156359" cy="1483956"/>
+          </a:xfrm>
+        </p:grpSpPr>
+        <p:sp>
+          <p:nvSpPr>
+            <p:cNvPr id="13" name="Rectangle: Rounded Corners 12">
+              <a:extLst>
+                <a:ext uri="{FF2B5EF4-FFF2-40B4-BE49-F238E27FC236}">
+                  <a16:creationId xmlns:a16="http://schemas.microsoft.com/office/drawing/2014/main" id="{85D2F67C-9BF8-53E8-8D6E-C7202BC5A175}"/>
+                </a:ext>
+              </a:extLst>
+            </p:cNvPr>
+            <p:cNvSpPr/>
+            <p:nvPr/>
+          </p:nvSpPr>
+          <p:spPr>
+            <a:xfrm>
+              <a:off x="6602568" y="1864551"/>
+              <a:ext cx="5456349" cy="354907"/>
+            </a:xfrm>
+            <a:prstGeom prst="roundRect">
+              <a:avLst>
+                <a:gd name="adj" fmla="val 6157"/>
+              </a:avLst>
+            </a:prstGeom>
+            <a:noFill/>
+            <a:ln w="38100">
+              <a:solidFill>
+                <a:schemeClr val="tx2">
+                  <a:lumMod val="50000"/>
+                  <a:lumOff val="50000"/>
+                </a:schemeClr>
+              </a:solidFill>
+            </a:ln>
+          </p:spPr>
+          <p:style>
+            <a:lnRef idx="2">
+              <a:schemeClr val="accent1">
+                <a:shade val="15000"/>
+              </a:schemeClr>
+            </a:lnRef>
+            <a:fillRef idx="1">
+              <a:schemeClr val="accent1"/>
+            </a:fillRef>
+            <a:effectRef idx="0">
+              <a:schemeClr val="accent1"/>
+            </a:effectRef>
+            <a:fontRef idx="minor">
+              <a:schemeClr val="lt1"/>
+            </a:fontRef>
+          </p:style>
+          <p:txBody>
+            <a:bodyPr rtlCol="0" anchor="ctr"/>
+            <a:lstStyle/>
+            <a:p>
+              <a:pPr algn="ctr"/>
+              <a:endParaRPr lang="LID4096"/>
+            </a:p>
+          </p:txBody>
+        </p:sp>
+        <p:sp>
+          <p:nvSpPr>
+            <p:cNvPr id="14" name="Freeform: Shape 13">
+              <a:extLst>
+                <a:ext uri="{FF2B5EF4-FFF2-40B4-BE49-F238E27FC236}">
+                  <a16:creationId xmlns:a16="http://schemas.microsoft.com/office/drawing/2014/main" id="{910A0C1E-A7D5-2221-2A9D-F3BC20402FF7}"/>
+                </a:ext>
+              </a:extLst>
+            </p:cNvPr>
+            <p:cNvSpPr/>
+            <p:nvPr/>
+          </p:nvSpPr>
+          <p:spPr>
+            <a:xfrm>
+              <a:off x="4902558" y="2055813"/>
+              <a:ext cx="1689279" cy="1292694"/>
+            </a:xfrm>
+            <a:custGeom>
+              <a:avLst/>
+              <a:gdLst>
+                <a:gd name="csX0" fmla="*/ 0 w 2137893"/>
+                <a:gd name="csY0" fmla="*/ 360609 h 360609"/>
+                <a:gd name="csX1" fmla="*/ 2137893 w 2137893"/>
+                <a:gd name="csY1" fmla="*/ 0 h 360609"/>
+                <a:gd name="csX0" fmla="*/ 0 w 2137893"/>
+                <a:gd name="csY0" fmla="*/ 360609 h 360609"/>
+                <a:gd name="csX1" fmla="*/ 2137893 w 2137893"/>
+                <a:gd name="csY1" fmla="*/ 0 h 360609"/>
+                <a:gd name="csX0" fmla="*/ 0 w 2137893"/>
+                <a:gd name="csY0" fmla="*/ 360609 h 360609"/>
+                <a:gd name="csX1" fmla="*/ 2137893 w 2137893"/>
+                <a:gd name="csY1" fmla="*/ 0 h 360609"/>
+                <a:gd name="csX0" fmla="*/ 0 w 3764924"/>
+                <a:gd name="csY0" fmla="*/ 1511122 h 1511122"/>
+                <a:gd name="csX1" fmla="*/ 3764924 w 3764924"/>
+                <a:gd name="csY1" fmla="*/ 0 h 1511122"/>
+                <a:gd name="csX0" fmla="*/ 0 w 3764924"/>
+                <a:gd name="csY0" fmla="*/ 1511122 h 1511122"/>
+                <a:gd name="csX1" fmla="*/ 3764924 w 3764924"/>
+                <a:gd name="csY1" fmla="*/ 0 h 1511122"/>
+                <a:gd name="csX0" fmla="*/ 0 w 3764924"/>
+                <a:gd name="csY0" fmla="*/ 1511122 h 1511122"/>
+                <a:gd name="csX1" fmla="*/ 3764924 w 3764924"/>
+                <a:gd name="csY1" fmla="*/ 0 h 1511122"/>
+              </a:gdLst>
+              <a:ahLst/>
+              <a:cxnLst>
+                <a:cxn ang="0">
+                  <a:pos x="csX0" y="csY0"/>
+                </a:cxn>
+                <a:cxn ang="0">
+                  <a:pos x="csX1" y="csY1"/>
+                </a:cxn>
+              </a:cxnLst>
+              <a:rect l="l" t="t" r="r" b="b"/>
+              <a:pathLst>
+                <a:path w="3764924" h="1511122">
+                  <a:moveTo>
+                    <a:pt x="0" y="1511122"/>
+                  </a:moveTo>
+                  <a:cubicBezTo>
+                    <a:pt x="1562637" y="1476778"/>
+                    <a:pt x="2000519" y="94446"/>
+                    <a:pt x="3764924" y="0"/>
+                  </a:cubicBezTo>
+                </a:path>
+              </a:pathLst>
+            </a:custGeom>
+            <a:noFill/>
+            <a:ln w="25400">
+              <a:solidFill>
+                <a:schemeClr val="tx2">
+                  <a:lumMod val="50000"/>
+                  <a:lumOff val="50000"/>
+                </a:schemeClr>
+              </a:solidFill>
+            </a:ln>
+          </p:spPr>
+          <p:style>
+            <a:lnRef idx="2">
+              <a:schemeClr val="accent1">
+                <a:shade val="15000"/>
+              </a:schemeClr>
+            </a:lnRef>
+            <a:fillRef idx="1">
+              <a:schemeClr val="accent1"/>
+            </a:fillRef>
+            <a:effectRef idx="0">
+              <a:schemeClr val="accent1"/>
+            </a:effectRef>
+            <a:fontRef idx="minor">
+              <a:schemeClr val="lt1"/>
+            </a:fontRef>
+          </p:style>
+          <p:txBody>
+            <a:bodyPr rtlCol="0" anchor="ctr"/>
+            <a:lstStyle/>
+            <a:p>
+              <a:pPr algn="ctr"/>
+              <a:endParaRPr lang="LID4096"/>
+            </a:p>
+          </p:txBody>
+        </p:sp>
+      </p:grpSp>
+      <p:grpSp>
+        <p:nvGrpSpPr>
+          <p:cNvPr id="20" name="Group 19">
+            <a:extLst>
+              <a:ext uri="{FF2B5EF4-FFF2-40B4-BE49-F238E27FC236}">
+                <a16:creationId xmlns:a16="http://schemas.microsoft.com/office/drawing/2014/main" id="{081AC16B-AB4F-D47B-63B6-7A35D4AE09C7}"/>
+              </a:ext>
+            </a:extLst>
+          </p:cNvPr>
+          <p:cNvGrpSpPr/>
+          <p:nvPr/>
+        </p:nvGrpSpPr>
+        <p:grpSpPr>
+          <a:xfrm>
+            <a:off x="5061342" y="1690688"/>
+            <a:ext cx="7001868" cy="2161346"/>
+            <a:chOff x="5061342" y="1690688"/>
+            <a:chExt cx="7001868" cy="2161346"/>
+          </a:xfrm>
+        </p:grpSpPr>
+        <p:sp>
+          <p:nvSpPr>
+            <p:cNvPr id="15" name="Rectangle: Rounded Corners 14">
+              <a:extLst>
+                <a:ext uri="{FF2B5EF4-FFF2-40B4-BE49-F238E27FC236}">
+                  <a16:creationId xmlns:a16="http://schemas.microsoft.com/office/drawing/2014/main" id="{B1B05710-E5DC-22B6-6399-B23B81646015}"/>
+                </a:ext>
+              </a:extLst>
+            </p:cNvPr>
+            <p:cNvSpPr/>
+            <p:nvPr/>
+          </p:nvSpPr>
+          <p:spPr>
+            <a:xfrm>
+              <a:off x="6606861" y="1690688"/>
+              <a:ext cx="5456349" cy="146698"/>
+            </a:xfrm>
+            <a:prstGeom prst="roundRect">
+              <a:avLst>
+                <a:gd name="adj" fmla="val 6157"/>
+              </a:avLst>
+            </a:prstGeom>
+            <a:noFill/>
+            <a:ln w="38100">
+              <a:solidFill>
+                <a:schemeClr val="accent2">
+                  <a:lumMod val="60000"/>
+                  <a:lumOff val="40000"/>
+                </a:schemeClr>
+              </a:solidFill>
+            </a:ln>
+          </p:spPr>
+          <p:style>
+            <a:lnRef idx="2">
+              <a:schemeClr val="accent1">
+                <a:shade val="15000"/>
+              </a:schemeClr>
+            </a:lnRef>
+            <a:fillRef idx="1">
+              <a:schemeClr val="accent1"/>
+            </a:fillRef>
+            <a:effectRef idx="0">
+              <a:schemeClr val="accent1"/>
+            </a:effectRef>
+            <a:fontRef idx="minor">
+              <a:schemeClr val="lt1"/>
+            </a:fontRef>
+          </p:style>
+          <p:txBody>
+            <a:bodyPr rtlCol="0" anchor="ctr"/>
+            <a:lstStyle/>
+            <a:p>
+              <a:pPr algn="ctr"/>
+              <a:endParaRPr lang="LID4096"/>
+            </a:p>
+          </p:txBody>
+        </p:sp>
+        <p:sp>
+          <p:nvSpPr>
+            <p:cNvPr id="16" name="Freeform: Shape 15">
+              <a:extLst>
+                <a:ext uri="{FF2B5EF4-FFF2-40B4-BE49-F238E27FC236}">
+                  <a16:creationId xmlns:a16="http://schemas.microsoft.com/office/drawing/2014/main" id="{4E1FB1B6-4985-B3C0-DEA5-9A445B7865F0}"/>
+                </a:ext>
+              </a:extLst>
+            </p:cNvPr>
+            <p:cNvSpPr/>
+            <p:nvPr/>
+          </p:nvSpPr>
+          <p:spPr>
+            <a:xfrm>
+              <a:off x="5061342" y="1760113"/>
+              <a:ext cx="1530496" cy="2091921"/>
+            </a:xfrm>
+            <a:custGeom>
+              <a:avLst/>
+              <a:gdLst>
+                <a:gd name="csX0" fmla="*/ 0 w 2137893"/>
+                <a:gd name="csY0" fmla="*/ 360609 h 360609"/>
+                <a:gd name="csX1" fmla="*/ 2137893 w 2137893"/>
+                <a:gd name="csY1" fmla="*/ 0 h 360609"/>
+                <a:gd name="csX0" fmla="*/ 0 w 2137893"/>
+                <a:gd name="csY0" fmla="*/ 360609 h 360609"/>
+                <a:gd name="csX1" fmla="*/ 2137893 w 2137893"/>
+                <a:gd name="csY1" fmla="*/ 0 h 360609"/>
+                <a:gd name="csX0" fmla="*/ 0 w 2137893"/>
+                <a:gd name="csY0" fmla="*/ 360609 h 360609"/>
+                <a:gd name="csX1" fmla="*/ 2137893 w 2137893"/>
+                <a:gd name="csY1" fmla="*/ 0 h 360609"/>
+                <a:gd name="csX0" fmla="*/ 0 w 3764924"/>
+                <a:gd name="csY0" fmla="*/ 1511122 h 1511122"/>
+                <a:gd name="csX1" fmla="*/ 3764924 w 3764924"/>
+                <a:gd name="csY1" fmla="*/ 0 h 1511122"/>
+                <a:gd name="csX0" fmla="*/ 0 w 3764924"/>
+                <a:gd name="csY0" fmla="*/ 1511122 h 1511122"/>
+                <a:gd name="csX1" fmla="*/ 3764924 w 3764924"/>
+                <a:gd name="csY1" fmla="*/ 0 h 1511122"/>
+                <a:gd name="csX0" fmla="*/ 0 w 3764924"/>
+                <a:gd name="csY0" fmla="*/ 1511122 h 1511122"/>
+                <a:gd name="csX1" fmla="*/ 3764924 w 3764924"/>
+                <a:gd name="csY1" fmla="*/ 0 h 1511122"/>
+              </a:gdLst>
+              <a:ahLst/>
+              <a:cxnLst>
+                <a:cxn ang="0">
+                  <a:pos x="csX0" y="csY0"/>
+                </a:cxn>
+                <a:cxn ang="0">
+                  <a:pos x="csX1" y="csY1"/>
+                </a:cxn>
+              </a:cxnLst>
+              <a:rect l="l" t="t" r="r" b="b"/>
+              <a:pathLst>
+                <a:path w="3764924" h="1511122">
+                  <a:moveTo>
+                    <a:pt x="0" y="1511122"/>
+                  </a:moveTo>
+                  <a:cubicBezTo>
+                    <a:pt x="1562637" y="1476778"/>
+                    <a:pt x="2000519" y="94446"/>
+                    <a:pt x="3764924" y="0"/>
+                  </a:cubicBezTo>
+                </a:path>
+              </a:pathLst>
+            </a:custGeom>
+            <a:noFill/>
+            <a:ln w="25400">
+              <a:solidFill>
+                <a:schemeClr val="accent2">
+                  <a:lumMod val="60000"/>
+                  <a:lumOff val="40000"/>
+                </a:schemeClr>
+              </a:solidFill>
+            </a:ln>
+          </p:spPr>
+          <p:style>
+            <a:lnRef idx="2">
+              <a:schemeClr val="accent1">
+                <a:shade val="15000"/>
+              </a:schemeClr>
+            </a:lnRef>
+            <a:fillRef idx="1">
+              <a:schemeClr val="accent1"/>
+            </a:fillRef>
+            <a:effectRef idx="0">
+              <a:schemeClr val="accent1"/>
+            </a:effectRef>
+            <a:fontRef idx="minor">
+              <a:schemeClr val="lt1"/>
+            </a:fontRef>
+          </p:style>
+          <p:txBody>
+            <a:bodyPr rtlCol="0" anchor="ctr"/>
+            <a:lstStyle/>
+            <a:p>
+              <a:pPr algn="ctr"/>
+              <a:endParaRPr lang="LID4096"/>
+            </a:p>
+          </p:txBody>
+        </p:sp>
+      </p:grpSp>
     </p:spTree>
     <p:extLst>
       <p:ext uri="{BB962C8B-B14F-4D97-AF65-F5344CB8AC3E}">
@@ -22629,10 +24908,252 @@
   <p:clrMapOvr>
     <a:masterClrMapping/>
   </p:clrMapOvr>
+  <p:timing>
+    <p:tnLst>
+      <p:par>
+        <p:cTn id="1" dur="indefinite" restart="never" nodeType="tmRoot">
+          <p:childTnLst>
+            <p:seq concurrent="1" nextAc="seek">
+              <p:cTn id="2" dur="indefinite" nodeType="mainSeq">
+                <p:childTnLst>
+                  <p:par>
+                    <p:cTn id="3" fill="hold">
+                      <p:stCondLst>
+                        <p:cond delay="indefinite"/>
+                      </p:stCondLst>
+                      <p:childTnLst>
+                        <p:par>
+                          <p:cTn id="4" fill="hold">
+                            <p:stCondLst>
+                              <p:cond delay="0"/>
+                            </p:stCondLst>
+                            <p:childTnLst>
+                              <p:par>
+                                <p:cTn id="5" presetID="10" presetClass="entr" presetSubtype="0" fill="hold" nodeType="clickEffect">
+                                  <p:stCondLst>
+                                    <p:cond delay="0"/>
+                                  </p:stCondLst>
+                                  <p:childTnLst>
+                                    <p:set>
+                                      <p:cBhvr>
+                                        <p:cTn id="6" dur="1" fill="hold">
+                                          <p:stCondLst>
+                                            <p:cond delay="0"/>
+                                          </p:stCondLst>
+                                        </p:cTn>
+                                        <p:tgtEl>
+                                          <p:spTgt spid="17"/>
+                                        </p:tgtEl>
+                                        <p:attrNameLst>
+                                          <p:attrName>style.visibility</p:attrName>
+                                        </p:attrNameLst>
+                                      </p:cBhvr>
+                                      <p:to>
+                                        <p:strVal val="visible"/>
+                                      </p:to>
+                                    </p:set>
+                                    <p:animEffect transition="in" filter="fade">
+                                      <p:cBhvr>
+                                        <p:cTn id="7" dur="500"/>
+                                        <p:tgtEl>
+                                          <p:spTgt spid="17"/>
+                                        </p:tgtEl>
+                                      </p:cBhvr>
+                                    </p:animEffect>
+                                  </p:childTnLst>
+                                </p:cTn>
+                              </p:par>
+                            </p:childTnLst>
+                          </p:cTn>
+                        </p:par>
+                      </p:childTnLst>
+                    </p:cTn>
+                  </p:par>
+                  <p:par>
+                    <p:cTn id="8" fill="hold">
+                      <p:stCondLst>
+                        <p:cond delay="indefinite"/>
+                      </p:stCondLst>
+                      <p:childTnLst>
+                        <p:par>
+                          <p:cTn id="9" fill="hold">
+                            <p:stCondLst>
+                              <p:cond delay="0"/>
+                            </p:stCondLst>
+                            <p:childTnLst>
+                              <p:par>
+                                <p:cTn id="10" presetID="10" presetClass="entr" presetSubtype="0" fill="hold" nodeType="clickEffect">
+                                  <p:stCondLst>
+                                    <p:cond delay="0"/>
+                                  </p:stCondLst>
+                                  <p:childTnLst>
+                                    <p:set>
+                                      <p:cBhvr>
+                                        <p:cTn id="11" dur="1" fill="hold">
+                                          <p:stCondLst>
+                                            <p:cond delay="0"/>
+                                          </p:stCondLst>
+                                        </p:cTn>
+                                        <p:tgtEl>
+                                          <p:spTgt spid="18"/>
+                                        </p:tgtEl>
+                                        <p:attrNameLst>
+                                          <p:attrName>style.visibility</p:attrName>
+                                        </p:attrNameLst>
+                                      </p:cBhvr>
+                                      <p:to>
+                                        <p:strVal val="visible"/>
+                                      </p:to>
+                                    </p:set>
+                                    <p:animEffect transition="in" filter="fade">
+                                      <p:cBhvr>
+                                        <p:cTn id="12" dur="500"/>
+                                        <p:tgtEl>
+                                          <p:spTgt spid="18"/>
+                                        </p:tgtEl>
+                                      </p:cBhvr>
+                                    </p:animEffect>
+                                  </p:childTnLst>
+                                </p:cTn>
+                              </p:par>
+                            </p:childTnLst>
+                          </p:cTn>
+                        </p:par>
+                      </p:childTnLst>
+                    </p:cTn>
+                  </p:par>
+                  <p:par>
+                    <p:cTn id="13" fill="hold">
+                      <p:stCondLst>
+                        <p:cond delay="indefinite"/>
+                      </p:stCondLst>
+                      <p:childTnLst>
+                        <p:par>
+                          <p:cTn id="14" fill="hold">
+                            <p:stCondLst>
+                              <p:cond delay="0"/>
+                            </p:stCondLst>
+                            <p:childTnLst>
+                              <p:par>
+                                <p:cTn id="15" presetID="10" presetClass="entr" presetSubtype="0" fill="hold" nodeType="clickEffect">
+                                  <p:stCondLst>
+                                    <p:cond delay="0"/>
+                                  </p:stCondLst>
+                                  <p:childTnLst>
+                                    <p:set>
+                                      <p:cBhvr>
+                                        <p:cTn id="16" dur="1" fill="hold">
+                                          <p:stCondLst>
+                                            <p:cond delay="0"/>
+                                          </p:stCondLst>
+                                        </p:cTn>
+                                        <p:tgtEl>
+                                          <p:spTgt spid="19"/>
+                                        </p:tgtEl>
+                                        <p:attrNameLst>
+                                          <p:attrName>style.visibility</p:attrName>
+                                        </p:attrNameLst>
+                                      </p:cBhvr>
+                                      <p:to>
+                                        <p:strVal val="visible"/>
+                                      </p:to>
+                                    </p:set>
+                                    <p:animEffect transition="in" filter="fade">
+                                      <p:cBhvr>
+                                        <p:cTn id="17" dur="500"/>
+                                        <p:tgtEl>
+                                          <p:spTgt spid="19"/>
+                                        </p:tgtEl>
+                                      </p:cBhvr>
+                                    </p:animEffect>
+                                  </p:childTnLst>
+                                </p:cTn>
+                              </p:par>
+                            </p:childTnLst>
+                          </p:cTn>
+                        </p:par>
+                      </p:childTnLst>
+                    </p:cTn>
+                  </p:par>
+                  <p:par>
+                    <p:cTn id="18" fill="hold">
+                      <p:stCondLst>
+                        <p:cond delay="indefinite"/>
+                      </p:stCondLst>
+                      <p:childTnLst>
+                        <p:par>
+                          <p:cTn id="19" fill="hold">
+                            <p:stCondLst>
+                              <p:cond delay="0"/>
+                            </p:stCondLst>
+                            <p:childTnLst>
+                              <p:par>
+                                <p:cTn id="20" presetID="10" presetClass="entr" presetSubtype="0" fill="hold" nodeType="clickEffect">
+                                  <p:stCondLst>
+                                    <p:cond delay="0"/>
+                                  </p:stCondLst>
+                                  <p:childTnLst>
+                                    <p:set>
+                                      <p:cBhvr>
+                                        <p:cTn id="21" dur="1" fill="hold">
+                                          <p:stCondLst>
+                                            <p:cond delay="0"/>
+                                          </p:stCondLst>
+                                        </p:cTn>
+                                        <p:tgtEl>
+                                          <p:spTgt spid="20"/>
+                                        </p:tgtEl>
+                                        <p:attrNameLst>
+                                          <p:attrName>style.visibility</p:attrName>
+                                        </p:attrNameLst>
+                                      </p:cBhvr>
+                                      <p:to>
+                                        <p:strVal val="visible"/>
+                                      </p:to>
+                                    </p:set>
+                                    <p:animEffect transition="in" filter="fade">
+                                      <p:cBhvr>
+                                        <p:cTn id="22" dur="500"/>
+                                        <p:tgtEl>
+                                          <p:spTgt spid="20"/>
+                                        </p:tgtEl>
+                                      </p:cBhvr>
+                                    </p:animEffect>
+                                  </p:childTnLst>
+                                </p:cTn>
+                              </p:par>
+                            </p:childTnLst>
+                          </p:cTn>
+                        </p:par>
+                      </p:childTnLst>
+                    </p:cTn>
+                  </p:par>
+                </p:childTnLst>
+              </p:cTn>
+              <p:prevCondLst>
+                <p:cond evt="onPrev" delay="0">
+                  <p:tgtEl>
+                    <p:sldTgt/>
+                  </p:tgtEl>
+                </p:cond>
+              </p:prevCondLst>
+              <p:nextCondLst>
+                <p:cond evt="onNext" delay="0">
+                  <p:tgtEl>
+                    <p:sldTgt/>
+                  </p:tgtEl>
+                </p:cond>
+              </p:nextCondLst>
+            </p:seq>
+          </p:childTnLst>
+        </p:cTn>
+      </p:par>
+    </p:tnLst>
+  </p:timing>
 </p:sld>
 </file>
 
-<file path=ppt/slides/slide22.xml><?xml version="1.0" encoding="utf-8"?>
+<file path=ppt/slides/slide23.xml><?xml version="1.0" encoding="utf-8"?>
 <p:sld xmlns:a="http://schemas.openxmlformats.org/drawingml/2006/main" xmlns:r="http://schemas.openxmlformats.org/officeDocument/2006/relationships" xmlns:p="http://schemas.openxmlformats.org/presentationml/2006/main">
   <p:cSld>
     <p:spTree>
@@ -23976,6 +26497,276 @@
               </a:rPr>
               <a:t>}</a:t>
             </a:r>
+          </a:p>
+        </p:txBody>
+      </p:sp>
+      <p:sp>
+        <p:nvSpPr>
+          <p:cNvPr id="4" name="Rectangle: Rounded Corners 3">
+            <a:extLst>
+              <a:ext uri="{FF2B5EF4-FFF2-40B4-BE49-F238E27FC236}">
+                <a16:creationId xmlns:a16="http://schemas.microsoft.com/office/drawing/2014/main" id="{3CCF970C-BDA2-6558-181A-A9C1D865C620}"/>
+              </a:ext>
+            </a:extLst>
+          </p:cNvPr>
+          <p:cNvSpPr/>
+          <p:nvPr/>
+        </p:nvSpPr>
+        <p:spPr>
+          <a:xfrm>
+            <a:off x="6606862" y="1279301"/>
+            <a:ext cx="5456349" cy="1347989"/>
+          </a:xfrm>
+          <a:prstGeom prst="roundRect">
+            <a:avLst>
+              <a:gd name="adj" fmla="val 6157"/>
+            </a:avLst>
+          </a:prstGeom>
+          <a:noFill/>
+          <a:ln w="38100">
+            <a:solidFill>
+              <a:srgbClr val="FFC000"/>
+            </a:solidFill>
+          </a:ln>
+        </p:spPr>
+        <p:style>
+          <a:lnRef idx="2">
+            <a:schemeClr val="accent1">
+              <a:shade val="15000"/>
+            </a:schemeClr>
+          </a:lnRef>
+          <a:fillRef idx="1">
+            <a:schemeClr val="accent1"/>
+          </a:fillRef>
+          <a:effectRef idx="0">
+            <a:schemeClr val="accent1"/>
+          </a:effectRef>
+          <a:fontRef idx="minor">
+            <a:schemeClr val="lt1"/>
+          </a:fontRef>
+        </p:style>
+        <p:txBody>
+          <a:bodyPr rtlCol="0" anchor="ctr"/>
+          <a:lstStyle/>
+          <a:p>
+            <a:pPr algn="ctr"/>
+            <a:endParaRPr lang="LID4096"/>
+          </a:p>
+        </p:txBody>
+      </p:sp>
+      <p:sp>
+        <p:nvSpPr>
+          <p:cNvPr id="7" name="Rectangle: Rounded Corners 6">
+            <a:extLst>
+              <a:ext uri="{FF2B5EF4-FFF2-40B4-BE49-F238E27FC236}">
+                <a16:creationId xmlns:a16="http://schemas.microsoft.com/office/drawing/2014/main" id="{3BC5970F-7278-851B-68EA-8CD0521F951D}"/>
+              </a:ext>
+            </a:extLst>
+          </p:cNvPr>
+          <p:cNvSpPr/>
+          <p:nvPr/>
+        </p:nvSpPr>
+        <p:spPr>
+          <a:xfrm>
+            <a:off x="6606861" y="2223752"/>
+            <a:ext cx="5456349" cy="403538"/>
+          </a:xfrm>
+          <a:prstGeom prst="roundRect">
+            <a:avLst>
+              <a:gd name="adj" fmla="val 6157"/>
+            </a:avLst>
+          </a:prstGeom>
+          <a:noFill/>
+          <a:ln w="38100">
+            <a:solidFill>
+              <a:srgbClr val="FFC000"/>
+            </a:solidFill>
+          </a:ln>
+        </p:spPr>
+        <p:style>
+          <a:lnRef idx="2">
+            <a:schemeClr val="accent1">
+              <a:shade val="15000"/>
+            </a:schemeClr>
+          </a:lnRef>
+          <a:fillRef idx="1">
+            <a:schemeClr val="accent1"/>
+          </a:fillRef>
+          <a:effectRef idx="0">
+            <a:schemeClr val="accent1"/>
+          </a:effectRef>
+          <a:fontRef idx="minor">
+            <a:schemeClr val="lt1"/>
+          </a:fontRef>
+        </p:style>
+        <p:txBody>
+          <a:bodyPr rtlCol="0" anchor="ctr"/>
+          <a:lstStyle/>
+          <a:p>
+            <a:pPr algn="ctr"/>
+            <a:endParaRPr lang="LID4096"/>
+          </a:p>
+        </p:txBody>
+      </p:sp>
+      <p:sp>
+        <p:nvSpPr>
+          <p:cNvPr id="9" name="Rectangle: Rounded Corners 8">
+            <a:extLst>
+              <a:ext uri="{FF2B5EF4-FFF2-40B4-BE49-F238E27FC236}">
+                <a16:creationId xmlns:a16="http://schemas.microsoft.com/office/drawing/2014/main" id="{89F6002B-8FFC-A076-47AF-723B1E32416C}"/>
+              </a:ext>
+            </a:extLst>
+          </p:cNvPr>
+          <p:cNvSpPr/>
+          <p:nvPr/>
+        </p:nvSpPr>
+        <p:spPr>
+          <a:xfrm>
+            <a:off x="6606860" y="1472485"/>
+            <a:ext cx="5456349" cy="184597"/>
+          </a:xfrm>
+          <a:prstGeom prst="roundRect">
+            <a:avLst>
+              <a:gd name="adj" fmla="val 6157"/>
+            </a:avLst>
+          </a:prstGeom>
+          <a:noFill/>
+          <a:ln w="38100">
+            <a:solidFill>
+              <a:srgbClr val="FFC000"/>
+            </a:solidFill>
+          </a:ln>
+        </p:spPr>
+        <p:style>
+          <a:lnRef idx="2">
+            <a:schemeClr val="accent1">
+              <a:shade val="15000"/>
+            </a:schemeClr>
+          </a:lnRef>
+          <a:fillRef idx="1">
+            <a:schemeClr val="accent1"/>
+          </a:fillRef>
+          <a:effectRef idx="0">
+            <a:schemeClr val="accent1"/>
+          </a:effectRef>
+          <a:fontRef idx="minor">
+            <a:schemeClr val="lt1"/>
+          </a:fontRef>
+        </p:style>
+        <p:txBody>
+          <a:bodyPr rtlCol="0" anchor="ctr"/>
+          <a:lstStyle/>
+          <a:p>
+            <a:pPr algn="ctr"/>
+            <a:endParaRPr lang="LID4096"/>
+          </a:p>
+        </p:txBody>
+      </p:sp>
+      <p:sp>
+        <p:nvSpPr>
+          <p:cNvPr id="10" name="Rectangle: Rounded Corners 9">
+            <a:extLst>
+              <a:ext uri="{FF2B5EF4-FFF2-40B4-BE49-F238E27FC236}">
+                <a16:creationId xmlns:a16="http://schemas.microsoft.com/office/drawing/2014/main" id="{B4BA6779-5E9D-CBFB-EB8F-A19A611023D9}"/>
+              </a:ext>
+            </a:extLst>
+          </p:cNvPr>
+          <p:cNvSpPr/>
+          <p:nvPr/>
+        </p:nvSpPr>
+        <p:spPr>
+          <a:xfrm>
+            <a:off x="6572518" y="3022243"/>
+            <a:ext cx="5529329" cy="2856964"/>
+          </a:xfrm>
+          <a:prstGeom prst="roundRect">
+            <a:avLst>
+              <a:gd name="adj" fmla="val 2551"/>
+            </a:avLst>
+          </a:prstGeom>
+          <a:noFill/>
+          <a:ln w="38100">
+            <a:solidFill>
+              <a:srgbClr val="FFC000"/>
+            </a:solidFill>
+          </a:ln>
+        </p:spPr>
+        <p:style>
+          <a:lnRef idx="2">
+            <a:schemeClr val="accent1">
+              <a:shade val="15000"/>
+            </a:schemeClr>
+          </a:lnRef>
+          <a:fillRef idx="1">
+            <a:schemeClr val="accent1"/>
+          </a:fillRef>
+          <a:effectRef idx="0">
+            <a:schemeClr val="accent1"/>
+          </a:effectRef>
+          <a:fontRef idx="minor">
+            <a:schemeClr val="lt1"/>
+          </a:fontRef>
+        </p:style>
+        <p:txBody>
+          <a:bodyPr rtlCol="0" anchor="ctr"/>
+          <a:lstStyle/>
+          <a:p>
+            <a:pPr algn="ctr"/>
+            <a:endParaRPr lang="LID4096"/>
+          </a:p>
+        </p:txBody>
+      </p:sp>
+      <p:sp>
+        <p:nvSpPr>
+          <p:cNvPr id="12" name="Rectangle: Rounded Corners 11">
+            <a:extLst>
+              <a:ext uri="{FF2B5EF4-FFF2-40B4-BE49-F238E27FC236}">
+                <a16:creationId xmlns:a16="http://schemas.microsoft.com/office/drawing/2014/main" id="{272070AC-2F90-125E-0C60-87D5A93CC32A}"/>
+              </a:ext>
+            </a:extLst>
+          </p:cNvPr>
+          <p:cNvSpPr/>
+          <p:nvPr/>
+        </p:nvSpPr>
+        <p:spPr>
+          <a:xfrm>
+            <a:off x="6606859" y="1657082"/>
+            <a:ext cx="5456349" cy="184597"/>
+          </a:xfrm>
+          <a:prstGeom prst="roundRect">
+            <a:avLst>
+              <a:gd name="adj" fmla="val 6157"/>
+            </a:avLst>
+          </a:prstGeom>
+          <a:noFill/>
+          <a:ln w="38100">
+            <a:solidFill>
+              <a:srgbClr val="FFC000"/>
+            </a:solidFill>
+          </a:ln>
+        </p:spPr>
+        <p:style>
+          <a:lnRef idx="2">
+            <a:schemeClr val="accent1">
+              <a:shade val="15000"/>
+            </a:schemeClr>
+          </a:lnRef>
+          <a:fillRef idx="1">
+            <a:schemeClr val="accent1"/>
+          </a:fillRef>
+          <a:effectRef idx="0">
+            <a:schemeClr val="accent1"/>
+          </a:effectRef>
+          <a:fontRef idx="minor">
+            <a:schemeClr val="lt1"/>
+          </a:fontRef>
+        </p:style>
+        <p:txBody>
+          <a:bodyPr rtlCol="0" anchor="ctr"/>
+          <a:lstStyle/>
+          <a:p>
+            <a:pPr algn="ctr"/>
+            <a:endParaRPr lang="LID4096"/>
           </a:p>
         </p:txBody>
       </p:sp>
@@ -24181,6 +26972,41 @@
                                   </p:childTnLst>
                                 </p:cTn>
                               </p:par>
+                              <p:par>
+                                <p:cTn id="17" presetID="10" presetClass="entr" presetSubtype="0" fill="hold" grpId="0" nodeType="withEffect">
+                                  <p:stCondLst>
+                                    <p:cond delay="0"/>
+                                  </p:stCondLst>
+                                  <p:childTnLst>
+                                    <p:set>
+                                      <p:cBhvr>
+                                        <p:cTn id="18" dur="1" fill="hold">
+                                          <p:stCondLst>
+                                            <p:cond delay="0"/>
+                                          </p:stCondLst>
+                                        </p:cTn>
+                                        <p:tgtEl>
+                                          <p:spTgt spid="4"/>
+                                        </p:tgtEl>
+                                        <p:attrNameLst>
+                                          <p:attrName>style.visibility</p:attrName>
+                                        </p:attrNameLst>
+                                      </p:cBhvr>
+                                      <p:to>
+                                        <p:strVal val="visible"/>
+                                      </p:to>
+                                    </p:set>
+                                    <p:animEffect transition="in" filter="fade">
+                                      <p:cBhvr>
+                                        <p:cTn id="19" dur="500"/>
+                                        <p:tgtEl>
+                                          <p:spTgt spid="4"/>
+                                        </p:tgtEl>
+                                      </p:cBhvr>
+                                    </p:animEffect>
+                                  </p:childTnLst>
+                                </p:cTn>
+                              </p:par>
                             </p:childTnLst>
                           </p:cTn>
                         </p:par>
@@ -24188,26 +27014,26 @@
                     </p:cTn>
                   </p:par>
                   <p:par>
-                    <p:cTn id="17" fill="hold">
+                    <p:cTn id="20" fill="hold">
                       <p:stCondLst>
                         <p:cond delay="indefinite"/>
                       </p:stCondLst>
                       <p:childTnLst>
                         <p:par>
-                          <p:cTn id="18" fill="hold">
+                          <p:cTn id="21" fill="hold">
                             <p:stCondLst>
                               <p:cond delay="0"/>
                             </p:stCondLst>
                             <p:childTnLst>
                               <p:par>
-                                <p:cTn id="19" presetID="10" presetClass="entr" presetSubtype="0" fill="hold" nodeType="clickEffect">
+                                <p:cTn id="22" presetID="10" presetClass="entr" presetSubtype="0" fill="hold" nodeType="clickEffect">
                                   <p:stCondLst>
                                     <p:cond delay="0"/>
                                   </p:stCondLst>
                                   <p:childTnLst>
                                     <p:set>
                                       <p:cBhvr>
-                                        <p:cTn id="20" dur="1" fill="hold">
+                                        <p:cTn id="23" dur="1" fill="hold">
                                           <p:stCondLst>
                                             <p:cond delay="0"/>
                                           </p:stCondLst>
@@ -24229,7 +27055,7 @@
                                     </p:set>
                                     <p:animEffect transition="in" filter="fade">
                                       <p:cBhvr>
-                                        <p:cTn id="21" dur="500"/>
+                                        <p:cTn id="24" dur="500"/>
                                         <p:tgtEl>
                                           <p:spTgt spid="3">
                                             <p:txEl>
@@ -24242,33 +27068,15 @@
                                   </p:childTnLst>
                                 </p:cTn>
                               </p:par>
-                            </p:childTnLst>
-                          </p:cTn>
-                        </p:par>
-                      </p:childTnLst>
-                    </p:cTn>
-                  </p:par>
-                  <p:par>
-                    <p:cTn id="22" fill="hold">
-                      <p:stCondLst>
-                        <p:cond delay="indefinite"/>
-                      </p:stCondLst>
-                      <p:childTnLst>
-                        <p:par>
-                          <p:cTn id="23" fill="hold">
-                            <p:stCondLst>
-                              <p:cond delay="0"/>
-                            </p:stCondLst>
-                            <p:childTnLst>
                               <p:par>
-                                <p:cTn id="24" presetID="10" presetClass="entr" presetSubtype="0" fill="hold" nodeType="clickEffect">
+                                <p:cTn id="25" presetID="10" presetClass="entr" presetSubtype="0" fill="hold" nodeType="withEffect">
                                   <p:stCondLst>
                                     <p:cond delay="0"/>
                                   </p:stCondLst>
                                   <p:childTnLst>
                                     <p:set>
                                       <p:cBhvr>
-                                        <p:cTn id="25" dur="1" fill="hold">
+                                        <p:cTn id="26" dur="1" fill="hold">
                                           <p:stCondLst>
                                             <p:cond delay="0"/>
                                           </p:stCondLst>
@@ -24290,7 +27098,7 @@
                                     </p:set>
                                     <p:animEffect transition="in" filter="fade">
                                       <p:cBhvr>
-                                        <p:cTn id="26" dur="500"/>
+                                        <p:cTn id="27" dur="500"/>
                                         <p:tgtEl>
                                           <p:spTgt spid="3">
                                             <p:txEl>
@@ -24303,33 +27111,15 @@
                                   </p:childTnLst>
                                 </p:cTn>
                               </p:par>
-                            </p:childTnLst>
-                          </p:cTn>
-                        </p:par>
-                      </p:childTnLst>
-                    </p:cTn>
-                  </p:par>
-                  <p:par>
-                    <p:cTn id="27" fill="hold">
-                      <p:stCondLst>
-                        <p:cond delay="indefinite"/>
-                      </p:stCondLst>
-                      <p:childTnLst>
-                        <p:par>
-                          <p:cTn id="28" fill="hold">
-                            <p:stCondLst>
-                              <p:cond delay="0"/>
-                            </p:stCondLst>
-                            <p:childTnLst>
                               <p:par>
-                                <p:cTn id="29" presetID="10" presetClass="entr" presetSubtype="0" fill="hold" nodeType="clickEffect">
+                                <p:cTn id="28" presetID="10" presetClass="entr" presetSubtype="0" fill="hold" nodeType="withEffect">
                                   <p:stCondLst>
                                     <p:cond delay="0"/>
                                   </p:stCondLst>
                                   <p:childTnLst>
                                     <p:set>
                                       <p:cBhvr>
-                                        <p:cTn id="30" dur="1" fill="hold">
+                                        <p:cTn id="29" dur="1" fill="hold">
                                           <p:stCondLst>
                                             <p:cond delay="0"/>
                                           </p:stCondLst>
@@ -24351,11 +27141,54 @@
                                     </p:set>
                                     <p:animEffect transition="in" filter="fade">
                                       <p:cBhvr>
-                                        <p:cTn id="31" dur="500"/>
+                                        <p:cTn id="30" dur="500"/>
                                         <p:tgtEl>
                                           <p:spTgt spid="3">
                                             <p:txEl>
                                               <p:pRg st="7" end="7"/>
+                                            </p:txEl>
+                                          </p:spTgt>
+                                        </p:tgtEl>
+                                      </p:cBhvr>
+                                    </p:animEffect>
+                                  </p:childTnLst>
+                                </p:cTn>
+                              </p:par>
+                              <p:par>
+                                <p:cTn id="31" presetID="10" presetClass="entr" presetSubtype="0" fill="hold" nodeType="withEffect">
+                                  <p:stCondLst>
+                                    <p:cond delay="0"/>
+                                  </p:stCondLst>
+                                  <p:childTnLst>
+                                    <p:set>
+                                      <p:cBhvr>
+                                        <p:cTn id="32" dur="1" fill="hold">
+                                          <p:stCondLst>
+                                            <p:cond delay="0"/>
+                                          </p:stCondLst>
+                                        </p:cTn>
+                                        <p:tgtEl>
+                                          <p:spTgt spid="3">
+                                            <p:txEl>
+                                              <p:pRg st="23" end="23"/>
+                                            </p:txEl>
+                                          </p:spTgt>
+                                        </p:tgtEl>
+                                        <p:attrNameLst>
+                                          <p:attrName>style.visibility</p:attrName>
+                                        </p:attrNameLst>
+                                      </p:cBhvr>
+                                      <p:to>
+                                        <p:strVal val="visible"/>
+                                      </p:to>
+                                    </p:set>
+                                    <p:animEffect transition="in" filter="fade">
+                                      <p:cBhvr>
+                                        <p:cTn id="33" dur="500"/>
+                                        <p:tgtEl>
+                                          <p:spTgt spid="3">
+                                            <p:txEl>
+                                              <p:pRg st="23" end="23"/>
                                             </p:txEl>
                                           </p:spTgt>
                                         </p:tgtEl>
@@ -24371,26 +27204,26 @@
                     </p:cTn>
                   </p:par>
                   <p:par>
-                    <p:cTn id="32" fill="hold">
+                    <p:cTn id="34" fill="hold">
                       <p:stCondLst>
                         <p:cond delay="indefinite"/>
                       </p:stCondLst>
                       <p:childTnLst>
                         <p:par>
-                          <p:cTn id="33" fill="hold">
+                          <p:cTn id="35" fill="hold">
                             <p:stCondLst>
                               <p:cond delay="0"/>
                             </p:stCondLst>
                             <p:childTnLst>
                               <p:par>
-                                <p:cTn id="34" presetID="10" presetClass="entr" presetSubtype="0" fill="hold" nodeType="clickEffect">
+                                <p:cTn id="36" presetID="10" presetClass="entr" presetSubtype="0" fill="hold" nodeType="clickEffect">
                                   <p:stCondLst>
                                     <p:cond delay="0"/>
                                   </p:stCondLst>
                                   <p:childTnLst>
                                     <p:set>
                                       <p:cBhvr>
-                                        <p:cTn id="35" dur="1" fill="hold">
+                                        <p:cTn id="37" dur="1" fill="hold">
                                           <p:stCondLst>
                                             <p:cond delay="0"/>
                                           </p:stCondLst>
@@ -24412,7 +27245,7 @@
                                     </p:set>
                                     <p:animEffect transition="in" filter="fade">
                                       <p:cBhvr>
-                                        <p:cTn id="36" dur="500"/>
+                                        <p:cTn id="38" dur="500"/>
                                         <p:tgtEl>
                                           <p:spTgt spid="3">
                                             <p:txEl>
@@ -24425,26 +27258,8 @@
                                   </p:childTnLst>
                                 </p:cTn>
                               </p:par>
-                            </p:childTnLst>
-                          </p:cTn>
-                        </p:par>
-                      </p:childTnLst>
-                    </p:cTn>
-                  </p:par>
-                  <p:par>
-                    <p:cTn id="37" fill="hold">
-                      <p:stCondLst>
-                        <p:cond delay="indefinite"/>
-                      </p:stCondLst>
-                      <p:childTnLst>
-                        <p:par>
-                          <p:cTn id="38" fill="hold">
-                            <p:stCondLst>
-                              <p:cond delay="0"/>
-                            </p:stCondLst>
-                            <p:childTnLst>
                               <p:par>
-                                <p:cTn id="39" presetID="10" presetClass="entr" presetSubtype="0" fill="hold" nodeType="clickEffect">
+                                <p:cTn id="39" presetID="10" presetClass="entr" presetSubtype="0" fill="hold" nodeType="withEffect">
                                   <p:stCondLst>
                                     <p:cond delay="0"/>
                                   </p:stCondLst>
@@ -24486,33 +27301,15 @@
                                   </p:childTnLst>
                                 </p:cTn>
                               </p:par>
-                            </p:childTnLst>
-                          </p:cTn>
-                        </p:par>
-                      </p:childTnLst>
-                    </p:cTn>
-                  </p:par>
-                  <p:par>
-                    <p:cTn id="42" fill="hold">
-                      <p:stCondLst>
-                        <p:cond delay="indefinite"/>
-                      </p:stCondLst>
-                      <p:childTnLst>
-                        <p:par>
-                          <p:cTn id="43" fill="hold">
-                            <p:stCondLst>
-                              <p:cond delay="0"/>
-                            </p:stCondLst>
-                            <p:childTnLst>
                               <p:par>
-                                <p:cTn id="44" presetID="10" presetClass="entr" presetSubtype="0" fill="hold" nodeType="clickEffect">
+                                <p:cTn id="42" presetID="10" presetClass="entr" presetSubtype="0" fill="hold" nodeType="withEffect">
                                   <p:stCondLst>
                                     <p:cond delay="0"/>
                                   </p:stCondLst>
                                   <p:childTnLst>
                                     <p:set>
                                       <p:cBhvr>
-                                        <p:cTn id="45" dur="1" fill="hold">
+                                        <p:cTn id="43" dur="1" fill="hold">
                                           <p:stCondLst>
                                             <p:cond delay="0"/>
                                           </p:stCondLst>
@@ -24534,7 +27331,7 @@
                                     </p:set>
                                     <p:animEffect transition="in" filter="fade">
                                       <p:cBhvr>
-                                        <p:cTn id="46" dur="500"/>
+                                        <p:cTn id="44" dur="500"/>
                                         <p:tgtEl>
                                           <p:spTgt spid="3">
                                             <p:txEl>
@@ -24547,33 +27344,15 @@
                                   </p:childTnLst>
                                 </p:cTn>
                               </p:par>
-                            </p:childTnLst>
-                          </p:cTn>
-                        </p:par>
-                      </p:childTnLst>
-                    </p:cTn>
-                  </p:par>
-                  <p:par>
-                    <p:cTn id="47" fill="hold">
-                      <p:stCondLst>
-                        <p:cond delay="indefinite"/>
-                      </p:stCondLst>
-                      <p:childTnLst>
-                        <p:par>
-                          <p:cTn id="48" fill="hold">
-                            <p:stCondLst>
-                              <p:cond delay="0"/>
-                            </p:stCondLst>
-                            <p:childTnLst>
                               <p:par>
-                                <p:cTn id="49" presetID="10" presetClass="entr" presetSubtype="0" fill="hold" nodeType="clickEffect">
+                                <p:cTn id="45" presetID="10" presetClass="entr" presetSubtype="0" fill="hold" nodeType="withEffect">
                                   <p:stCondLst>
                                     <p:cond delay="0"/>
                                   </p:stCondLst>
                                   <p:childTnLst>
                                     <p:set>
                                       <p:cBhvr>
-                                        <p:cTn id="50" dur="1" fill="hold">
+                                        <p:cTn id="46" dur="1" fill="hold">
                                           <p:stCondLst>
                                             <p:cond delay="0"/>
                                           </p:stCondLst>
@@ -24595,7 +27374,7 @@
                                     </p:set>
                                     <p:animEffect transition="in" filter="fade">
                                       <p:cBhvr>
-                                        <p:cTn id="51" dur="500"/>
+                                        <p:cTn id="47" dur="500"/>
                                         <p:tgtEl>
                                           <p:spTgt spid="3">
                                             <p:txEl>
@@ -24608,33 +27387,15 @@
                                   </p:childTnLst>
                                 </p:cTn>
                               </p:par>
-                            </p:childTnLst>
-                          </p:cTn>
-                        </p:par>
-                      </p:childTnLst>
-                    </p:cTn>
-                  </p:par>
-                  <p:par>
-                    <p:cTn id="52" fill="hold">
-                      <p:stCondLst>
-                        <p:cond delay="indefinite"/>
-                      </p:stCondLst>
-                      <p:childTnLst>
-                        <p:par>
-                          <p:cTn id="53" fill="hold">
-                            <p:stCondLst>
-                              <p:cond delay="0"/>
-                            </p:stCondLst>
-                            <p:childTnLst>
                               <p:par>
-                                <p:cTn id="54" presetID="10" presetClass="entr" presetSubtype="0" fill="hold" nodeType="clickEffect">
+                                <p:cTn id="48" presetID="10" presetClass="entr" presetSubtype="0" fill="hold" nodeType="withEffect">
                                   <p:stCondLst>
                                     <p:cond delay="0"/>
                                   </p:stCondLst>
                                   <p:childTnLst>
                                     <p:set>
                                       <p:cBhvr>
-                                        <p:cTn id="55" dur="1" fill="hold">
+                                        <p:cTn id="49" dur="1" fill="hold">
                                           <p:stCondLst>
                                             <p:cond delay="0"/>
                                           </p:stCondLst>
@@ -24656,7 +27417,7 @@
                                     </p:set>
                                     <p:animEffect transition="in" filter="fade">
                                       <p:cBhvr>
-                                        <p:cTn id="56" dur="500"/>
+                                        <p:cTn id="50" dur="500"/>
                                         <p:tgtEl>
                                           <p:spTgt spid="3">
                                             <p:txEl>
@@ -24666,6 +27427,76 @@
                                         </p:tgtEl>
                                       </p:cBhvr>
                                     </p:animEffect>
+                                  </p:childTnLst>
+                                </p:cTn>
+                              </p:par>
+                              <p:par>
+                                <p:cTn id="51" presetID="10" presetClass="entr" presetSubtype="0" fill="hold" grpId="0" nodeType="withEffect">
+                                  <p:stCondLst>
+                                    <p:cond delay="0"/>
+                                  </p:stCondLst>
+                                  <p:childTnLst>
+                                    <p:set>
+                                      <p:cBhvr>
+                                        <p:cTn id="52" dur="1" fill="hold">
+                                          <p:stCondLst>
+                                            <p:cond delay="0"/>
+                                          </p:stCondLst>
+                                        </p:cTn>
+                                        <p:tgtEl>
+                                          <p:spTgt spid="7"/>
+                                        </p:tgtEl>
+                                        <p:attrNameLst>
+                                          <p:attrName>style.visibility</p:attrName>
+                                        </p:attrNameLst>
+                                      </p:cBhvr>
+                                      <p:to>
+                                        <p:strVal val="visible"/>
+                                      </p:to>
+                                    </p:set>
+                                    <p:animEffect transition="in" filter="fade">
+                                      <p:cBhvr>
+                                        <p:cTn id="53" dur="500"/>
+                                        <p:tgtEl>
+                                          <p:spTgt spid="7"/>
+                                        </p:tgtEl>
+                                      </p:cBhvr>
+                                    </p:animEffect>
+                                  </p:childTnLst>
+                                </p:cTn>
+                              </p:par>
+                              <p:par>
+                                <p:cTn id="54" presetID="10" presetClass="exit" presetSubtype="0" fill="hold" grpId="1" nodeType="withEffect">
+                                  <p:stCondLst>
+                                    <p:cond delay="0"/>
+                                  </p:stCondLst>
+                                  <p:childTnLst>
+                                    <p:animEffect transition="out" filter="fade">
+                                      <p:cBhvr>
+                                        <p:cTn id="55" dur="500"/>
+                                        <p:tgtEl>
+                                          <p:spTgt spid="4"/>
+                                        </p:tgtEl>
+                                      </p:cBhvr>
+                                    </p:animEffect>
+                                    <p:set>
+                                      <p:cBhvr>
+                                        <p:cTn id="56" dur="1" fill="hold">
+                                          <p:stCondLst>
+                                            <p:cond delay="499"/>
+                                          </p:stCondLst>
+                                        </p:cTn>
+                                        <p:tgtEl>
+                                          <p:spTgt spid="4"/>
+                                        </p:tgtEl>
+                                        <p:attrNameLst>
+                                          <p:attrName>style.visibility</p:attrName>
+                                        </p:attrNameLst>
+                                      </p:cBhvr>
+                                      <p:to>
+                                        <p:strVal val="hidden"/>
+                                      </p:to>
+                                    </p:set>
                                   </p:childTnLst>
                                 </p:cTn>
                               </p:par>
@@ -24688,7 +27519,7 @@
                             </p:stCondLst>
                             <p:childTnLst>
                               <p:par>
-                                <p:cTn id="59" presetID="10" presetClass="entr" presetSubtype="0" fill="hold" nodeType="clickEffect">
+                                <p:cTn id="59" presetID="10" presetClass="entr" presetSubtype="0" fill="hold" grpId="0" nodeType="clickEffect">
                                   <p:stCondLst>
                                     <p:cond delay="0"/>
                                   </p:stCondLst>
@@ -24696,6 +27527,129 @@
                                     <p:set>
                                       <p:cBhvr>
                                         <p:cTn id="60" dur="1" fill="hold">
+                                          <p:stCondLst>
+                                            <p:cond delay="0"/>
+                                          </p:stCondLst>
+                                        </p:cTn>
+                                        <p:tgtEl>
+                                          <p:spTgt spid="9"/>
+                                        </p:tgtEl>
+                                        <p:attrNameLst>
+                                          <p:attrName>style.visibility</p:attrName>
+                                        </p:attrNameLst>
+                                      </p:cBhvr>
+                                      <p:to>
+                                        <p:strVal val="visible"/>
+                                      </p:to>
+                                    </p:set>
+                                    <p:animEffect transition="in" filter="fade">
+                                      <p:cBhvr>
+                                        <p:cTn id="61" dur="500"/>
+                                        <p:tgtEl>
+                                          <p:spTgt spid="9"/>
+                                        </p:tgtEl>
+                                      </p:cBhvr>
+                                    </p:animEffect>
+                                  </p:childTnLst>
+                                </p:cTn>
+                              </p:par>
+                              <p:par>
+                                <p:cTn id="62" presetID="10" presetClass="exit" presetSubtype="0" fill="hold" grpId="1" nodeType="withEffect">
+                                  <p:stCondLst>
+                                    <p:cond delay="0"/>
+                                  </p:stCondLst>
+                                  <p:childTnLst>
+                                    <p:animEffect transition="out" filter="fade">
+                                      <p:cBhvr>
+                                        <p:cTn id="63" dur="500"/>
+                                        <p:tgtEl>
+                                          <p:spTgt spid="7"/>
+                                        </p:tgtEl>
+                                      </p:cBhvr>
+                                    </p:animEffect>
+                                    <p:set>
+                                      <p:cBhvr>
+                                        <p:cTn id="64" dur="1" fill="hold">
+                                          <p:stCondLst>
+                                            <p:cond delay="499"/>
+                                          </p:stCondLst>
+                                        </p:cTn>
+                                        <p:tgtEl>
+                                          <p:spTgt spid="7"/>
+                                        </p:tgtEl>
+                                        <p:attrNameLst>
+                                          <p:attrName>style.visibility</p:attrName>
+                                        </p:attrNameLst>
+                                      </p:cBhvr>
+                                      <p:to>
+                                        <p:strVal val="hidden"/>
+                                      </p:to>
+                                    </p:set>
+                                  </p:childTnLst>
+                                </p:cTn>
+                              </p:par>
+                              <p:par>
+                                <p:cTn id="65" presetID="10" presetClass="entr" presetSubtype="0" fill="hold" grpId="0" nodeType="withEffect">
+                                  <p:stCondLst>
+                                    <p:cond delay="0"/>
+                                  </p:stCondLst>
+                                  <p:childTnLst>
+                                    <p:set>
+                                      <p:cBhvr>
+                                        <p:cTn id="66" dur="1" fill="hold">
+                                          <p:stCondLst>
+                                            <p:cond delay="0"/>
+                                          </p:stCondLst>
+                                        </p:cTn>
+                                        <p:tgtEl>
+                                          <p:spTgt spid="10"/>
+                                        </p:tgtEl>
+                                        <p:attrNameLst>
+                                          <p:attrName>style.visibility</p:attrName>
+                                        </p:attrNameLst>
+                                      </p:cBhvr>
+                                      <p:to>
+                                        <p:strVal val="visible"/>
+                                      </p:to>
+                                    </p:set>
+                                    <p:animEffect transition="in" filter="fade">
+                                      <p:cBhvr>
+                                        <p:cTn id="67" dur="500"/>
+                                        <p:tgtEl>
+                                          <p:spTgt spid="10"/>
+                                        </p:tgtEl>
+                                      </p:cBhvr>
+                                    </p:animEffect>
+                                  </p:childTnLst>
+                                </p:cTn>
+                              </p:par>
+                            </p:childTnLst>
+                          </p:cTn>
+                        </p:par>
+                      </p:childTnLst>
+                    </p:cTn>
+                  </p:par>
+                  <p:par>
+                    <p:cTn id="68" fill="hold">
+                      <p:stCondLst>
+                        <p:cond delay="indefinite"/>
+                      </p:stCondLst>
+                      <p:childTnLst>
+                        <p:par>
+                          <p:cTn id="69" fill="hold">
+                            <p:stCondLst>
+                              <p:cond delay="0"/>
+                            </p:stCondLst>
+                            <p:childTnLst>
+                              <p:par>
+                                <p:cTn id="70" presetID="10" presetClass="entr" presetSubtype="0" fill="hold" nodeType="clickEffect">
+                                  <p:stCondLst>
+                                    <p:cond delay="0"/>
+                                  </p:stCondLst>
+                                  <p:childTnLst>
+                                    <p:set>
+                                      <p:cBhvr>
+                                        <p:cTn id="71" dur="1" fill="hold">
                                           <p:stCondLst>
                                             <p:cond delay="0"/>
                                           </p:stCondLst>
@@ -24717,7 +27671,7 @@
                                     </p:set>
                                     <p:animEffect transition="in" filter="fade">
                                       <p:cBhvr>
-                                        <p:cTn id="61" dur="500"/>
+                                        <p:cTn id="72" dur="500"/>
                                         <p:tgtEl>
                                           <p:spTgt spid="3">
                                             <p:txEl>
@@ -24730,33 +27684,15 @@
                                   </p:childTnLst>
                                 </p:cTn>
                               </p:par>
-                            </p:childTnLst>
-                          </p:cTn>
-                        </p:par>
-                      </p:childTnLst>
-                    </p:cTn>
-                  </p:par>
-                  <p:par>
-                    <p:cTn id="62" fill="hold">
-                      <p:stCondLst>
-                        <p:cond delay="indefinite"/>
-                      </p:stCondLst>
-                      <p:childTnLst>
-                        <p:par>
-                          <p:cTn id="63" fill="hold">
-                            <p:stCondLst>
-                              <p:cond delay="0"/>
-                            </p:stCondLst>
-                            <p:childTnLst>
                               <p:par>
-                                <p:cTn id="64" presetID="10" presetClass="entr" presetSubtype="0" fill="hold" nodeType="clickEffect">
+                                <p:cTn id="73" presetID="10" presetClass="entr" presetSubtype="0" fill="hold" nodeType="withEffect">
                                   <p:stCondLst>
                                     <p:cond delay="0"/>
                                   </p:stCondLst>
                                   <p:childTnLst>
                                     <p:set>
                                       <p:cBhvr>
-                                        <p:cTn id="65" dur="1" fill="hold">
+                                        <p:cTn id="74" dur="1" fill="hold">
                                           <p:stCondLst>
                                             <p:cond delay="0"/>
                                           </p:stCondLst>
@@ -24778,7 +27714,7 @@
                                     </p:set>
                                     <p:animEffect transition="in" filter="fade">
                                       <p:cBhvr>
-                                        <p:cTn id="66" dur="500"/>
+                                        <p:cTn id="75" dur="500"/>
                                         <p:tgtEl>
                                           <p:spTgt spid="3">
                                             <p:txEl>
@@ -24791,33 +27727,15 @@
                                   </p:childTnLst>
                                 </p:cTn>
                               </p:par>
-                            </p:childTnLst>
-                          </p:cTn>
-                        </p:par>
-                      </p:childTnLst>
-                    </p:cTn>
-                  </p:par>
-                  <p:par>
-                    <p:cTn id="67" fill="hold">
-                      <p:stCondLst>
-                        <p:cond delay="indefinite"/>
-                      </p:stCondLst>
-                      <p:childTnLst>
-                        <p:par>
-                          <p:cTn id="68" fill="hold">
-                            <p:stCondLst>
-                              <p:cond delay="0"/>
-                            </p:stCondLst>
-                            <p:childTnLst>
                               <p:par>
-                                <p:cTn id="69" presetID="10" presetClass="entr" presetSubtype="0" fill="hold" nodeType="clickEffect">
+                                <p:cTn id="76" presetID="10" presetClass="entr" presetSubtype="0" fill="hold" nodeType="withEffect">
                                   <p:stCondLst>
                                     <p:cond delay="0"/>
                                   </p:stCondLst>
                                   <p:childTnLst>
                                     <p:set>
                                       <p:cBhvr>
-                                        <p:cTn id="70" dur="1" fill="hold">
+                                        <p:cTn id="77" dur="1" fill="hold">
                                           <p:stCondLst>
                                             <p:cond delay="0"/>
                                           </p:stCondLst>
@@ -24839,7 +27757,7 @@
                                     </p:set>
                                     <p:animEffect transition="in" filter="fade">
                                       <p:cBhvr>
-                                        <p:cTn id="71" dur="500"/>
+                                        <p:cTn id="78" dur="500"/>
                                         <p:tgtEl>
                                           <p:spTgt spid="3">
                                             <p:txEl>
@@ -24852,33 +27770,15 @@
                                   </p:childTnLst>
                                 </p:cTn>
                               </p:par>
-                            </p:childTnLst>
-                          </p:cTn>
-                        </p:par>
-                      </p:childTnLst>
-                    </p:cTn>
-                  </p:par>
-                  <p:par>
-                    <p:cTn id="72" fill="hold">
-                      <p:stCondLst>
-                        <p:cond delay="indefinite"/>
-                      </p:stCondLst>
-                      <p:childTnLst>
-                        <p:par>
-                          <p:cTn id="73" fill="hold">
-                            <p:stCondLst>
-                              <p:cond delay="0"/>
-                            </p:stCondLst>
-                            <p:childTnLst>
                               <p:par>
-                                <p:cTn id="74" presetID="10" presetClass="entr" presetSubtype="0" fill="hold" nodeType="clickEffect">
+                                <p:cTn id="79" presetID="10" presetClass="entr" presetSubtype="0" fill="hold" nodeType="withEffect">
                                   <p:stCondLst>
                                     <p:cond delay="0"/>
                                   </p:stCondLst>
                                   <p:childTnLst>
                                     <p:set>
                                       <p:cBhvr>
-                                        <p:cTn id="75" dur="1" fill="hold">
+                                        <p:cTn id="80" dur="1" fill="hold">
                                           <p:stCondLst>
                                             <p:cond delay="0"/>
                                           </p:stCondLst>
@@ -24900,72 +27800,11 @@
                                     </p:set>
                                     <p:animEffect transition="in" filter="fade">
                                       <p:cBhvr>
-                                        <p:cTn id="76" dur="500"/>
+                                        <p:cTn id="81" dur="500"/>
                                         <p:tgtEl>
                                           <p:spTgt spid="3">
                                             <p:txEl>
                                               <p:pRg st="16" end="16"/>
-                                            </p:txEl>
-                                          </p:spTgt>
-                                        </p:tgtEl>
-                                      </p:cBhvr>
-                                    </p:animEffect>
-                                  </p:childTnLst>
-                                </p:cTn>
-                              </p:par>
-                            </p:childTnLst>
-                          </p:cTn>
-                        </p:par>
-                      </p:childTnLst>
-                    </p:cTn>
-                  </p:par>
-                  <p:par>
-                    <p:cTn id="77" fill="hold">
-                      <p:stCondLst>
-                        <p:cond delay="indefinite"/>
-                      </p:stCondLst>
-                      <p:childTnLst>
-                        <p:par>
-                          <p:cTn id="78" fill="hold">
-                            <p:stCondLst>
-                              <p:cond delay="0"/>
-                            </p:stCondLst>
-                            <p:childTnLst>
-                              <p:par>
-                                <p:cTn id="79" presetID="10" presetClass="entr" presetSubtype="0" fill="hold" nodeType="clickEffect">
-                                  <p:stCondLst>
-                                    <p:cond delay="0"/>
-                                  </p:stCondLst>
-                                  <p:childTnLst>
-                                    <p:set>
-                                      <p:cBhvr>
-                                        <p:cTn id="80" dur="1" fill="hold">
-                                          <p:stCondLst>
-                                            <p:cond delay="0"/>
-                                          </p:stCondLst>
-                                        </p:cTn>
-                                        <p:tgtEl>
-                                          <p:spTgt spid="3">
-                                            <p:txEl>
-                                              <p:pRg st="17" end="17"/>
-                                            </p:txEl>
-                                          </p:spTgt>
-                                        </p:tgtEl>
-                                        <p:attrNameLst>
-                                          <p:attrName>style.visibility</p:attrName>
-                                        </p:attrNameLst>
-                                      </p:cBhvr>
-                                      <p:to>
-                                        <p:strVal val="visible"/>
-                                      </p:to>
-                                    </p:set>
-                                    <p:animEffect transition="in" filter="fade">
-                                      <p:cBhvr>
-                                        <p:cTn id="81" dur="500"/>
-                                        <p:tgtEl>
-                                          <p:spTgt spid="3">
-                                            <p:txEl>
-                                              <p:pRg st="17" end="17"/>
                                             </p:txEl>
                                           </p:spTgt>
                                         </p:tgtEl>
@@ -24993,7 +27832,7 @@
                             </p:stCondLst>
                             <p:childTnLst>
                               <p:par>
-                                <p:cTn id="84" presetID="10" presetClass="entr" presetSubtype="0" fill="hold" nodeType="clickEffect">
+                                <p:cTn id="84" presetID="10" presetClass="entr" presetSubtype="0" fill="hold" grpId="0" nodeType="clickEffect">
                                   <p:stCondLst>
                                     <p:cond delay="0"/>
                                   </p:stCondLst>
@@ -25001,6 +27840,154 @@
                                     <p:set>
                                       <p:cBhvr>
                                         <p:cTn id="85" dur="1" fill="hold">
+                                          <p:stCondLst>
+                                            <p:cond delay="0"/>
+                                          </p:stCondLst>
+                                        </p:cTn>
+                                        <p:tgtEl>
+                                          <p:spTgt spid="12"/>
+                                        </p:tgtEl>
+                                        <p:attrNameLst>
+                                          <p:attrName>style.visibility</p:attrName>
+                                        </p:attrNameLst>
+                                      </p:cBhvr>
+                                      <p:to>
+                                        <p:strVal val="visible"/>
+                                      </p:to>
+                                    </p:set>
+                                    <p:animEffect transition="in" filter="fade">
+                                      <p:cBhvr>
+                                        <p:cTn id="86" dur="500"/>
+                                        <p:tgtEl>
+                                          <p:spTgt spid="12"/>
+                                        </p:tgtEl>
+                                      </p:cBhvr>
+                                    </p:animEffect>
+                                  </p:childTnLst>
+                                </p:cTn>
+                              </p:par>
+                              <p:par>
+                                <p:cTn id="87" presetID="10" presetClass="exit" presetSubtype="0" fill="hold" grpId="1" nodeType="withEffect">
+                                  <p:stCondLst>
+                                    <p:cond delay="0"/>
+                                  </p:stCondLst>
+                                  <p:childTnLst>
+                                    <p:animEffect transition="out" filter="fade">
+                                      <p:cBhvr>
+                                        <p:cTn id="88" dur="500"/>
+                                        <p:tgtEl>
+                                          <p:spTgt spid="9"/>
+                                        </p:tgtEl>
+                                      </p:cBhvr>
+                                    </p:animEffect>
+                                    <p:set>
+                                      <p:cBhvr>
+                                        <p:cTn id="89" dur="1" fill="hold">
+                                          <p:stCondLst>
+                                            <p:cond delay="499"/>
+                                          </p:stCondLst>
+                                        </p:cTn>
+                                        <p:tgtEl>
+                                          <p:spTgt spid="9"/>
+                                        </p:tgtEl>
+                                        <p:attrNameLst>
+                                          <p:attrName>style.visibility</p:attrName>
+                                        </p:attrNameLst>
+                                      </p:cBhvr>
+                                      <p:to>
+                                        <p:strVal val="hidden"/>
+                                      </p:to>
+                                    </p:set>
+                                  </p:childTnLst>
+                                </p:cTn>
+                              </p:par>
+                              <p:par>
+                                <p:cTn id="90" presetID="10" presetClass="exit" presetSubtype="0" fill="hold" grpId="1" nodeType="withEffect">
+                                  <p:stCondLst>
+                                    <p:cond delay="0"/>
+                                  </p:stCondLst>
+                                  <p:childTnLst>
+                                    <p:animEffect transition="out" filter="fade">
+                                      <p:cBhvr>
+                                        <p:cTn id="91" dur="500"/>
+                                        <p:tgtEl>
+                                          <p:spTgt spid="10"/>
+                                        </p:tgtEl>
+                                      </p:cBhvr>
+                                    </p:animEffect>
+                                    <p:set>
+                                      <p:cBhvr>
+                                        <p:cTn id="92" dur="1" fill="hold">
+                                          <p:stCondLst>
+                                            <p:cond delay="499"/>
+                                          </p:stCondLst>
+                                        </p:cTn>
+                                        <p:tgtEl>
+                                          <p:spTgt spid="10"/>
+                                        </p:tgtEl>
+                                        <p:attrNameLst>
+                                          <p:attrName>style.visibility</p:attrName>
+                                        </p:attrNameLst>
+                                      </p:cBhvr>
+                                      <p:to>
+                                        <p:strVal val="hidden"/>
+                                      </p:to>
+                                    </p:set>
+                                  </p:childTnLst>
+                                </p:cTn>
+                              </p:par>
+                              <p:par>
+                                <p:cTn id="93" presetID="10" presetClass="entr" presetSubtype="0" fill="hold" nodeType="withEffect">
+                                  <p:stCondLst>
+                                    <p:cond delay="0"/>
+                                  </p:stCondLst>
+                                  <p:childTnLst>
+                                    <p:set>
+                                      <p:cBhvr>
+                                        <p:cTn id="94" dur="1" fill="hold">
+                                          <p:stCondLst>
+                                            <p:cond delay="0"/>
+                                          </p:stCondLst>
+                                        </p:cTn>
+                                        <p:tgtEl>
+                                          <p:spTgt spid="3">
+                                            <p:txEl>
+                                              <p:pRg st="17" end="17"/>
+                                            </p:txEl>
+                                          </p:spTgt>
+                                        </p:tgtEl>
+                                        <p:attrNameLst>
+                                          <p:attrName>style.visibility</p:attrName>
+                                        </p:attrNameLst>
+                                      </p:cBhvr>
+                                      <p:to>
+                                        <p:strVal val="visible"/>
+                                      </p:to>
+                                    </p:set>
+                                    <p:animEffect transition="in" filter="fade">
+                                      <p:cBhvr>
+                                        <p:cTn id="95" dur="500"/>
+                                        <p:tgtEl>
+                                          <p:spTgt spid="3">
+                                            <p:txEl>
+                                              <p:pRg st="17" end="17"/>
+                                            </p:txEl>
+                                          </p:spTgt>
+                                        </p:tgtEl>
+                                      </p:cBhvr>
+                                    </p:animEffect>
+                                  </p:childTnLst>
+                                </p:cTn>
+                              </p:par>
+                              <p:par>
+                                <p:cTn id="96" presetID="10" presetClass="entr" presetSubtype="0" fill="hold" nodeType="withEffect">
+                                  <p:stCondLst>
+                                    <p:cond delay="0"/>
+                                  </p:stCondLst>
+                                  <p:childTnLst>
+                                    <p:set>
+                                      <p:cBhvr>
+                                        <p:cTn id="97" dur="1" fill="hold">
                                           <p:stCondLst>
                                             <p:cond delay="0"/>
                                           </p:stCondLst>
@@ -25022,7 +28009,7 @@
                                     </p:set>
                                     <p:animEffect transition="in" filter="fade">
                                       <p:cBhvr>
-                                        <p:cTn id="86" dur="500"/>
+                                        <p:cTn id="98" dur="500"/>
                                         <p:tgtEl>
                                           <p:spTgt spid="3">
                                             <p:txEl>
@@ -25035,33 +28022,15 @@
                                   </p:childTnLst>
                                 </p:cTn>
                               </p:par>
-                            </p:childTnLst>
-                          </p:cTn>
-                        </p:par>
-                      </p:childTnLst>
-                    </p:cTn>
-                  </p:par>
-                  <p:par>
-                    <p:cTn id="87" fill="hold">
-                      <p:stCondLst>
-                        <p:cond delay="indefinite"/>
-                      </p:stCondLst>
-                      <p:childTnLst>
-                        <p:par>
-                          <p:cTn id="88" fill="hold">
-                            <p:stCondLst>
-                              <p:cond delay="0"/>
-                            </p:stCondLst>
-                            <p:childTnLst>
                               <p:par>
-                                <p:cTn id="89" presetID="10" presetClass="entr" presetSubtype="0" fill="hold" nodeType="clickEffect">
+                                <p:cTn id="99" presetID="10" presetClass="entr" presetSubtype="0" fill="hold" nodeType="withEffect">
                                   <p:stCondLst>
                                     <p:cond delay="0"/>
                                   </p:stCondLst>
                                   <p:childTnLst>
                                     <p:set>
                                       <p:cBhvr>
-                                        <p:cTn id="90" dur="1" fill="hold">
+                                        <p:cTn id="100" dur="1" fill="hold">
                                           <p:stCondLst>
                                             <p:cond delay="0"/>
                                           </p:stCondLst>
@@ -25083,7 +28052,7 @@
                                     </p:set>
                                     <p:animEffect transition="in" filter="fade">
                                       <p:cBhvr>
-                                        <p:cTn id="91" dur="500"/>
+                                        <p:cTn id="101" dur="500"/>
                                         <p:tgtEl>
                                           <p:spTgt spid="3">
                                             <p:txEl>
@@ -25096,33 +28065,15 @@
                                   </p:childTnLst>
                                 </p:cTn>
                               </p:par>
-                            </p:childTnLst>
-                          </p:cTn>
-                        </p:par>
-                      </p:childTnLst>
-                    </p:cTn>
-                  </p:par>
-                  <p:par>
-                    <p:cTn id="92" fill="hold">
-                      <p:stCondLst>
-                        <p:cond delay="indefinite"/>
-                      </p:stCondLst>
-                      <p:childTnLst>
-                        <p:par>
-                          <p:cTn id="93" fill="hold">
-                            <p:stCondLst>
-                              <p:cond delay="0"/>
-                            </p:stCondLst>
-                            <p:childTnLst>
                               <p:par>
-                                <p:cTn id="94" presetID="10" presetClass="entr" presetSubtype="0" fill="hold" nodeType="clickEffect">
+                                <p:cTn id="102" presetID="10" presetClass="entr" presetSubtype="0" fill="hold" nodeType="withEffect">
                                   <p:stCondLst>
                                     <p:cond delay="0"/>
                                   </p:stCondLst>
                                   <p:childTnLst>
                                     <p:set>
                                       <p:cBhvr>
-                                        <p:cTn id="95" dur="1" fill="hold">
+                                        <p:cTn id="103" dur="1" fill="hold">
                                           <p:stCondLst>
                                             <p:cond delay="0"/>
                                           </p:stCondLst>
@@ -25144,7 +28095,7 @@
                                     </p:set>
                                     <p:animEffect transition="in" filter="fade">
                                       <p:cBhvr>
-                                        <p:cTn id="96" dur="500"/>
+                                        <p:cTn id="104" dur="500"/>
                                         <p:tgtEl>
                                           <p:spTgt spid="3">
                                             <p:txEl>
@@ -25164,26 +28115,26 @@
                     </p:cTn>
                   </p:par>
                   <p:par>
-                    <p:cTn id="97" fill="hold">
+                    <p:cTn id="105" fill="hold">
                       <p:stCondLst>
                         <p:cond delay="indefinite"/>
                       </p:stCondLst>
                       <p:childTnLst>
                         <p:par>
-                          <p:cTn id="98" fill="hold">
+                          <p:cTn id="106" fill="hold">
                             <p:stCondLst>
                               <p:cond delay="0"/>
                             </p:stCondLst>
                             <p:childTnLst>
                               <p:par>
-                                <p:cTn id="99" presetID="10" presetClass="entr" presetSubtype="0" fill="hold" nodeType="clickEffect">
+                                <p:cTn id="107" presetID="10" presetClass="entr" presetSubtype="0" fill="hold" nodeType="clickEffect">
                                   <p:stCondLst>
                                     <p:cond delay="0"/>
                                   </p:stCondLst>
                                   <p:childTnLst>
                                     <p:set>
                                       <p:cBhvr>
-                                        <p:cTn id="100" dur="1" fill="hold">
+                                        <p:cTn id="108" dur="1" fill="hold">
                                           <p:stCondLst>
                                             <p:cond delay="0"/>
                                           </p:stCondLst>
@@ -25205,7 +28156,7 @@
                                     </p:set>
                                     <p:animEffect transition="in" filter="fade">
                                       <p:cBhvr>
-                                        <p:cTn id="101" dur="500"/>
+                                        <p:cTn id="109" dur="500"/>
                                         <p:tgtEl>
                                           <p:spTgt spid="3">
                                             <p:txEl>
@@ -25218,33 +28169,15 @@
                                   </p:childTnLst>
                                 </p:cTn>
                               </p:par>
-                            </p:childTnLst>
-                          </p:cTn>
-                        </p:par>
-                      </p:childTnLst>
-                    </p:cTn>
-                  </p:par>
-                  <p:par>
-                    <p:cTn id="102" fill="hold">
-                      <p:stCondLst>
-                        <p:cond delay="indefinite"/>
-                      </p:stCondLst>
-                      <p:childTnLst>
-                        <p:par>
-                          <p:cTn id="103" fill="hold">
-                            <p:stCondLst>
-                              <p:cond delay="0"/>
-                            </p:stCondLst>
-                            <p:childTnLst>
                               <p:par>
-                                <p:cTn id="104" presetID="10" presetClass="entr" presetSubtype="0" fill="hold" nodeType="clickEffect">
+                                <p:cTn id="110" presetID="10" presetClass="entr" presetSubtype="0" fill="hold" nodeType="withEffect">
                                   <p:stCondLst>
                                     <p:cond delay="0"/>
                                   </p:stCondLst>
                                   <p:childTnLst>
                                     <p:set>
                                       <p:cBhvr>
-                                        <p:cTn id="105" dur="1" fill="hold">
+                                        <p:cTn id="111" dur="1" fill="hold">
                                           <p:stCondLst>
                                             <p:cond delay="0"/>
                                           </p:stCondLst>
@@ -25266,13 +28199,1015 @@
                                     </p:set>
                                     <p:animEffect transition="in" filter="fade">
                                       <p:cBhvr>
-                                        <p:cTn id="106" dur="500"/>
+                                        <p:cTn id="112" dur="500"/>
                                         <p:tgtEl>
                                           <p:spTgt spid="3">
                                             <p:txEl>
                                               <p:pRg st="22" end="22"/>
                                             </p:txEl>
                                           </p:spTgt>
+                                        </p:tgtEl>
+                                      </p:cBhvr>
+                                    </p:animEffect>
+                                  </p:childTnLst>
+                                </p:cTn>
+                              </p:par>
+                              <p:par>
+                                <p:cTn id="113" presetID="10" presetClass="exit" presetSubtype="0" fill="hold" grpId="1" nodeType="withEffect">
+                                  <p:stCondLst>
+                                    <p:cond delay="0"/>
+                                  </p:stCondLst>
+                                  <p:childTnLst>
+                                    <p:animEffect transition="out" filter="fade">
+                                      <p:cBhvr>
+                                        <p:cTn id="114" dur="500"/>
+                                        <p:tgtEl>
+                                          <p:spTgt spid="12"/>
+                                        </p:tgtEl>
+                                      </p:cBhvr>
+                                    </p:animEffect>
+                                    <p:set>
+                                      <p:cBhvr>
+                                        <p:cTn id="115" dur="1" fill="hold">
+                                          <p:stCondLst>
+                                            <p:cond delay="499"/>
+                                          </p:stCondLst>
+                                        </p:cTn>
+                                        <p:tgtEl>
+                                          <p:spTgt spid="12"/>
+                                        </p:tgtEl>
+                                        <p:attrNameLst>
+                                          <p:attrName>style.visibility</p:attrName>
+                                        </p:attrNameLst>
+                                      </p:cBhvr>
+                                      <p:to>
+                                        <p:strVal val="hidden"/>
+                                      </p:to>
+                                    </p:set>
+                                  </p:childTnLst>
+                                </p:cTn>
+                              </p:par>
+                            </p:childTnLst>
+                          </p:cTn>
+                        </p:par>
+                      </p:childTnLst>
+                    </p:cTn>
+                  </p:par>
+                </p:childTnLst>
+              </p:cTn>
+              <p:prevCondLst>
+                <p:cond evt="onPrev" delay="0">
+                  <p:tgtEl>
+                    <p:sldTgt/>
+                  </p:tgtEl>
+                </p:cond>
+              </p:prevCondLst>
+              <p:nextCondLst>
+                <p:cond evt="onNext" delay="0">
+                  <p:tgtEl>
+                    <p:sldTgt/>
+                  </p:tgtEl>
+                </p:cond>
+              </p:nextCondLst>
+            </p:seq>
+          </p:childTnLst>
+        </p:cTn>
+      </p:par>
+    </p:tnLst>
+    <p:bldLst>
+      <p:bldP spid="4" grpId="0" animBg="1"/>
+      <p:bldP spid="4" grpId="1" animBg="1"/>
+      <p:bldP spid="7" grpId="0" animBg="1"/>
+      <p:bldP spid="7" grpId="1" animBg="1"/>
+      <p:bldP spid="9" grpId="0" animBg="1"/>
+      <p:bldP spid="9" grpId="1" animBg="1"/>
+      <p:bldP spid="10" grpId="0" animBg="1"/>
+      <p:bldP spid="10" grpId="1" animBg="1"/>
+      <p:bldP spid="12" grpId="0" animBg="1"/>
+      <p:bldP spid="12" grpId="1" animBg="1"/>
+    </p:bldLst>
+  </p:timing>
+</p:sld>
+</file>
+
+<file path=ppt/slides/slide24.xml><?xml version="1.0" encoding="utf-8"?>
+<p:sld xmlns:a="http://schemas.openxmlformats.org/drawingml/2006/main" xmlns:r="http://schemas.openxmlformats.org/officeDocument/2006/relationships" xmlns:p="http://schemas.openxmlformats.org/presentationml/2006/main">
+  <p:cSld>
+    <p:spTree>
+      <p:nvGrpSpPr>
+        <p:cNvPr id="1" name="">
+          <a:extLst>
+            <a:ext uri="{FF2B5EF4-FFF2-40B4-BE49-F238E27FC236}">
+              <a16:creationId xmlns:a16="http://schemas.microsoft.com/office/drawing/2014/main" id="{FC4D2946-4593-3B43-E127-47E398DC3FE9}"/>
+            </a:ext>
+          </a:extLst>
+        </p:cNvPr>
+        <p:cNvGrpSpPr/>
+        <p:nvPr/>
+      </p:nvGrpSpPr>
+      <p:grpSpPr>
+        <a:xfrm>
+          <a:off x="0" y="0"/>
+          <a:ext cx="0" cy="0"/>
+          <a:chOff x="0" y="0"/>
+          <a:chExt cx="0" cy="0"/>
+        </a:xfrm>
+      </p:grpSpPr>
+      <p:sp>
+        <p:nvSpPr>
+          <p:cNvPr id="2" name="Title 1">
+            <a:extLst>
+              <a:ext uri="{FF2B5EF4-FFF2-40B4-BE49-F238E27FC236}">
+                <a16:creationId xmlns:a16="http://schemas.microsoft.com/office/drawing/2014/main" id="{610FF359-E97E-039F-A84D-02BF531D1F12}"/>
+              </a:ext>
+            </a:extLst>
+          </p:cNvPr>
+          <p:cNvSpPr>
+            <a:spLocks noGrp="1"/>
+          </p:cNvSpPr>
+          <p:nvPr>
+            <p:ph type="title"/>
+          </p:nvPr>
+        </p:nvSpPr>
+        <p:spPr/>
+        <p:txBody>
+          <a:bodyPr/>
+          <a:lstStyle/>
+          <a:p>
+            <a:r>
+              <a:rPr lang="en-GB"/>
+              <a:t>ASCII Displayen - Skrivcykel</a:t>
+            </a:r>
+            <a:endParaRPr lang="LID4096"/>
+          </a:p>
+        </p:txBody>
+      </p:sp>
+      <p:pic>
+        <p:nvPicPr>
+          <p:cNvPr id="5" name="Picture 4">
+            <a:extLst>
+              <a:ext uri="{FF2B5EF4-FFF2-40B4-BE49-F238E27FC236}">
+                <a16:creationId xmlns:a16="http://schemas.microsoft.com/office/drawing/2014/main" id="{5A34AAD6-FCC3-30AB-1904-7ADF98F89C3B}"/>
+              </a:ext>
+            </a:extLst>
+          </p:cNvPr>
+          <p:cNvPicPr>
+            <a:picLocks noChangeAspect="1"/>
+          </p:cNvPicPr>
+          <p:nvPr/>
+        </p:nvPicPr>
+        <p:blipFill>
+          <a:blip r:embed="rId3"/>
+          <a:stretch>
+            <a:fillRect/>
+          </a:stretch>
+        </p:blipFill>
+        <p:spPr>
+          <a:xfrm rot="16200000">
+            <a:off x="6518278" y="2383891"/>
+            <a:ext cx="3964994" cy="3299338"/>
+          </a:xfrm>
+          <a:prstGeom prst="rect">
+            <a:avLst/>
+          </a:prstGeom>
+        </p:spPr>
+      </p:pic>
+      <p:sp>
+        <p:nvSpPr>
+          <p:cNvPr id="9" name="TextBox 8">
+            <a:extLst>
+              <a:ext uri="{FF2B5EF4-FFF2-40B4-BE49-F238E27FC236}">
+                <a16:creationId xmlns:a16="http://schemas.microsoft.com/office/drawing/2014/main" id="{49F34223-8AB6-AB6F-5F98-C28AB934C82C}"/>
+              </a:ext>
+            </a:extLst>
+          </p:cNvPr>
+          <p:cNvSpPr txBox="1"/>
+          <p:nvPr/>
+        </p:nvSpPr>
+        <p:spPr>
+          <a:xfrm>
+            <a:off x="7735911" y="2695977"/>
+            <a:ext cx="1531188" cy="369332"/>
+          </a:xfrm>
+          <a:prstGeom prst="rect">
+            <a:avLst/>
+          </a:prstGeom>
+          <a:noFill/>
+        </p:spPr>
+        <p:txBody>
+          <a:bodyPr wrap="none" rtlCol="0">
+            <a:spAutoFit/>
+          </a:bodyPr>
+          <a:lstStyle/>
+          <a:p>
+            <a:r>
+              <a:rPr lang="sv-SE">
+                <a:solidFill>
+                  <a:schemeClr val="accent3">
+                    <a:lumMod val="20000"/>
+                    <a:lumOff val="80000"/>
+                  </a:schemeClr>
+                </a:solidFill>
+                <a:latin typeface="Cascadia Mono" panose="020B0609020000020004" pitchFamily="49" charset="0"/>
+                <a:cs typeface="Cascadia Mono" panose="020B0609020000020004" pitchFamily="49" charset="0"/>
+              </a:rPr>
+              <a:t>Mop Rules!</a:t>
+            </a:r>
+            <a:endParaRPr lang="LID4096">
+              <a:solidFill>
+                <a:schemeClr val="accent3">
+                  <a:lumMod val="20000"/>
+                  <a:lumOff val="80000"/>
+                </a:schemeClr>
+              </a:solidFill>
+              <a:latin typeface="Cascadia Mono" panose="020B0609020000020004" pitchFamily="49" charset="0"/>
+              <a:cs typeface="Cascadia Mono" panose="020B0609020000020004" pitchFamily="49" charset="0"/>
+            </a:endParaRPr>
+          </a:p>
+        </p:txBody>
+      </p:sp>
+      <p:sp>
+        <p:nvSpPr>
+          <p:cNvPr id="15" name="TextBox 14">
+            <a:extLst>
+              <a:ext uri="{FF2B5EF4-FFF2-40B4-BE49-F238E27FC236}">
+                <a16:creationId xmlns:a16="http://schemas.microsoft.com/office/drawing/2014/main" id="{28C80B01-9B87-363A-A55A-B0EFF1BD124D}"/>
+              </a:ext>
+            </a:extLst>
+          </p:cNvPr>
+          <p:cNvSpPr txBox="1"/>
+          <p:nvPr/>
+        </p:nvSpPr>
+        <p:spPr>
+          <a:xfrm>
+            <a:off x="5040608" y="5834202"/>
+            <a:ext cx="914400" cy="276999"/>
+          </a:xfrm>
+          <a:prstGeom prst="rect">
+            <a:avLst/>
+          </a:prstGeom>
+          <a:noFill/>
+        </p:spPr>
+        <p:txBody>
+          <a:bodyPr wrap="square" lIns="0" tIns="0" rIns="0" bIns="0" rtlCol="0" anchor="t" anchorCtr="0">
+            <a:spAutoFit/>
+          </a:bodyPr>
+          <a:lstStyle/>
+          <a:p>
+            <a:pPr algn="l">
+              <a:lnSpc>
+                <a:spcPct val="90000"/>
+              </a:lnSpc>
+              <a:spcBef>
+                <a:spcPts val="600"/>
+              </a:spcBef>
+              <a:spcAft>
+                <a:spcPts val="400"/>
+              </a:spcAft>
+            </a:pPr>
+            <a:r>
+              <a:rPr lang="en-GB" sz="2000">
+                <a:latin typeface="Arial" panose="020B0604020202020204" pitchFamily="34" charset="0"/>
+                <a:cs typeface="Arial" panose="020B0604020202020204" pitchFamily="34" charset="0"/>
+              </a:rPr>
+              <a:t>Data</a:t>
+            </a:r>
+            <a:endParaRPr lang="en-GB" sz="2000" dirty="0">
+              <a:latin typeface="Arial" panose="020B0604020202020204" pitchFamily="34" charset="0"/>
+              <a:cs typeface="Arial" panose="020B0604020202020204" pitchFamily="34" charset="0"/>
+            </a:endParaRPr>
+          </a:p>
+        </p:txBody>
+      </p:sp>
+      <p:pic>
+        <p:nvPicPr>
+          <p:cNvPr id="21" name="Picture 20">
+            <a:extLst>
+              <a:ext uri="{FF2B5EF4-FFF2-40B4-BE49-F238E27FC236}">
+                <a16:creationId xmlns:a16="http://schemas.microsoft.com/office/drawing/2014/main" id="{BF736834-77E2-FB30-0F28-18372AEC9309}"/>
+              </a:ext>
+            </a:extLst>
+          </p:cNvPr>
+          <p:cNvPicPr>
+            <a:picLocks noChangeAspect="1"/>
+          </p:cNvPicPr>
+          <p:nvPr/>
+        </p:nvPicPr>
+        <p:blipFill>
+          <a:blip r:embed="rId4"/>
+          <a:stretch>
+            <a:fillRect/>
+          </a:stretch>
+        </p:blipFill>
+        <p:spPr>
+          <a:xfrm>
+            <a:off x="5031303" y="6206346"/>
+            <a:ext cx="3236025" cy="340167"/>
+          </a:xfrm>
+          <a:prstGeom prst="rect">
+            <a:avLst/>
+          </a:prstGeom>
+        </p:spPr>
+      </p:pic>
+      <p:pic>
+        <p:nvPicPr>
+          <p:cNvPr id="23" name="Picture 22">
+            <a:extLst>
+              <a:ext uri="{FF2B5EF4-FFF2-40B4-BE49-F238E27FC236}">
+                <a16:creationId xmlns:a16="http://schemas.microsoft.com/office/drawing/2014/main" id="{CDCA98C5-AF27-24CA-A490-7B56C4FEB1AC}"/>
+              </a:ext>
+            </a:extLst>
+          </p:cNvPr>
+          <p:cNvPicPr>
+            <a:picLocks noChangeAspect="1"/>
+          </p:cNvPicPr>
+          <p:nvPr/>
+        </p:nvPicPr>
+        <p:blipFill>
+          <a:blip r:embed="rId5"/>
+          <a:stretch>
+            <a:fillRect/>
+          </a:stretch>
+        </p:blipFill>
+        <p:spPr>
+          <a:xfrm>
+            <a:off x="8644118" y="6244022"/>
+            <a:ext cx="3295228" cy="264817"/>
+          </a:xfrm>
+          <a:prstGeom prst="rect">
+            <a:avLst/>
+          </a:prstGeom>
+        </p:spPr>
+      </p:pic>
+      <p:sp>
+        <p:nvSpPr>
+          <p:cNvPr id="24" name="Freeform: Shape 23">
+            <a:extLst>
+              <a:ext uri="{FF2B5EF4-FFF2-40B4-BE49-F238E27FC236}">
+                <a16:creationId xmlns:a16="http://schemas.microsoft.com/office/drawing/2014/main" id="{28FB781D-424F-8529-358B-54B8CE7BB931}"/>
+              </a:ext>
+            </a:extLst>
+          </p:cNvPr>
+          <p:cNvSpPr/>
+          <p:nvPr/>
+        </p:nvSpPr>
+        <p:spPr>
+          <a:xfrm>
+            <a:off x="8470433" y="5212854"/>
+            <a:ext cx="595268" cy="369332"/>
+          </a:xfrm>
+          <a:custGeom>
+            <a:avLst/>
+            <a:gdLst>
+              <a:gd name="csX0" fmla="*/ 408509 w 762626"/>
+              <a:gd name="csY0" fmla="*/ 67479 h 469838"/>
+              <a:gd name="csX1" fmla="*/ 72333 w 762626"/>
+              <a:gd name="csY1" fmla="*/ 67479 h 469838"/>
+              <a:gd name="csX2" fmla="*/ 11821 w 762626"/>
+              <a:gd name="csY2" fmla="*/ 302803 h 469838"/>
+              <a:gd name="csX3" fmla="*/ 240421 w 762626"/>
+              <a:gd name="csY3" fmla="*/ 443997 h 469838"/>
+              <a:gd name="csX4" fmla="*/ 657280 w 762626"/>
+              <a:gd name="csY4" fmla="*/ 457444 h 469838"/>
+              <a:gd name="csX5" fmla="*/ 751409 w 762626"/>
+              <a:gd name="csY5" fmla="*/ 309526 h 469838"/>
+              <a:gd name="csX6" fmla="*/ 711068 w 762626"/>
+              <a:gd name="csY6" fmla="*/ 80926 h 469838"/>
+              <a:gd name="csX7" fmla="*/ 307656 w 762626"/>
+              <a:gd name="csY7" fmla="*/ 244 h 469838"/>
+              <a:gd name="csX8" fmla="*/ 146291 w 762626"/>
+              <a:gd name="csY8" fmla="*/ 60755 h 469838"/>
+            </a:gdLst>
+            <a:ahLst/>
+            <a:cxnLst>
+              <a:cxn ang="0">
+                <a:pos x="csX0" y="csY0"/>
+              </a:cxn>
+              <a:cxn ang="0">
+                <a:pos x="csX1" y="csY1"/>
+              </a:cxn>
+              <a:cxn ang="0">
+                <a:pos x="csX2" y="csY2"/>
+              </a:cxn>
+              <a:cxn ang="0">
+                <a:pos x="csX3" y="csY3"/>
+              </a:cxn>
+              <a:cxn ang="0">
+                <a:pos x="csX4" y="csY4"/>
+              </a:cxn>
+              <a:cxn ang="0">
+                <a:pos x="csX5" y="csY5"/>
+              </a:cxn>
+              <a:cxn ang="0">
+                <a:pos x="csX6" y="csY6"/>
+              </a:cxn>
+              <a:cxn ang="0">
+                <a:pos x="csX7" y="csY7"/>
+              </a:cxn>
+              <a:cxn ang="0">
+                <a:pos x="csX8" y="csY8"/>
+              </a:cxn>
+            </a:cxnLst>
+            <a:rect l="l" t="t" r="r" b="b"/>
+            <a:pathLst>
+              <a:path w="762626" h="469838">
+                <a:moveTo>
+                  <a:pt x="408509" y="67479"/>
+                </a:moveTo>
+                <a:cubicBezTo>
+                  <a:pt x="273478" y="47868"/>
+                  <a:pt x="138448" y="28258"/>
+                  <a:pt x="72333" y="67479"/>
+                </a:cubicBezTo>
+                <a:cubicBezTo>
+                  <a:pt x="6218" y="106700"/>
+                  <a:pt x="-16194" y="240050"/>
+                  <a:pt x="11821" y="302803"/>
+                </a:cubicBezTo>
+                <a:cubicBezTo>
+                  <a:pt x="39836" y="365556"/>
+                  <a:pt x="132844" y="418223"/>
+                  <a:pt x="240421" y="443997"/>
+                </a:cubicBezTo>
+                <a:cubicBezTo>
+                  <a:pt x="347998" y="469771"/>
+                  <a:pt x="572115" y="479856"/>
+                  <a:pt x="657280" y="457444"/>
+                </a:cubicBezTo>
+                <a:cubicBezTo>
+                  <a:pt x="742445" y="435032"/>
+                  <a:pt x="742444" y="372279"/>
+                  <a:pt x="751409" y="309526"/>
+                </a:cubicBezTo>
+                <a:cubicBezTo>
+                  <a:pt x="760374" y="246773"/>
+                  <a:pt x="785027" y="132473"/>
+                  <a:pt x="711068" y="80926"/>
+                </a:cubicBezTo>
+                <a:cubicBezTo>
+                  <a:pt x="637109" y="29379"/>
+                  <a:pt x="401785" y="3606"/>
+                  <a:pt x="307656" y="244"/>
+                </a:cubicBezTo>
+                <a:cubicBezTo>
+                  <a:pt x="213527" y="-3118"/>
+                  <a:pt x="179909" y="28818"/>
+                  <a:pt x="146291" y="60755"/>
+                </a:cubicBezTo>
+              </a:path>
+            </a:pathLst>
+          </a:custGeom>
+          <a:noFill/>
+          <a:ln w="38100">
+            <a:solidFill>
+              <a:srgbClr val="FFC000"/>
+            </a:solidFill>
+          </a:ln>
+        </p:spPr>
+        <p:style>
+          <a:lnRef idx="2">
+            <a:schemeClr val="accent1">
+              <a:shade val="15000"/>
+            </a:schemeClr>
+          </a:lnRef>
+          <a:fillRef idx="1">
+            <a:schemeClr val="accent1"/>
+          </a:fillRef>
+          <a:effectRef idx="0">
+            <a:schemeClr val="accent1"/>
+          </a:effectRef>
+          <a:fontRef idx="minor">
+            <a:schemeClr val="lt1"/>
+          </a:fontRef>
+        </p:style>
+        <p:txBody>
+          <a:bodyPr rtlCol="0" anchor="ctr"/>
+          <a:lstStyle/>
+          <a:p>
+            <a:pPr algn="ctr"/>
+            <a:endParaRPr lang="en-GB"/>
+          </a:p>
+        </p:txBody>
+      </p:sp>
+      <p:sp>
+        <p:nvSpPr>
+          <p:cNvPr id="25" name="TextBox 24">
+            <a:extLst>
+              <a:ext uri="{FF2B5EF4-FFF2-40B4-BE49-F238E27FC236}">
+                <a16:creationId xmlns:a16="http://schemas.microsoft.com/office/drawing/2014/main" id="{E01FAEF7-7621-95C3-3BEA-3B0F8DE5BA95}"/>
+              </a:ext>
+            </a:extLst>
+          </p:cNvPr>
+          <p:cNvSpPr txBox="1"/>
+          <p:nvPr/>
+        </p:nvSpPr>
+        <p:spPr>
+          <a:xfrm>
+            <a:off x="11096222" y="5929347"/>
+            <a:ext cx="914400" cy="276999"/>
+          </a:xfrm>
+          <a:prstGeom prst="rect">
+            <a:avLst/>
+          </a:prstGeom>
+          <a:noFill/>
+        </p:spPr>
+        <p:txBody>
+          <a:bodyPr wrap="square" lIns="0" tIns="0" rIns="0" bIns="0" rtlCol="0" anchor="t" anchorCtr="0">
+            <a:spAutoFit/>
+          </a:bodyPr>
+          <a:lstStyle/>
+          <a:p>
+            <a:pPr algn="l">
+              <a:lnSpc>
+                <a:spcPct val="90000"/>
+              </a:lnSpc>
+              <a:spcBef>
+                <a:spcPts val="600"/>
+              </a:spcBef>
+              <a:spcAft>
+                <a:spcPts val="400"/>
+              </a:spcAft>
+            </a:pPr>
+            <a:r>
+              <a:rPr lang="en-GB" sz="2000">
+                <a:latin typeface="Arial" panose="020B0604020202020204" pitchFamily="34" charset="0"/>
+                <a:cs typeface="Arial" panose="020B0604020202020204" pitchFamily="34" charset="0"/>
+              </a:rPr>
+              <a:t>Control</a:t>
+            </a:r>
+            <a:endParaRPr lang="en-GB" sz="2000" dirty="0">
+              <a:latin typeface="Arial" panose="020B0604020202020204" pitchFamily="34" charset="0"/>
+              <a:cs typeface="Arial" panose="020B0604020202020204" pitchFamily="34" charset="0"/>
+            </a:endParaRPr>
+          </a:p>
+        </p:txBody>
+      </p:sp>
+      <p:sp>
+        <p:nvSpPr>
+          <p:cNvPr id="26" name="Freeform: Shape 25">
+            <a:extLst>
+              <a:ext uri="{FF2B5EF4-FFF2-40B4-BE49-F238E27FC236}">
+                <a16:creationId xmlns:a16="http://schemas.microsoft.com/office/drawing/2014/main" id="{ABE022A7-7155-5BFF-8862-B349DA9A0829}"/>
+              </a:ext>
+            </a:extLst>
+          </p:cNvPr>
+          <p:cNvSpPr/>
+          <p:nvPr/>
+        </p:nvSpPr>
+        <p:spPr>
+          <a:xfrm rot="10117872">
+            <a:off x="9150866" y="5212854"/>
+            <a:ext cx="595268" cy="369332"/>
+          </a:xfrm>
+          <a:custGeom>
+            <a:avLst/>
+            <a:gdLst>
+              <a:gd name="csX0" fmla="*/ 408509 w 762626"/>
+              <a:gd name="csY0" fmla="*/ 67479 h 469838"/>
+              <a:gd name="csX1" fmla="*/ 72333 w 762626"/>
+              <a:gd name="csY1" fmla="*/ 67479 h 469838"/>
+              <a:gd name="csX2" fmla="*/ 11821 w 762626"/>
+              <a:gd name="csY2" fmla="*/ 302803 h 469838"/>
+              <a:gd name="csX3" fmla="*/ 240421 w 762626"/>
+              <a:gd name="csY3" fmla="*/ 443997 h 469838"/>
+              <a:gd name="csX4" fmla="*/ 657280 w 762626"/>
+              <a:gd name="csY4" fmla="*/ 457444 h 469838"/>
+              <a:gd name="csX5" fmla="*/ 751409 w 762626"/>
+              <a:gd name="csY5" fmla="*/ 309526 h 469838"/>
+              <a:gd name="csX6" fmla="*/ 711068 w 762626"/>
+              <a:gd name="csY6" fmla="*/ 80926 h 469838"/>
+              <a:gd name="csX7" fmla="*/ 307656 w 762626"/>
+              <a:gd name="csY7" fmla="*/ 244 h 469838"/>
+              <a:gd name="csX8" fmla="*/ 146291 w 762626"/>
+              <a:gd name="csY8" fmla="*/ 60755 h 469838"/>
+            </a:gdLst>
+            <a:ahLst/>
+            <a:cxnLst>
+              <a:cxn ang="0">
+                <a:pos x="csX0" y="csY0"/>
+              </a:cxn>
+              <a:cxn ang="0">
+                <a:pos x="csX1" y="csY1"/>
+              </a:cxn>
+              <a:cxn ang="0">
+                <a:pos x="csX2" y="csY2"/>
+              </a:cxn>
+              <a:cxn ang="0">
+                <a:pos x="csX3" y="csY3"/>
+              </a:cxn>
+              <a:cxn ang="0">
+                <a:pos x="csX4" y="csY4"/>
+              </a:cxn>
+              <a:cxn ang="0">
+                <a:pos x="csX5" y="csY5"/>
+              </a:cxn>
+              <a:cxn ang="0">
+                <a:pos x="csX6" y="csY6"/>
+              </a:cxn>
+              <a:cxn ang="0">
+                <a:pos x="csX7" y="csY7"/>
+              </a:cxn>
+              <a:cxn ang="0">
+                <a:pos x="csX8" y="csY8"/>
+              </a:cxn>
+            </a:cxnLst>
+            <a:rect l="l" t="t" r="r" b="b"/>
+            <a:pathLst>
+              <a:path w="762626" h="469838">
+                <a:moveTo>
+                  <a:pt x="408509" y="67479"/>
+                </a:moveTo>
+                <a:cubicBezTo>
+                  <a:pt x="273478" y="47868"/>
+                  <a:pt x="138448" y="28258"/>
+                  <a:pt x="72333" y="67479"/>
+                </a:cubicBezTo>
+                <a:cubicBezTo>
+                  <a:pt x="6218" y="106700"/>
+                  <a:pt x="-16194" y="240050"/>
+                  <a:pt x="11821" y="302803"/>
+                </a:cubicBezTo>
+                <a:cubicBezTo>
+                  <a:pt x="39836" y="365556"/>
+                  <a:pt x="132844" y="418223"/>
+                  <a:pt x="240421" y="443997"/>
+                </a:cubicBezTo>
+                <a:cubicBezTo>
+                  <a:pt x="347998" y="469771"/>
+                  <a:pt x="572115" y="479856"/>
+                  <a:pt x="657280" y="457444"/>
+                </a:cubicBezTo>
+                <a:cubicBezTo>
+                  <a:pt x="742445" y="435032"/>
+                  <a:pt x="742444" y="372279"/>
+                  <a:pt x="751409" y="309526"/>
+                </a:cubicBezTo>
+                <a:cubicBezTo>
+                  <a:pt x="760374" y="246773"/>
+                  <a:pt x="785027" y="132473"/>
+                  <a:pt x="711068" y="80926"/>
+                </a:cubicBezTo>
+                <a:cubicBezTo>
+                  <a:pt x="637109" y="29379"/>
+                  <a:pt x="401785" y="3606"/>
+                  <a:pt x="307656" y="244"/>
+                </a:cubicBezTo>
+                <a:cubicBezTo>
+                  <a:pt x="213527" y="-3118"/>
+                  <a:pt x="179909" y="28818"/>
+                  <a:pt x="146291" y="60755"/>
+                </a:cubicBezTo>
+              </a:path>
+            </a:pathLst>
+          </a:custGeom>
+          <a:noFill/>
+          <a:ln w="38100">
+            <a:solidFill>
+              <a:schemeClr val="accent6">
+                <a:lumMod val="75000"/>
+              </a:schemeClr>
+            </a:solidFill>
+          </a:ln>
+        </p:spPr>
+        <p:style>
+          <a:lnRef idx="2">
+            <a:schemeClr val="accent1">
+              <a:shade val="15000"/>
+            </a:schemeClr>
+          </a:lnRef>
+          <a:fillRef idx="1">
+            <a:schemeClr val="accent1"/>
+          </a:fillRef>
+          <a:effectRef idx="0">
+            <a:schemeClr val="accent1"/>
+          </a:effectRef>
+          <a:fontRef idx="minor">
+            <a:schemeClr val="lt1"/>
+          </a:fontRef>
+        </p:style>
+        <p:txBody>
+          <a:bodyPr rtlCol="0" anchor="ctr"/>
+          <a:lstStyle/>
+          <a:p>
+            <a:pPr algn="ctr"/>
+            <a:endParaRPr lang="en-GB"/>
+          </a:p>
+        </p:txBody>
+      </p:sp>
+      <p:sp>
+        <p:nvSpPr>
+          <p:cNvPr id="27" name="Freeform: Shape 26">
+            <a:extLst>
+              <a:ext uri="{FF2B5EF4-FFF2-40B4-BE49-F238E27FC236}">
+                <a16:creationId xmlns:a16="http://schemas.microsoft.com/office/drawing/2014/main" id="{8EB7AA5C-10DC-B4D7-1C27-83CA3F0FDF58}"/>
+              </a:ext>
+            </a:extLst>
+          </p:cNvPr>
+          <p:cNvSpPr/>
+          <p:nvPr/>
+        </p:nvSpPr>
+        <p:spPr>
+          <a:xfrm>
+            <a:off x="5344732" y="5277318"/>
+            <a:ext cx="3133860" cy="518175"/>
+          </a:xfrm>
+          <a:custGeom>
+            <a:avLst/>
+            <a:gdLst>
+              <a:gd name="csX0" fmla="*/ 3133860 w 3133860"/>
+              <a:gd name="csY0" fmla="*/ 0 h 399245"/>
+              <a:gd name="csX1" fmla="*/ 0 w 3133860"/>
+              <a:gd name="csY1" fmla="*/ 399245 h 399245"/>
+              <a:gd name="csX0" fmla="*/ 3133860 w 3133860"/>
+              <a:gd name="csY0" fmla="*/ 0 h 399245"/>
+              <a:gd name="csX1" fmla="*/ 0 w 3133860"/>
+              <a:gd name="csY1" fmla="*/ 399245 h 399245"/>
+              <a:gd name="csX0" fmla="*/ 3133860 w 3133860"/>
+              <a:gd name="csY0" fmla="*/ 118930 h 518175"/>
+              <a:gd name="csX1" fmla="*/ 0 w 3133860"/>
+              <a:gd name="csY1" fmla="*/ 518175 h 518175"/>
+            </a:gdLst>
+            <a:ahLst/>
+            <a:cxnLst>
+              <a:cxn ang="0">
+                <a:pos x="csX0" y="csY0"/>
+              </a:cxn>
+              <a:cxn ang="0">
+                <a:pos x="csX1" y="csY1"/>
+              </a:cxn>
+            </a:cxnLst>
+            <a:rect l="l" t="t" r="r" b="b"/>
+            <a:pathLst>
+              <a:path w="3133860" h="518175">
+                <a:moveTo>
+                  <a:pt x="3133860" y="118930"/>
+                </a:moveTo>
+                <a:cubicBezTo>
+                  <a:pt x="1119032" y="-185870"/>
+                  <a:pt x="465071" y="148981"/>
+                  <a:pt x="0" y="518175"/>
+                </a:cubicBezTo>
+              </a:path>
+            </a:pathLst>
+          </a:custGeom>
+          <a:noFill/>
+          <a:ln w="38100">
+            <a:solidFill>
+              <a:srgbClr val="FFC000"/>
+            </a:solidFill>
+          </a:ln>
+        </p:spPr>
+        <p:style>
+          <a:lnRef idx="2">
+            <a:schemeClr val="accent1">
+              <a:shade val="15000"/>
+            </a:schemeClr>
+          </a:lnRef>
+          <a:fillRef idx="1">
+            <a:schemeClr val="accent1"/>
+          </a:fillRef>
+          <a:effectRef idx="0">
+            <a:schemeClr val="accent1"/>
+          </a:effectRef>
+          <a:fontRef idx="minor">
+            <a:schemeClr val="lt1"/>
+          </a:fontRef>
+        </p:style>
+        <p:txBody>
+          <a:bodyPr rtlCol="0" anchor="ctr"/>
+          <a:lstStyle/>
+          <a:p>
+            <a:pPr algn="ctr"/>
+            <a:endParaRPr lang="LID4096"/>
+          </a:p>
+        </p:txBody>
+      </p:sp>
+      <p:sp>
+        <p:nvSpPr>
+          <p:cNvPr id="28" name="Freeform: Shape 27">
+            <a:extLst>
+              <a:ext uri="{FF2B5EF4-FFF2-40B4-BE49-F238E27FC236}">
+                <a16:creationId xmlns:a16="http://schemas.microsoft.com/office/drawing/2014/main" id="{3C1AB4A7-DBCA-624D-63CD-CC40E8AF3448}"/>
+              </a:ext>
+            </a:extLst>
+          </p:cNvPr>
+          <p:cNvSpPr/>
+          <p:nvPr/>
+        </p:nvSpPr>
+        <p:spPr>
+          <a:xfrm>
+            <a:off x="9745014" y="5287306"/>
+            <a:ext cx="1768699" cy="692784"/>
+          </a:xfrm>
+          <a:custGeom>
+            <a:avLst/>
+            <a:gdLst>
+              <a:gd name="csX0" fmla="*/ 0 w 1768699"/>
+              <a:gd name="csY0" fmla="*/ 0 h 635358"/>
+              <a:gd name="csX1" fmla="*/ 1768699 w 1768699"/>
+              <a:gd name="csY1" fmla="*/ 635358 h 635358"/>
+              <a:gd name="csX0" fmla="*/ 0 w 1768699"/>
+              <a:gd name="csY0" fmla="*/ 0 h 635358"/>
+              <a:gd name="csX1" fmla="*/ 1768699 w 1768699"/>
+              <a:gd name="csY1" fmla="*/ 635358 h 635358"/>
+              <a:gd name="csX0" fmla="*/ 0 w 1768699"/>
+              <a:gd name="csY0" fmla="*/ 57426 h 692784"/>
+              <a:gd name="csX1" fmla="*/ 1768699 w 1768699"/>
+              <a:gd name="csY1" fmla="*/ 692784 h 692784"/>
+            </a:gdLst>
+            <a:ahLst/>
+            <a:cxnLst>
+              <a:cxn ang="0">
+                <a:pos x="csX0" y="csY0"/>
+              </a:cxn>
+              <a:cxn ang="0">
+                <a:pos x="csX1" y="csY1"/>
+              </a:cxn>
+            </a:cxnLst>
+            <a:rect l="l" t="t" r="r" b="b"/>
+            <a:pathLst>
+              <a:path w="1768699" h="692784">
+                <a:moveTo>
+                  <a:pt x="0" y="57426"/>
+                </a:moveTo>
+                <a:cubicBezTo>
+                  <a:pt x="842851" y="-31295"/>
+                  <a:pt x="1548327" y="-128602"/>
+                  <a:pt x="1768699" y="692784"/>
+                </a:cubicBezTo>
+              </a:path>
+            </a:pathLst>
+          </a:custGeom>
+          <a:noFill/>
+          <a:ln w="38100">
+            <a:solidFill>
+              <a:schemeClr val="accent6">
+                <a:lumMod val="75000"/>
+              </a:schemeClr>
+            </a:solidFill>
+          </a:ln>
+        </p:spPr>
+        <p:style>
+          <a:lnRef idx="2">
+            <a:schemeClr val="accent1">
+              <a:shade val="15000"/>
+            </a:schemeClr>
+          </a:lnRef>
+          <a:fillRef idx="1">
+            <a:schemeClr val="accent1"/>
+          </a:fillRef>
+          <a:effectRef idx="0">
+            <a:schemeClr val="accent1"/>
+          </a:effectRef>
+          <a:fontRef idx="minor">
+            <a:schemeClr val="lt1"/>
+          </a:fontRef>
+        </p:style>
+        <p:txBody>
+          <a:bodyPr rtlCol="0" anchor="ctr"/>
+          <a:lstStyle/>
+          <a:p>
+            <a:pPr algn="ctr"/>
+            <a:endParaRPr lang="LID4096"/>
+          </a:p>
+        </p:txBody>
+      </p:sp>
+      <p:pic>
+        <p:nvPicPr>
+          <p:cNvPr id="4" name="Picture 3">
+            <a:extLst>
+              <a:ext uri="{FF2B5EF4-FFF2-40B4-BE49-F238E27FC236}">
+                <a16:creationId xmlns:a16="http://schemas.microsoft.com/office/drawing/2014/main" id="{E1653DFA-1EE4-6AA4-1826-9DA4F64F5EC6}"/>
+              </a:ext>
+            </a:extLst>
+          </p:cNvPr>
+          <p:cNvPicPr>
+            <a:picLocks noChangeAspect="1"/>
+          </p:cNvPicPr>
+          <p:nvPr/>
+        </p:nvPicPr>
+        <p:blipFill>
+          <a:blip r:embed="rId6"/>
+          <a:stretch>
+            <a:fillRect/>
+          </a:stretch>
+        </p:blipFill>
+        <p:spPr>
+          <a:xfrm>
+            <a:off x="192506" y="1803996"/>
+            <a:ext cx="5195466" cy="3870325"/>
+          </a:xfrm>
+          <a:prstGeom prst="rect">
+            <a:avLst/>
+          </a:prstGeom>
+          <a:ln>
+            <a:solidFill>
+              <a:schemeClr val="tx1"/>
+            </a:solidFill>
+          </a:ln>
+          <a:effectLst>
+            <a:outerShdw blurRad="50800" dist="38100" dir="2700000" algn="tl" rotWithShape="0">
+              <a:prstClr val="black">
+                <a:alpha val="40000"/>
+              </a:prstClr>
+            </a:outerShdw>
+          </a:effectLst>
+        </p:spPr>
+      </p:pic>
+    </p:spTree>
+    <p:extLst>
+      <p:ext uri="{BB962C8B-B14F-4D97-AF65-F5344CB8AC3E}">
+        <p14:creationId xmlns:p14="http://schemas.microsoft.com/office/powerpoint/2010/main" val="2296816067"/>
+      </p:ext>
+    </p:extLst>
+  </p:cSld>
+  <p:clrMapOvr>
+    <a:masterClrMapping/>
+  </p:clrMapOvr>
+  <p:timing>
+    <p:tnLst>
+      <p:par>
+        <p:cTn id="1" dur="indefinite" restart="never" nodeType="tmRoot">
+          <p:childTnLst>
+            <p:seq concurrent="1" nextAc="seek">
+              <p:cTn id="2" dur="indefinite" nodeType="mainSeq">
+                <p:childTnLst>
+                  <p:par>
+                    <p:cTn id="3" fill="hold">
+                      <p:stCondLst>
+                        <p:cond delay="indefinite"/>
+                      </p:stCondLst>
+                      <p:childTnLst>
+                        <p:par>
+                          <p:cTn id="4" fill="hold">
+                            <p:stCondLst>
+                              <p:cond delay="0"/>
+                            </p:stCondLst>
+                            <p:childTnLst>
+                              <p:par>
+                                <p:cTn id="5" presetID="10" presetClass="entr" presetSubtype="0" fill="hold" nodeType="clickEffect">
+                                  <p:stCondLst>
+                                    <p:cond delay="0"/>
+                                  </p:stCondLst>
+                                  <p:childTnLst>
+                                    <p:set>
+                                      <p:cBhvr>
+                                        <p:cTn id="6" dur="1" fill="hold">
+                                          <p:stCondLst>
+                                            <p:cond delay="0"/>
+                                          </p:stCondLst>
+                                        </p:cTn>
+                                        <p:tgtEl>
+                                          <p:spTgt spid="5"/>
+                                        </p:tgtEl>
+                                        <p:attrNameLst>
+                                          <p:attrName>style.visibility</p:attrName>
+                                        </p:attrNameLst>
+                                      </p:cBhvr>
+                                      <p:to>
+                                        <p:strVal val="visible"/>
+                                      </p:to>
+                                    </p:set>
+                                    <p:animEffect transition="in" filter="fade">
+                                      <p:cBhvr>
+                                        <p:cTn id="7" dur="500"/>
+                                        <p:tgtEl>
+                                          <p:spTgt spid="5"/>
+                                        </p:tgtEl>
+                                      </p:cBhvr>
+                                    </p:animEffect>
+                                  </p:childTnLst>
+                                </p:cTn>
+                              </p:par>
+                              <p:par>
+                                <p:cTn id="8" presetID="10" presetClass="entr" presetSubtype="0" fill="hold" grpId="0" nodeType="withEffect">
+                                  <p:stCondLst>
+                                    <p:cond delay="0"/>
+                                  </p:stCondLst>
+                                  <p:childTnLst>
+                                    <p:set>
+                                      <p:cBhvr>
+                                        <p:cTn id="9" dur="1" fill="hold">
+                                          <p:stCondLst>
+                                            <p:cond delay="0"/>
+                                          </p:stCondLst>
+                                        </p:cTn>
+                                        <p:tgtEl>
+                                          <p:spTgt spid="15"/>
+                                        </p:tgtEl>
+                                        <p:attrNameLst>
+                                          <p:attrName>style.visibility</p:attrName>
+                                        </p:attrNameLst>
+                                      </p:cBhvr>
+                                      <p:to>
+                                        <p:strVal val="visible"/>
+                                      </p:to>
+                                    </p:set>
+                                    <p:animEffect transition="in" filter="fade">
+                                      <p:cBhvr>
+                                        <p:cTn id="10" dur="500"/>
+                                        <p:tgtEl>
+                                          <p:spTgt spid="15"/>
                                         </p:tgtEl>
                                       </p:cBhvr>
                                     </p:animEffect>
@@ -25286,36 +29221,32 @@
                     </p:cTn>
                   </p:par>
                   <p:par>
-                    <p:cTn id="107" fill="hold">
+                    <p:cTn id="11" fill="hold">
                       <p:stCondLst>
                         <p:cond delay="indefinite"/>
                       </p:stCondLst>
                       <p:childTnLst>
                         <p:par>
-                          <p:cTn id="108" fill="hold">
+                          <p:cTn id="12" fill="hold">
                             <p:stCondLst>
                               <p:cond delay="0"/>
                             </p:stCondLst>
                             <p:childTnLst>
                               <p:par>
-                                <p:cTn id="109" presetID="10" presetClass="entr" presetSubtype="0" fill="hold" nodeType="clickEffect">
+                                <p:cTn id="13" presetID="10" presetClass="entr" presetSubtype="0" fill="hold" grpId="0" nodeType="clickEffect">
                                   <p:stCondLst>
                                     <p:cond delay="0"/>
                                   </p:stCondLst>
                                   <p:childTnLst>
                                     <p:set>
                                       <p:cBhvr>
-                                        <p:cTn id="110" dur="1" fill="hold">
+                                        <p:cTn id="14" dur="1" fill="hold">
                                           <p:stCondLst>
                                             <p:cond delay="0"/>
                                           </p:stCondLst>
                                         </p:cTn>
                                         <p:tgtEl>
-                                          <p:spTgt spid="3">
-                                            <p:txEl>
-                                              <p:pRg st="23" end="23"/>
-                                            </p:txEl>
-                                          </p:spTgt>
+                                          <p:spTgt spid="24"/>
                                         </p:tgtEl>
                                         <p:attrNameLst>
                                           <p:attrName>style.visibility</p:attrName>
@@ -25327,13 +29258,97 @@
                                     </p:set>
                                     <p:animEffect transition="in" filter="fade">
                                       <p:cBhvr>
-                                        <p:cTn id="111" dur="500"/>
+                                        <p:cTn id="15" dur="500"/>
                                         <p:tgtEl>
-                                          <p:spTgt spid="3">
-                                            <p:txEl>
-                                              <p:pRg st="23" end="23"/>
-                                            </p:txEl>
-                                          </p:spTgt>
+                                          <p:spTgt spid="24"/>
+                                        </p:tgtEl>
+                                      </p:cBhvr>
+                                    </p:animEffect>
+                                  </p:childTnLst>
+                                </p:cTn>
+                              </p:par>
+                              <p:par>
+                                <p:cTn id="16" presetID="10" presetClass="entr" presetSubtype="0" fill="hold" grpId="0" nodeType="withEffect">
+                                  <p:stCondLst>
+                                    <p:cond delay="0"/>
+                                  </p:stCondLst>
+                                  <p:childTnLst>
+                                    <p:set>
+                                      <p:cBhvr>
+                                        <p:cTn id="17" dur="1" fill="hold">
+                                          <p:stCondLst>
+                                            <p:cond delay="0"/>
+                                          </p:stCondLst>
+                                        </p:cTn>
+                                        <p:tgtEl>
+                                          <p:spTgt spid="25"/>
+                                        </p:tgtEl>
+                                        <p:attrNameLst>
+                                          <p:attrName>style.visibility</p:attrName>
+                                        </p:attrNameLst>
+                                      </p:cBhvr>
+                                      <p:to>
+                                        <p:strVal val="visible"/>
+                                      </p:to>
+                                    </p:set>
+                                    <p:animEffect transition="in" filter="fade">
+                                      <p:cBhvr>
+                                        <p:cTn id="18" dur="500"/>
+                                        <p:tgtEl>
+                                          <p:spTgt spid="25"/>
+                                        </p:tgtEl>
+                                      </p:cBhvr>
+                                    </p:animEffect>
+                                  </p:childTnLst>
+                                </p:cTn>
+                              </p:par>
+                            </p:childTnLst>
+                          </p:cTn>
+                        </p:par>
+                      </p:childTnLst>
+                    </p:cTn>
+                  </p:par>
+                  <p:par>
+                    <p:cTn id="19" fill="hold">
+                      <p:stCondLst>
+                        <p:cond delay="indefinite"/>
+                      </p:stCondLst>
+                      <p:childTnLst>
+                        <p:par>
+                          <p:cTn id="20" fill="hold">
+                            <p:stCondLst>
+                              <p:cond delay="0"/>
+                            </p:stCondLst>
+                            <p:childTnLst>
+                              <p:par>
+                                <p:cTn id="21" presetID="10" presetClass="entr" presetSubtype="0" fill="hold" grpId="0" nodeType="clickEffect">
+                                  <p:stCondLst>
+                                    <p:cond delay="0"/>
+                                  </p:stCondLst>
+                                  <p:childTnLst>
+                                    <p:set>
+                                      <p:cBhvr>
+                                        <p:cTn id="22" dur="1" fill="hold">
+                                          <p:stCondLst>
+                                            <p:cond delay="0"/>
+                                          </p:stCondLst>
+                                        </p:cTn>
+                                        <p:tgtEl>
+                                          <p:spTgt spid="26"/>
+                                        </p:tgtEl>
+                                        <p:attrNameLst>
+                                          <p:attrName>style.visibility</p:attrName>
+                                        </p:attrNameLst>
+                                      </p:cBhvr>
+                                      <p:to>
+                                        <p:strVal val="visible"/>
+                                      </p:to>
+                                    </p:set>
+                                    <p:animEffect transition="in" filter="fade">
+                                      <p:cBhvr>
+                                        <p:cTn id="23" dur="500"/>
+                                        <p:tgtEl>
+                                          <p:spTgt spid="26"/>
                                         </p:tgtEl>
                                       </p:cBhvr>
                                     </p:animEffect>
@@ -25367,11 +29382,17 @@
         </p:cTn>
       </p:par>
     </p:tnLst>
+    <p:bldLst>
+      <p:bldP spid="15" grpId="0"/>
+      <p:bldP spid="24" grpId="0" animBg="1"/>
+      <p:bldP spid="25" grpId="0"/>
+      <p:bldP spid="26" grpId="0" animBg="1"/>
+    </p:bldLst>
   </p:timing>
 </p:sld>
 </file>
 
-<file path=ppt/slides/slide23.xml><?xml version="1.0" encoding="utf-8"?>
+<file path=ppt/slides/slide25.xml><?xml version="1.0" encoding="utf-8"?>
 <p:sld xmlns:a="http://schemas.openxmlformats.org/drawingml/2006/main" xmlns:r="http://schemas.openxmlformats.org/officeDocument/2006/relationships" xmlns:p="http://schemas.openxmlformats.org/presentationml/2006/main">
   <p:cSld>
     <p:spTree>
@@ -25524,7 +29545,7 @@
           <a:p>
             <a:fld id="{E46909CE-3A1D-43F5-8F4E-45D6477AD820}" type="slidenum">
               <a:rPr lang="LID4096" smtClean="0"/>
-              <a:t>23</a:t>
+              <a:t>25</a:t>
             </a:fld>
             <a:endParaRPr lang="LID4096"/>
           </a:p>
@@ -26708,7 +30729,7 @@
 </p:sld>
 </file>
 
-<file path=ppt/slides/slide24.xml><?xml version="1.0" encoding="utf-8"?>
+<file path=ppt/slides/slide26.xml><?xml version="1.0" encoding="utf-8"?>
 <p:sld xmlns:a="http://schemas.openxmlformats.org/drawingml/2006/main" xmlns:r="http://schemas.openxmlformats.org/officeDocument/2006/relationships" xmlns:p="http://schemas.openxmlformats.org/presentationml/2006/main">
   <p:cSld>
     <p:spTree>
@@ -26867,7 +30888,7 @@
           <a:p>
             <a:fld id="{E46909CE-3A1D-43F5-8F4E-45D6477AD820}" type="slidenum">
               <a:rPr lang="LID4096" smtClean="0"/>
-              <a:t>24</a:t>
+              <a:t>26</a:t>
             </a:fld>
             <a:endParaRPr lang="LID4096"/>
           </a:p>
@@ -27609,7 +31630,7 @@
 </p:sld>
 </file>
 
-<file path=ppt/slides/slide25.xml><?xml version="1.0" encoding="utf-8"?>
+<file path=ppt/slides/slide27.xml><?xml version="1.0" encoding="utf-8"?>
 <p:sld xmlns:a="http://schemas.openxmlformats.org/drawingml/2006/main" xmlns:r="http://schemas.openxmlformats.org/officeDocument/2006/relationships" xmlns:p="http://schemas.openxmlformats.org/presentationml/2006/main">
   <p:cSld>
     <p:spTree>
@@ -27732,7 +31753,7 @@
           <a:p>
             <a:fld id="{E46909CE-3A1D-43F5-8F4E-45D6477AD820}" type="slidenum">
               <a:rPr lang="LID4096" smtClean="0"/>
-              <a:t>25</a:t>
+              <a:t>27</a:t>
             </a:fld>
             <a:endParaRPr lang="LID4096"/>
           </a:p>
@@ -27984,7 +32005,62 @@
 </p:sld>
 </file>
 
-<file path=ppt/slides/slide26.xml><?xml version="1.0" encoding="utf-8"?>
+<file path=ppt/slides/slide28.xml><?xml version="1.0" encoding="utf-8"?>
+<p:sld xmlns:a="http://schemas.openxmlformats.org/drawingml/2006/main" xmlns:r="http://schemas.openxmlformats.org/officeDocument/2006/relationships" xmlns:p="http://schemas.openxmlformats.org/presentationml/2006/main">
+  <p:cSld>
+    <p:spTree>
+      <p:nvGrpSpPr>
+        <p:cNvPr id="1" name=""/>
+        <p:cNvGrpSpPr/>
+        <p:nvPr/>
+      </p:nvGrpSpPr>
+      <p:grpSpPr>
+        <a:xfrm>
+          <a:off x="0" y="0"/>
+          <a:ext cx="0" cy="0"/>
+          <a:chOff x="0" y="0"/>
+          <a:chExt cx="0" cy="0"/>
+        </a:xfrm>
+      </p:grpSpPr>
+      <p:sp>
+        <p:nvSpPr>
+          <p:cNvPr id="2" name="Title 1">
+            <a:extLst>
+              <a:ext uri="{FF2B5EF4-FFF2-40B4-BE49-F238E27FC236}">
+                <a16:creationId xmlns:a16="http://schemas.microsoft.com/office/drawing/2014/main" id="{97E09581-618B-C41A-CA67-9FDCF5E529A8}"/>
+              </a:ext>
+            </a:extLst>
+          </p:cNvPr>
+          <p:cNvSpPr>
+            <a:spLocks noGrp="1"/>
+          </p:cNvSpPr>
+          <p:nvPr>
+            <p:ph type="ctrTitle"/>
+          </p:nvPr>
+        </p:nvSpPr>
+        <p:spPr/>
+        <p:txBody>
+          <a:bodyPr/>
+          <a:lstStyle/>
+          <a:p>
+            <a:endParaRPr lang="LID4096"/>
+          </a:p>
+        </p:txBody>
+      </p:sp>
+    </p:spTree>
+    <p:extLst>
+      <p:ext uri="{BB962C8B-B14F-4D97-AF65-F5344CB8AC3E}">
+        <p14:creationId xmlns:p14="http://schemas.microsoft.com/office/powerpoint/2010/main" val="1500123132"/>
+      </p:ext>
+    </p:extLst>
+  </p:cSld>
+  <p:clrMapOvr>
+    <a:masterClrMapping/>
+  </p:clrMapOvr>
+</p:sld>
+</file>
+
+<file path=ppt/slides/slide29.xml><?xml version="1.0" encoding="utf-8"?>
 <p:sld xmlns:a="http://schemas.openxmlformats.org/drawingml/2006/main" xmlns:r="http://schemas.openxmlformats.org/officeDocument/2006/relationships" xmlns:p="http://schemas.openxmlformats.org/presentationml/2006/main">
   <p:cSld>
     <p:spTree>
@@ -28113,7 +32189,7 @@
           <a:p>
             <a:fld id="{E46909CE-3A1D-43F5-8F4E-45D6477AD820}" type="slidenum">
               <a:rPr lang="LID4096" smtClean="0"/>
-              <a:t>26</a:t>
+              <a:t>29</a:t>
             </a:fld>
             <a:endParaRPr lang="LID4096"/>
           </a:p>

--- a/slides/lecture06_pointers_and_sync.pptx
+++ b/slides/lecture06_pointers_and_sync.pptx
@@ -262,7 +262,7 @@
           <a:p>
             <a:fld id="{55C9657E-FDB3-4206-AA4E-9AE2AAB0A71C}" type="datetimeFigureOut">
               <a:rPr lang="LID4096" smtClean="0"/>
-              <a:t>02/05/2026</a:t>
+              <a:t>02/06/2026</a:t>
             </a:fld>
             <a:endParaRPr lang="LID4096"/>
           </a:p>
@@ -4007,19 +4007,9 @@
           <a:lstStyle/>
           <a:p>
             <a:r>
-              <a:rPr lang="sv-SE"/>
+              <a:rPr lang="sv-SE" dirty="0"/>
               <a:t>Ett exempel till som visar pekare till typer med andra storlekar.</a:t>
             </a:r>
-          </a:p>
-          <a:p>
-            <a:endParaRPr lang="sv-SE"/>
-          </a:p>
-          <a:p>
-            <a:r>
-              <a:rPr lang="sv-SE"/>
-              <a:t>LÄGGA TILL EXEMPEL MED ABSOLUT ADDRESSERING? </a:t>
-            </a:r>
-            <a:endParaRPr lang="LID4096"/>
           </a:p>
         </p:txBody>
       </p:sp>
@@ -4371,7 +4361,7 @@
           <a:p>
             <a:fld id="{C16EB631-5B1A-4879-85E7-A8D4C94FBFC5}" type="datetimeFigureOut">
               <a:rPr lang="LID4096" smtClean="0"/>
-              <a:t>02/05/2026</a:t>
+              <a:t>02/06/2026</a:t>
             </a:fld>
             <a:endParaRPr lang="LID4096"/>
           </a:p>
@@ -4660,7 +4650,7 @@
           <a:p>
             <a:fld id="{C16EB631-5B1A-4879-85E7-A8D4C94FBFC5}" type="datetimeFigureOut">
               <a:rPr lang="LID4096" smtClean="0"/>
-              <a:t>02/05/2026</a:t>
+              <a:t>02/06/2026</a:t>
             </a:fld>
             <a:endParaRPr lang="LID4096"/>
           </a:p>
@@ -4860,7 +4850,7 @@
           <a:p>
             <a:fld id="{C16EB631-5B1A-4879-85E7-A8D4C94FBFC5}" type="datetimeFigureOut">
               <a:rPr lang="LID4096" smtClean="0"/>
-              <a:t>02/05/2026</a:t>
+              <a:t>02/06/2026</a:t>
             </a:fld>
             <a:endParaRPr lang="LID4096"/>
           </a:p>
@@ -5070,7 +5060,7 @@
           <a:p>
             <a:fld id="{C16EB631-5B1A-4879-85E7-A8D4C94FBFC5}" type="datetimeFigureOut">
               <a:rPr lang="LID4096" smtClean="0"/>
-              <a:t>02/05/2026</a:t>
+              <a:t>02/06/2026</a:t>
             </a:fld>
             <a:endParaRPr lang="LID4096"/>
           </a:p>
@@ -5298,7 +5288,7 @@
           <a:p>
             <a:fld id="{10ECE148-BD56-4755-B580-741EAF415DA4}" type="datetime1">
               <a:rPr lang="LID4096" smtClean="0"/>
-              <a:t>02/05/2026</a:t>
+              <a:t>02/06/2026</a:t>
             </a:fld>
             <a:endParaRPr lang="LID4096"/>
           </a:p>
@@ -5558,7 +5548,7 @@
           <a:p>
             <a:fld id="{C16EB631-5B1A-4879-85E7-A8D4C94FBFC5}" type="datetimeFigureOut">
               <a:rPr lang="LID4096" smtClean="0"/>
-              <a:t>02/05/2026</a:t>
+              <a:t>02/06/2026</a:t>
             </a:fld>
             <a:endParaRPr lang="LID4096"/>
           </a:p>
@@ -5871,7 +5861,7 @@
           <a:p>
             <a:fld id="{C16EB631-5B1A-4879-85E7-A8D4C94FBFC5}" type="datetimeFigureOut">
               <a:rPr lang="LID4096" smtClean="0"/>
-              <a:t>02/05/2026</a:t>
+              <a:t>02/06/2026</a:t>
             </a:fld>
             <a:endParaRPr lang="LID4096"/>
           </a:p>
@@ -6147,7 +6137,7 @@
           <a:p>
             <a:fld id="{C16EB631-5B1A-4879-85E7-A8D4C94FBFC5}" type="datetimeFigureOut">
               <a:rPr lang="LID4096" smtClean="0"/>
-              <a:t>02/05/2026</a:t>
+              <a:t>02/06/2026</a:t>
             </a:fld>
             <a:endParaRPr lang="LID4096"/>
           </a:p>
@@ -6469,7 +6459,7 @@
           <a:p>
             <a:fld id="{C16EB631-5B1A-4879-85E7-A8D4C94FBFC5}" type="datetimeFigureOut">
               <a:rPr lang="LID4096" smtClean="0"/>
-              <a:t>02/05/2026</a:t>
+              <a:t>02/06/2026</a:t>
             </a:fld>
             <a:endParaRPr lang="LID4096"/>
           </a:p>
@@ -6938,7 +6928,7 @@
           <a:p>
             <a:fld id="{C16EB631-5B1A-4879-85E7-A8D4C94FBFC5}" type="datetimeFigureOut">
               <a:rPr lang="LID4096" smtClean="0"/>
-              <a:t>02/05/2026</a:t>
+              <a:t>02/06/2026</a:t>
             </a:fld>
             <a:endParaRPr lang="LID4096"/>
           </a:p>
@@ -7134,7 +7124,7 @@
           <a:p>
             <a:fld id="{C16EB631-5B1A-4879-85E7-A8D4C94FBFC5}" type="datetimeFigureOut">
               <a:rPr lang="LID4096" smtClean="0"/>
-              <a:t>02/05/2026</a:t>
+              <a:t>02/06/2026</a:t>
             </a:fld>
             <a:endParaRPr lang="LID4096"/>
           </a:p>
@@ -7247,7 +7237,7 @@
           <a:p>
             <a:fld id="{C16EB631-5B1A-4879-85E7-A8D4C94FBFC5}" type="datetimeFigureOut">
               <a:rPr lang="LID4096" smtClean="0"/>
-              <a:t>02/05/2026</a:t>
+              <a:t>02/06/2026</a:t>
             </a:fld>
             <a:endParaRPr lang="LID4096"/>
           </a:p>
@@ -7560,7 +7550,7 @@
           <a:p>
             <a:fld id="{C16EB631-5B1A-4879-85E7-A8D4C94FBFC5}" type="datetimeFigureOut">
               <a:rPr lang="LID4096" smtClean="0"/>
-              <a:t>02/05/2026</a:t>
+              <a:t>02/06/2026</a:t>
             </a:fld>
             <a:endParaRPr lang="LID4096"/>
           </a:p>
@@ -7803,7 +7793,7 @@
           <a:p>
             <a:fld id="{C16EB631-5B1A-4879-85E7-A8D4C94FBFC5}" type="datetimeFigureOut">
               <a:rPr lang="LID4096" smtClean="0"/>
-              <a:t>02/05/2026</a:t>
+              <a:t>02/06/2026</a:t>
             </a:fld>
             <a:endParaRPr lang="LID4096"/>
           </a:p>
@@ -29487,7 +29477,7 @@
           <a:p>
             <a:fld id="{9D7AC8C6-7D5A-454E-9AA8-5FD8ED471EB1}" type="datetime1">
               <a:rPr lang="LID4096" smtClean="0"/>
-              <a:t>02/05/2026</a:t>
+              <a:t>02/06/2026</a:t>
             </a:fld>
             <a:endParaRPr lang="LID4096"/>
           </a:p>
@@ -30830,7 +30820,7 @@
           <a:p>
             <a:fld id="{9D7AC8C6-7D5A-454E-9AA8-5FD8ED471EB1}" type="datetime1">
               <a:rPr lang="LID4096" smtClean="0"/>
-              <a:t>02/05/2026</a:t>
+              <a:t>02/06/2026</a:t>
             </a:fld>
             <a:endParaRPr lang="LID4096"/>
           </a:p>
@@ -31695,7 +31685,7 @@
           <a:p>
             <a:fld id="{10ECE148-BD56-4755-B580-741EAF415DA4}" type="datetime1">
               <a:rPr lang="LID4096" smtClean="0"/>
-              <a:t>02/05/2026</a:t>
+              <a:t>02/06/2026</a:t>
             </a:fld>
             <a:endParaRPr lang="LID4096"/>
           </a:p>
@@ -32131,7 +32121,7 @@
           <a:p>
             <a:fld id="{10ECE148-BD56-4755-B580-741EAF415DA4}" type="datetime1">
               <a:rPr lang="LID4096" smtClean="0"/>
-              <a:t>02/05/2026</a:t>
+              <a:t>02/06/2026</a:t>
             </a:fld>
             <a:endParaRPr lang="LID4096"/>
           </a:p>
@@ -33782,7 +33772,7 @@
           <a:p>
             <a:fld id="{9D7AC8C6-7D5A-454E-9AA8-5FD8ED471EB1}" type="datetime1">
               <a:rPr lang="LID4096" smtClean="0"/>
-              <a:t>02/05/2026</a:t>
+              <a:t>02/06/2026</a:t>
             </a:fld>
             <a:endParaRPr lang="LID4096"/>
           </a:p>
@@ -35027,7 +35017,7 @@
           <a:p>
             <a:fld id="{9D7AC8C6-7D5A-454E-9AA8-5FD8ED471EB1}" type="datetime1">
               <a:rPr lang="LID4096" smtClean="0"/>
-              <a:t>02/05/2026</a:t>
+              <a:t>02/06/2026</a:t>
             </a:fld>
             <a:endParaRPr lang="LID4096"/>
           </a:p>
@@ -36894,7 +36884,7 @@
           <a:p>
             <a:fld id="{9D7AC8C6-7D5A-454E-9AA8-5FD8ED471EB1}" type="datetime1">
               <a:rPr lang="LID4096" smtClean="0"/>
-              <a:t>02/05/2026</a:t>
+              <a:t>02/06/2026</a:t>
             </a:fld>
             <a:endParaRPr lang="LID4096"/>
           </a:p>
@@ -38989,7 +38979,7 @@
           <a:p>
             <a:fld id="{9D7AC8C6-7D5A-454E-9AA8-5FD8ED471EB1}" type="datetime1">
               <a:rPr lang="LID4096" smtClean="0"/>
-              <a:t>02/05/2026</a:t>
+              <a:t>02/06/2026</a:t>
             </a:fld>
             <a:endParaRPr lang="LID4096"/>
           </a:p>
@@ -41576,7 +41566,7 @@
           <a:p>
             <a:fld id="{9D7AC8C6-7D5A-454E-9AA8-5FD8ED471EB1}" type="datetime1">
               <a:rPr lang="LID4096" smtClean="0"/>
-              <a:t>02/05/2026</a:t>
+              <a:t>02/06/2026</a:t>
             </a:fld>
             <a:endParaRPr lang="LID4096"/>
           </a:p>
@@ -43148,47 +43138,6 @@
           <a:p>
             <a:pPr algn="ctr"/>
             <a:endParaRPr lang="LID4096"/>
-          </a:p>
-        </p:txBody>
-      </p:sp>
-      <p:sp>
-        <p:nvSpPr>
-          <p:cNvPr id="39" name="TextBox 38">
-            <a:extLst>
-              <a:ext uri="{FF2B5EF4-FFF2-40B4-BE49-F238E27FC236}">
-                <a16:creationId xmlns:a16="http://schemas.microsoft.com/office/drawing/2014/main" id="{2D76E59A-02B0-C68F-3D58-F67D95977C14}"/>
-              </a:ext>
-            </a:extLst>
-          </p:cNvPr>
-          <p:cNvSpPr txBox="1"/>
-          <p:nvPr/>
-        </p:nvSpPr>
-        <p:spPr>
-          <a:xfrm>
-            <a:off x="6739140" y="2372027"/>
-            <a:ext cx="1314523" cy="261610"/>
-          </a:xfrm>
-          <a:prstGeom prst="rect">
-            <a:avLst/>
-          </a:prstGeom>
-          <a:noFill/>
-        </p:spPr>
-        <p:txBody>
-          <a:bodyPr wrap="square" rtlCol="0">
-            <a:spAutoFit/>
-          </a:bodyPr>
-          <a:lstStyle/>
-          <a:p>
-            <a:pPr algn="r"/>
-            <a:r>
-              <a:rPr lang="sv-SE" sz="1100" b="1"/>
-              <a:t>d: </a:t>
-            </a:r>
-            <a:r>
-              <a:rPr lang="sv-SE" sz="1100"/>
-              <a:t>0x2001FFFC</a:t>
-            </a:r>
-            <a:endParaRPr lang="LID4096" sz="1100"/>
           </a:p>
         </p:txBody>
       </p:sp>
